--- a/GitArchitect_Screenshot_Walkthrough.pptx
+++ b/GitArchitect_Screenshot_Walkthrough.pptx
@@ -2,26 +2,28 @@
 <file path=ppt/presentation.xml><?xml version="1.0" encoding="utf-8"?>
 <p:presentation xmlns:p="http://schemas.openxmlformats.org/presentationml/2006/main">
   <p:sldMasterIdLst>
-    <p:sldMasterId xmlns:r="http://schemas.openxmlformats.org/officeDocument/2006/relationships" id="2147483648" r:id="R4128959602ab4ab0"/>
+    <p:sldMasterId xmlns:r="http://schemas.openxmlformats.org/officeDocument/2006/relationships" id="2147483648" r:id="R472276b84d7e4672"/>
   </p:sldMasterIdLst>
   <p:notesMasterIdLst>
-    <p:notesMasterId xmlns:r="http://schemas.openxmlformats.org/officeDocument/2006/relationships" r:id="Ra3e297b0c9644913"/>
+    <p:notesMasterId xmlns:r="http://schemas.openxmlformats.org/officeDocument/2006/relationships" r:id="R52aa5b5c765d4b82"/>
   </p:notesMasterIdLst>
   <p:sldIdLst>
-    <p:sldId xmlns:r="http://schemas.openxmlformats.org/officeDocument/2006/relationships" id="256" r:id="Rc14acc846e1c4c1f"/>
-    <p:sldId xmlns:r="http://schemas.openxmlformats.org/officeDocument/2006/relationships" id="257" r:id="R85aab1935dbc4f34"/>
-    <p:sldId xmlns:r="http://schemas.openxmlformats.org/officeDocument/2006/relationships" id="258" r:id="R9aa1ef91676e46ed"/>
-    <p:sldId xmlns:r="http://schemas.openxmlformats.org/officeDocument/2006/relationships" id="259" r:id="R0d8d30ddd9914fd7"/>
-    <p:sldId xmlns:r="http://schemas.openxmlformats.org/officeDocument/2006/relationships" id="260" r:id="R50edf295a01940a9"/>
-    <p:sldId xmlns:r="http://schemas.openxmlformats.org/officeDocument/2006/relationships" id="261" r:id="R4004d0304b37402a"/>
-    <p:sldId xmlns:r="http://schemas.openxmlformats.org/officeDocument/2006/relationships" id="262" r:id="Rb604cff2b9a04ee8"/>
-    <p:sldId xmlns:r="http://schemas.openxmlformats.org/officeDocument/2006/relationships" id="263" r:id="R35bb1fc50a484fef"/>
-    <p:sldId xmlns:r="http://schemas.openxmlformats.org/officeDocument/2006/relationships" id="264" r:id="Rdfb59bc353f44156"/>
-    <p:sldId xmlns:r="http://schemas.openxmlformats.org/officeDocument/2006/relationships" id="265" r:id="R6de6b75642c0454b"/>
-    <p:sldId xmlns:r="http://schemas.openxmlformats.org/officeDocument/2006/relationships" id="266" r:id="Raa66813e82024834"/>
-    <p:sldId xmlns:r="http://schemas.openxmlformats.org/officeDocument/2006/relationships" id="267" r:id="R3322365c6b5b496a"/>
-    <p:sldId xmlns:r="http://schemas.openxmlformats.org/officeDocument/2006/relationships" id="268" r:id="Rd0b9e93ab0d54d33"/>
-    <p:sldId xmlns:r="http://schemas.openxmlformats.org/officeDocument/2006/relationships" id="269" r:id="R0629b1abc02e4d5d"/>
+    <p:sldId xmlns:r="http://schemas.openxmlformats.org/officeDocument/2006/relationships" id="256" r:id="R919c4f4493814a42"/>
+    <p:sldId xmlns:r="http://schemas.openxmlformats.org/officeDocument/2006/relationships" id="257" r:id="Rbb2a2086b4424e9a"/>
+    <p:sldId xmlns:r="http://schemas.openxmlformats.org/officeDocument/2006/relationships" id="258" r:id="Rad4c8ee01f674565"/>
+    <p:sldId xmlns:r="http://schemas.openxmlformats.org/officeDocument/2006/relationships" id="259" r:id="Ra2eb5fb4f1c64a55"/>
+    <p:sldId xmlns:r="http://schemas.openxmlformats.org/officeDocument/2006/relationships" id="260" r:id="Rd3d45b9ab23a417e"/>
+    <p:sldId xmlns:r="http://schemas.openxmlformats.org/officeDocument/2006/relationships" id="261" r:id="Rbcd4f26a9e5d492c"/>
+    <p:sldId xmlns:r="http://schemas.openxmlformats.org/officeDocument/2006/relationships" id="262" r:id="R68a397ca37d2466d"/>
+    <p:sldId xmlns:r="http://schemas.openxmlformats.org/officeDocument/2006/relationships" id="263" r:id="R44f81bef258c47d7"/>
+    <p:sldId xmlns:r="http://schemas.openxmlformats.org/officeDocument/2006/relationships" id="264" r:id="R42fc368883584ed9"/>
+    <p:sldId xmlns:r="http://schemas.openxmlformats.org/officeDocument/2006/relationships" id="265" r:id="Ra4c21379273747cd"/>
+    <p:sldId xmlns:r="http://schemas.openxmlformats.org/officeDocument/2006/relationships" id="266" r:id="Rb3ca0a0f7ff24667"/>
+    <p:sldId xmlns:r="http://schemas.openxmlformats.org/officeDocument/2006/relationships" id="267" r:id="Rb42fff8d9c9f4a3d"/>
+    <p:sldId xmlns:r="http://schemas.openxmlformats.org/officeDocument/2006/relationships" id="268" r:id="Rf836638d5fc348c5"/>
+    <p:sldId xmlns:r="http://schemas.openxmlformats.org/officeDocument/2006/relationships" id="269" r:id="R82f4a743310942f5"/>
+    <p:sldId xmlns:r="http://schemas.openxmlformats.org/officeDocument/2006/relationships" id="270" r:id="Rd3246810aa7f4aec"/>
+    <p:sldId xmlns:r="http://schemas.openxmlformats.org/officeDocument/2006/relationships" id="271" r:id="R1a87671899ec4b5f"/>
   </p:sldIdLst>
   <p:sldSz cx="12192000" cy="6858000"/>
   <p:notesSz cx="6858000" cy="9144000"/>
@@ -570,7 +572,7 @@
           </a:p>
           <a:p xmlns:a="http://schemas.openxmlformats.org/drawingml/2006/main">
             <a:r>
-              <a:t>Screenshot: C:/Users/DIPAKA~1/AppData/Local/Temp/codex-clipboard-9734fec6-c3d1-49af-b832-09c0b01fb495.png</a:t>
+              <a:t>Screenshot: C:/Users/DIPAKA~1/AppData/Local/Temp/codex-clipboard-fea1cfd7-ade2-43b7-81fd-f10e2f405837.png</a:t>
             </a:r>
           </a:p>
           <a:p xmlns:a="http://schemas.openxmlformats.org/drawingml/2006/main">
@@ -665,7 +667,7 @@
           </a:p>
           <a:p xmlns:a="http://schemas.openxmlformats.org/drawingml/2006/main">
             <a:r>
-              <a:t>Screenshot: C:/Users/DIPAKA~1/AppData/Local/Temp/codex-clipboard-35bea36d-f33d-4974-9134-aef53987d983.png</a:t>
+              <a:t>Screenshot: C:/Users/DIPAKA~1/AppData/Local/Temp/codex-clipboard-45238fc8-8222-4d03-bffd-eb021f6d4990.png</a:t>
             </a:r>
           </a:p>
           <a:p xmlns:a="http://schemas.openxmlformats.org/drawingml/2006/main">
@@ -760,7 +762,7 @@
           </a:p>
           <a:p xmlns:a="http://schemas.openxmlformats.org/drawingml/2006/main">
             <a:r>
-              <a:t>Screenshot: C:/Users/DIPAKA~1/AppData/Local/Temp/codex-clipboard-adb709c3-420e-4c36-98a0-aa2db1ec5750.png</a:t>
+              <a:t>Screenshot: C:/Users/DIPAKA~1/AppData/Local/Temp/codex-clipboard-9734fec6-c3d1-49af-b832-09c0b01fb495.png</a:t>
             </a:r>
           </a:p>
           <a:p xmlns:a="http://schemas.openxmlformats.org/drawingml/2006/main">
@@ -855,7 +857,7 @@
           </a:p>
           <a:p xmlns:a="http://schemas.openxmlformats.org/drawingml/2006/main">
             <a:r>
-              <a:t>Screenshot: C:/Users/DIPAKA~1/AppData/Local/Temp/codex-clipboard-fdb76072-0d24-4904-9475-9ff122e51458.png</a:t>
+              <a:t>Screenshot: C:/Users/DIPAKA~1/AppData/Local/Temp/codex-clipboard-35bea36d-f33d-4974-9134-aef53987d983.png</a:t>
             </a:r>
           </a:p>
           <a:p xmlns:a="http://schemas.openxmlformats.org/drawingml/2006/main">
@@ -940,6 +942,196 @@
           <a:lstStyle xmlns:a="http://schemas.openxmlformats.org/drawingml/2006/main"/>
           <a:p xmlns:a="http://schemas.openxmlformats.org/drawingml/2006/main">
             <a:r>
+              <a:t/>
+            </a:r>
+          </a:p>
+          <a:p xmlns:a="http://schemas.openxmlformats.org/drawingml/2006/main">
+            <a:r>
+              <a:t>[Sources]</a:t>
+            </a:r>
+          </a:p>
+          <a:p xmlns:a="http://schemas.openxmlformats.org/drawingml/2006/main">
+            <a:r>
+              <a:t>Screenshot: C:/Users/DIPAKA~1/AppData/Local/Temp/codex-clipboard-adb709c3-420e-4c36-98a0-aa2db1ec5750.png</a:t>
+            </a:r>
+          </a:p>
+          <a:p xmlns:a="http://schemas.openxmlformats.org/drawingml/2006/main">
+            <a:r>
+              <a:t>Frontend route map: frontend/src/app/app.routes.ts.</a:t>
+            </a:r>
+          </a:p>
+          <a:p xmlns:a="http://schemas.openxmlformats.org/drawingml/2006/main">
+            <a:r>
+              <a:t>Frontend API integration: frontend/src/app/core/api/agent-api.service.ts and frontend/src/app/core/api/github-api.service.ts.</a:t>
+            </a:r>
+          </a:p>
+          <a:p xmlns:a="http://schemas.openxmlformats.org/drawingml/2006/main">
+            <a:r>
+              <a:t>Backend route map: backend/src/routes/agent.routes.ts and backend/src/routes/github.routes.ts.</a:t>
+            </a:r>
+          </a:p>
+        </p:txBody>
+      </p:sp>
+      <p:sp>
+        <p:nvSpPr>
+          <p:cNvPr id="4" name="Slide Number Placeholder 3"/>
+          <p:cNvSpPr>
+            <a:spLocks xmlns:a="http://schemas.openxmlformats.org/drawingml/2006/main" noGrp="1"/>
+          </p:cNvSpPr>
+          <p:nvPr>
+            <p:ph type="sldNum" idx="5"/>
+          </p:nvPr>
+        </p:nvSpPr>
+        <p:spPr/>
+        <p:txBody>
+          <a:bodyPr xmlns:a="http://schemas.openxmlformats.org/drawingml/2006/main"/>
+          <a:lstStyle xmlns:a="http://schemas.openxmlformats.org/drawingml/2006/main"/>
+          <a:p xmlns:a="http://schemas.openxmlformats.org/drawingml/2006/main"/>
+        </p:txBody>
+      </p:sp>
+    </p:spTree>
+  </p:cSld>
+  <p:clrMapOvr>
+    <a:masterClrMapping xmlns:a="http://schemas.openxmlformats.org/drawingml/2006/main"/>
+  </p:clrMapOvr>
+</p:notes>
+</file>
+
+<file path=ppt/notesSlides/notesSlide15.xml><?xml version="1.0" encoding="utf-8"?>
+<p:notes xmlns:p="http://schemas.openxmlformats.org/presentationml/2006/main">
+  <p:cSld>
+    <p:spTree>
+      <p:nvGrpSpPr>
+        <p:cNvPr id="1" name=""/>
+        <p:cNvGrpSpPr/>
+        <p:nvPr/>
+      </p:nvGrpSpPr>
+      <p:grpSpPr>
+        <a:xfrm xmlns:a="http://schemas.openxmlformats.org/drawingml/2006/main"/>
+      </p:grpSpPr>
+      <p:sp>
+        <p:nvSpPr>
+          <p:cNvPr id="2" name="Slide Image Placeholder 1"/>
+          <p:cNvSpPr>
+            <a:spLocks xmlns:a="http://schemas.openxmlformats.org/drawingml/2006/main" noGrp="1"/>
+          </p:cNvSpPr>
+          <p:nvPr>
+            <p:ph type="sldImg" idx="0"/>
+          </p:nvPr>
+        </p:nvSpPr>
+        <p:spPr/>
+      </p:sp>
+      <p:sp>
+        <p:nvSpPr>
+          <p:cNvPr id="3" name="Notes Placeholder 2"/>
+          <p:cNvSpPr>
+            <a:spLocks xmlns:a="http://schemas.openxmlformats.org/drawingml/2006/main" noGrp="1"/>
+          </p:cNvSpPr>
+          <p:nvPr>
+            <p:ph type="body" idx="1"/>
+          </p:nvPr>
+        </p:nvSpPr>
+        <p:spPr/>
+        <p:txBody>
+          <a:bodyPr xmlns:a="http://schemas.openxmlformats.org/drawingml/2006/main"/>
+          <a:lstStyle xmlns:a="http://schemas.openxmlformats.org/drawingml/2006/main"/>
+          <a:p xmlns:a="http://schemas.openxmlformats.org/drawingml/2006/main">
+            <a:r>
+              <a:t/>
+            </a:r>
+          </a:p>
+          <a:p xmlns:a="http://schemas.openxmlformats.org/drawingml/2006/main">
+            <a:r>
+              <a:t>[Sources]</a:t>
+            </a:r>
+          </a:p>
+          <a:p xmlns:a="http://schemas.openxmlformats.org/drawingml/2006/main">
+            <a:r>
+              <a:t>Screenshot: C:/Users/DIPAKA~1/AppData/Local/Temp/codex-clipboard-fdb76072-0d24-4904-9475-9ff122e51458.png</a:t>
+            </a:r>
+          </a:p>
+          <a:p xmlns:a="http://schemas.openxmlformats.org/drawingml/2006/main">
+            <a:r>
+              <a:t>Frontend route map: frontend/src/app/app.routes.ts.</a:t>
+            </a:r>
+          </a:p>
+          <a:p xmlns:a="http://schemas.openxmlformats.org/drawingml/2006/main">
+            <a:r>
+              <a:t>Frontend API integration: frontend/src/app/core/api/agent-api.service.ts and frontend/src/app/core/api/github-api.service.ts.</a:t>
+            </a:r>
+          </a:p>
+          <a:p xmlns:a="http://schemas.openxmlformats.org/drawingml/2006/main">
+            <a:r>
+              <a:t>Backend route map: backend/src/routes/agent.routes.ts and backend/src/routes/github.routes.ts.</a:t>
+            </a:r>
+          </a:p>
+        </p:txBody>
+      </p:sp>
+      <p:sp>
+        <p:nvSpPr>
+          <p:cNvPr id="4" name="Slide Number Placeholder 3"/>
+          <p:cNvSpPr>
+            <a:spLocks xmlns:a="http://schemas.openxmlformats.org/drawingml/2006/main" noGrp="1"/>
+          </p:cNvSpPr>
+          <p:nvPr>
+            <p:ph type="sldNum" idx="5"/>
+          </p:nvPr>
+        </p:nvSpPr>
+        <p:spPr/>
+        <p:txBody>
+          <a:bodyPr xmlns:a="http://schemas.openxmlformats.org/drawingml/2006/main"/>
+          <a:lstStyle xmlns:a="http://schemas.openxmlformats.org/drawingml/2006/main"/>
+          <a:p xmlns:a="http://schemas.openxmlformats.org/drawingml/2006/main"/>
+        </p:txBody>
+      </p:sp>
+    </p:spTree>
+  </p:cSld>
+  <p:clrMapOvr>
+    <a:masterClrMapping xmlns:a="http://schemas.openxmlformats.org/drawingml/2006/main"/>
+  </p:clrMapOvr>
+</p:notes>
+</file>
+
+<file path=ppt/notesSlides/notesSlide16.xml><?xml version="1.0" encoding="utf-8"?>
+<p:notes xmlns:p="http://schemas.openxmlformats.org/presentationml/2006/main">
+  <p:cSld>
+    <p:spTree>
+      <p:nvGrpSpPr>
+        <p:cNvPr id="1" name=""/>
+        <p:cNvGrpSpPr/>
+        <p:nvPr/>
+      </p:nvGrpSpPr>
+      <p:grpSpPr>
+        <a:xfrm xmlns:a="http://schemas.openxmlformats.org/drawingml/2006/main"/>
+      </p:grpSpPr>
+      <p:sp>
+        <p:nvSpPr>
+          <p:cNvPr id="2" name="Slide Image Placeholder 1"/>
+          <p:cNvSpPr>
+            <a:spLocks xmlns:a="http://schemas.openxmlformats.org/drawingml/2006/main" noGrp="1"/>
+          </p:cNvSpPr>
+          <p:nvPr>
+            <p:ph type="sldImg" idx="0"/>
+          </p:nvPr>
+        </p:nvSpPr>
+        <p:spPr/>
+      </p:sp>
+      <p:sp>
+        <p:nvSpPr>
+          <p:cNvPr id="3" name="Notes Placeholder 2"/>
+          <p:cNvSpPr>
+            <a:spLocks xmlns:a="http://schemas.openxmlformats.org/drawingml/2006/main" noGrp="1"/>
+          </p:cNvSpPr>
+          <p:nvPr>
+            <p:ph type="body" idx="1"/>
+          </p:nvPr>
+        </p:nvSpPr>
+        <p:spPr/>
+        <p:txBody>
+          <a:bodyPr xmlns:a="http://schemas.openxmlformats.org/drawingml/2006/main"/>
+          <a:lstStyle xmlns:a="http://schemas.openxmlformats.org/drawingml/2006/main"/>
+          <a:p xmlns:a="http://schemas.openxmlformats.org/drawingml/2006/main">
+            <a:r>
               <a:t>Close by tying UI behavior to the backend architecture.</a:t>
             </a:r>
           </a:p>
@@ -1235,6 +1427,16 @@
           <a:lstStyle xmlns:a="http://schemas.openxmlformats.org/drawingml/2006/main"/>
           <a:p xmlns:a="http://schemas.openxmlformats.org/drawingml/2006/main">
             <a:r>
+              <a:t>Use this slide to explain that AI Chat is repository-aware, not a generic Q&amp;A screen.</a:t>
+            </a:r>
+          </a:p>
+          <a:p xmlns:a="http://schemas.openxmlformats.org/drawingml/2006/main">
+            <a:r>
+              <a:t>The example answer names auth module files and middleware paths found from the selected repository context.</a:t>
+            </a:r>
+          </a:p>
+          <a:p xmlns:a="http://schemas.openxmlformats.org/drawingml/2006/main">
+            <a:r>
               <a:t/>
             </a:r>
           </a:p>
@@ -1245,7 +1447,7 @@
           </a:p>
           <a:p xmlns:a="http://schemas.openxmlformats.org/drawingml/2006/main">
             <a:r>
-              <a:t>Screenshot: C:/Users/DIPAKA~1/AppData/Local/Temp/codex-clipboard-af03a7ee-f5fc-4f9b-8e85-24c74c0e08d2.png</a:t>
+              <a:t>Screenshot: C:/Users/DIPAKA~1/AppData/Local/Temp/codex-clipboard-b4078371-dc8e-4c57-aa32-23747dc3cf6c.png</a:t>
             </a:r>
           </a:p>
           <a:p xmlns:a="http://schemas.openxmlformats.org/drawingml/2006/main">
@@ -1330,6 +1532,11 @@
           <a:lstStyle xmlns:a="http://schemas.openxmlformats.org/drawingml/2006/main"/>
           <a:p xmlns:a="http://schemas.openxmlformats.org/drawingml/2006/main">
             <a:r>
+              <a:t>Use this slide to explain that Repository Intelligence starts with a high-level health summary.</a:t>
+            </a:r>
+          </a:p>
+          <a:p xmlns:a="http://schemas.openxmlformats.org/drawingml/2006/main">
+            <a:r>
               <a:t/>
             </a:r>
           </a:p>
@@ -1340,7 +1547,7 @@
           </a:p>
           <a:p xmlns:a="http://schemas.openxmlformats.org/drawingml/2006/main">
             <a:r>
-              <a:t>Screenshot: C:/Users/DIPAKA~1/AppData/Local/Temp/codex-clipboard-1eeb28f5-fe64-4f80-a1ad-2d5106eb4487.png</a:t>
+              <a:t>Screenshot: C:/Users/DIPAKA~1/AppData/Local/Temp/codex-clipboard-3fec33c6-10d2-4e89-abe1-c80e53e1b05e.png</a:t>
             </a:r>
           </a:p>
           <a:p xmlns:a="http://schemas.openxmlformats.org/drawingml/2006/main">
@@ -1425,6 +1632,11 @@
           <a:lstStyle xmlns:a="http://schemas.openxmlformats.org/drawingml/2006/main"/>
           <a:p xmlns:a="http://schemas.openxmlformats.org/drawingml/2006/main">
             <a:r>
+              <a:t>Use this slide to explain that the report is evidence-based, not just a score.</a:t>
+            </a:r>
+          </a:p>
+          <a:p xmlns:a="http://schemas.openxmlformats.org/drawingml/2006/main">
+            <a:r>
               <a:t/>
             </a:r>
           </a:p>
@@ -1435,7 +1647,7 @@
           </a:p>
           <a:p xmlns:a="http://schemas.openxmlformats.org/drawingml/2006/main">
             <a:r>
-              <a:t>Screenshot: C:/Users/DIPAKA~1/AppData/Local/Temp/codex-clipboard-9405c371-76b2-4a48-b19d-3f6dfa3c37ea.png</a:t>
+              <a:t>Screenshot: C:/Users/DIPAKA~1/AppData/Local/Temp/codex-clipboard-24b8ceec-af59-48b0-8b90-f50a9eb1a5b8.png</a:t>
             </a:r>
           </a:p>
           <a:p xmlns:a="http://schemas.openxmlformats.org/drawingml/2006/main">
@@ -1520,6 +1732,11 @@
           <a:lstStyle xmlns:a="http://schemas.openxmlformats.org/drawingml/2006/main"/>
           <a:p xmlns:a="http://schemas.openxmlformats.org/drawingml/2006/main">
             <a:r>
+              <a:t>Use this slide to call out that recommendation rendering should unwrap object fields instead of showing [object Object].</a:t>
+            </a:r>
+          </a:p>
+          <a:p xmlns:a="http://schemas.openxmlformats.org/drawingml/2006/main">
+            <a:r>
               <a:t/>
             </a:r>
           </a:p>
@@ -1530,7 +1747,7 @@
           </a:p>
           <a:p xmlns:a="http://schemas.openxmlformats.org/drawingml/2006/main">
             <a:r>
-              <a:t>Screenshot: C:/Users/DIPAKA~1/AppData/Local/Temp/codex-clipboard-a1ef119c-4f60-4bd5-80b6-2a326e8e27ca.png</a:t>
+              <a:t>Screenshot: C:/Users/DIPAKA~1/AppData/Local/Temp/codex-clipboard-cfe6bfb4-cacb-4f63-93e7-342b463b4c6a.png</a:t>
             </a:r>
           </a:p>
           <a:p xmlns:a="http://schemas.openxmlformats.org/drawingml/2006/main">
@@ -1625,7 +1842,7 @@
           </a:p>
           <a:p xmlns:a="http://schemas.openxmlformats.org/drawingml/2006/main">
             <a:r>
-              <a:t>Screenshot: C:/Users/DIPAKA~1/AppData/Local/Temp/codex-clipboard-fea1cfd7-ade2-43b7-81fd-f10e2f405837.png</a:t>
+              <a:t>Screenshot: C:/Users/DIPAKA~1/AppData/Local/Temp/codex-clipboard-9405c371-76b2-4a48-b19d-3f6dfa3c37ea.png</a:t>
             </a:r>
           </a:p>
           <a:p xmlns:a="http://schemas.openxmlformats.org/drawingml/2006/main">
@@ -1720,7 +1937,7 @@
           </a:p>
           <a:p xmlns:a="http://schemas.openxmlformats.org/drawingml/2006/main">
             <a:r>
-              <a:t>Screenshot: C:/Users/DIPAKA~1/AppData/Local/Temp/codex-clipboard-45238fc8-8222-4d03-bffd-eb021f6d4990.png</a:t>
+              <a:t>Screenshot: C:/Users/DIPAKA~1/AppData/Local/Temp/codex-clipboard-a1ef119c-4f60-4bd5-80b6-2a326e8e27ca.png</a:t>
             </a:r>
           </a:p>
           <a:p xmlns:a="http://schemas.openxmlformats.org/drawingml/2006/main">
@@ -1803,7 +2020,7 @@
   </p:cSld>
   <p:clrMap bg1="lt1" tx1="dk1" bg2="lt2" tx2="dk2" accent1="accent1" accent2="accent2" accent3="accent3" accent4="accent4" accent5="accent5" accent6="accent6" hlink="hlink" folHlink="folHlink"/>
   <p:sldLayoutIdLst>
-    <p:sldLayoutId xmlns:r="http://schemas.openxmlformats.org/officeDocument/2006/relationships" id="2147483649" r:id="Ra51db629a008473d"/>
+    <p:sldLayoutId xmlns:r="http://schemas.openxmlformats.org/officeDocument/2006/relationships" id="2147483649" r:id="R6bdef31a21c34fb8"/>
   </p:sldLayoutIdLst>
   <p:txStyles>
     <p:titleStyle>
@@ -2354,7 +2571,7 @@
           <p:cNvPr id="8" name="">
             <a:extLst xmlns:a="http://schemas.openxmlformats.org/drawingml/2006/main">
               <a:ext uri="{FF2B5EF4-FFF2-40B4-BE49-F238E27FC236}">
-                <a16:creationId xmlns:a16="http://schemas.microsoft.com/office/drawing/2014/main" id="{59362105-A691-4D59-AEA8-DB2DF87012C5}"/>
+                <a16:creationId xmlns:a16="http://schemas.microsoft.com/office/drawing/2014/main" id="{FF5C251E-2565-49C2-AE01-1960CC457359}"/>
               </a:ext>
             </a:extLst>
           </p:cNvPr>
@@ -2387,7 +2604,7 @@
           <p:cNvPr id="2" name="">
             <a:extLst xmlns:a="http://schemas.openxmlformats.org/drawingml/2006/main">
               <a:ext uri="{FF2B5EF4-FFF2-40B4-BE49-F238E27FC236}">
-                <a16:creationId xmlns:a16="http://schemas.microsoft.com/office/drawing/2014/main" id="{AEB2A69E-BBDF-431B-9523-6A8D7353D26F}"/>
+                <a16:creationId xmlns:a16="http://schemas.microsoft.com/office/drawing/2014/main" id="{1EC08326-26C9-461A-8E5C-D4C9E89B6331}"/>
               </a:ext>
             </a:extLst>
           </p:cNvPr>
@@ -2437,7 +2654,7 @@
           <p:cNvPr id="3" name="">
             <a:extLst xmlns:a="http://schemas.openxmlformats.org/drawingml/2006/main">
               <a:ext uri="{FF2B5EF4-FFF2-40B4-BE49-F238E27FC236}">
-                <a16:creationId xmlns:a16="http://schemas.microsoft.com/office/drawing/2014/main" id="{1D9845AF-6B1E-47D5-A01B-3B9B10FF2FBC}"/>
+                <a16:creationId xmlns:a16="http://schemas.microsoft.com/office/drawing/2014/main" id="{AB984765-9BDB-4415-9783-80A530C0C331}"/>
               </a:ext>
             </a:extLst>
           </p:cNvPr>
@@ -2477,7 +2694,7 @@
                   <a:srgbClr val="536179"/>
                 </a:solidFill>
               </a:rPr>
-              <a:t>Screen-by-screen product walkthrough</a:t>
+              <a:t>AI-powered GitHub engineering assistant</a:t>
             </a:r>
           </a:p>
         </p:txBody>
@@ -2487,47 +2704,64 @@
           <p:cNvPr id="4" name="">
             <a:extLst xmlns:a="http://schemas.openxmlformats.org/drawingml/2006/main">
               <a:ext uri="{FF2B5EF4-FFF2-40B4-BE49-F238E27FC236}">
-                <a16:creationId xmlns:a16="http://schemas.microsoft.com/office/drawing/2014/main" id="{04116DE6-E245-4FE3-8FCE-7C05256B4516}"/>
-              </a:ext>
-            </a:extLst>
-          </p:cNvPr>
-          <p:cNvSpPr>
-            <a:spLocks xmlns:a="http://schemas.openxmlformats.org/drawingml/2006/main" noGrp="1"/>
-          </p:cNvSpPr>
-          <p:nvPr/>
-        </p:nvSpPr>
-        <p:spPr>
-          <a:xfrm xmlns:a="http://schemas.openxmlformats.org/drawingml/2006/main">
-            <a:off x="781050" y="3105150"/>
-            <a:ext cx="7239000" cy="800100"/>
-          </a:xfrm>
-          <a:prstGeom xmlns:a="http://schemas.openxmlformats.org/drawingml/2006/main" prst="rect">
-            <a:avLst/>
-          </a:prstGeom>
-          <a:noFill xmlns:a="http://schemas.openxmlformats.org/drawingml/2006/main"/>
-          <a:ln xmlns:a="http://schemas.openxmlformats.org/drawingml/2006/main" w="0">
-            <a:noFill/>
-            <a:prstDash val="solid"/>
-          </a:ln>
-        </p:spPr>
-        <p:txBody>
-          <a:bodyPr xmlns:a="http://schemas.openxmlformats.org/drawingml/2006/main"/>
-          <a:lstStyle xmlns:a="http://schemas.openxmlformats.org/drawingml/2006/main"/>
-          <a:p xmlns:a="http://schemas.openxmlformats.org/drawingml/2006/main">
-            <a:pPr algn="l">
-              <a:defRPr sz="1800" b="0">
+                <a16:creationId xmlns:a16="http://schemas.microsoft.com/office/drawing/2014/main" id="{4A78AF2E-F84D-4E02-BAEE-38FDA582062A}"/>
+              </a:ext>
+            </a:extLst>
+          </p:cNvPr>
+          <p:cNvSpPr>
+            <a:spLocks xmlns:a="http://schemas.openxmlformats.org/drawingml/2006/main" noGrp="1"/>
+          </p:cNvSpPr>
+          <p:nvPr/>
+        </p:nvSpPr>
+        <p:spPr>
+          <a:xfrm xmlns:a="http://schemas.openxmlformats.org/drawingml/2006/main">
+            <a:off x="781050" y="2952750"/>
+            <a:ext cx="7239000" cy="1104900"/>
+          </a:xfrm>
+          <a:prstGeom xmlns:a="http://schemas.openxmlformats.org/drawingml/2006/main" prst="rect">
+            <a:avLst/>
+          </a:prstGeom>
+          <a:noFill xmlns:a="http://schemas.openxmlformats.org/drawingml/2006/main"/>
+          <a:ln xmlns:a="http://schemas.openxmlformats.org/drawingml/2006/main" w="0">
+            <a:noFill/>
+            <a:prstDash val="solid"/>
+          </a:ln>
+        </p:spPr>
+        <p:txBody>
+          <a:bodyPr xmlns:a="http://schemas.openxmlformats.org/drawingml/2006/main"/>
+          <a:lstStyle xmlns:a="http://schemas.openxmlformats.org/drawingml/2006/main"/>
+          <a:p xmlns:a="http://schemas.openxmlformats.org/drawingml/2006/main">
+            <a:pPr algn="l">
+              <a:defRPr sz="1725" b="0">
                 <a:solidFill>
                   <a:srgbClr val="071126"/>
                 </a:solidFill>
               </a:defRPr>
             </a:pPr>
             <a:r>
-              <a:rPr sz="1800" b="0">
+              <a:rPr sz="1725" b="0">
                 <a:solidFill>
                   <a:srgbClr val="071126"/>
                 </a:solidFill>
               </a:rPr>
-              <a:t>A concise explanation of each page, what the user sees, and how the Angular frontend integrates with the Express backend.</a:t>
+              <a:t>Application: Select a repository, analyze issues, review PRs, debug CI, and prepare GitHub actions.</a:t>
+            </a:r>
+          </a:p>
+          <a:p xmlns:a="http://schemas.openxmlformats.org/drawingml/2006/main">
+            <a:pPr algn="l">
+              <a:defRPr sz="1725" b="0">
+                <a:solidFill>
+                  <a:srgbClr val="071126"/>
+                </a:solidFill>
+              </a:defRPr>
+            </a:pPr>
+            <a:r>
+              <a:rPr sz="1725" b="0">
+                <a:solidFill>
+                  <a:srgbClr val="071126"/>
+                </a:solidFill>
+              </a:rPr>
+              <a:t>AI Agent: Uses session context and GitHub evidence to return structured engineering insights.</a:t>
             </a:r>
           </a:p>
         </p:txBody>
@@ -2537,7 +2771,7 @@
           <p:cNvPr id="5" name="">
             <a:extLst xmlns:a="http://schemas.openxmlformats.org/drawingml/2006/main">
               <a:ext uri="{FF2B5EF4-FFF2-40B4-BE49-F238E27FC236}">
-                <a16:creationId xmlns:a16="http://schemas.microsoft.com/office/drawing/2014/main" id="{0FFC302A-DC7C-4612-BBE6-2A993F8964F9}"/>
+                <a16:creationId xmlns:a16="http://schemas.microsoft.com/office/drawing/2014/main" id="{33CD8D2D-A599-4F7E-A0DA-3891A7E47B6D}"/>
               </a:ext>
             </a:extLst>
           </p:cNvPr>
@@ -2572,7 +2806,7 @@
           <p:cNvPr id="6" name="">
             <a:extLst xmlns:a="http://schemas.openxmlformats.org/drawingml/2006/main">
               <a:ext uri="{FF2B5EF4-FFF2-40B4-BE49-F238E27FC236}">
-                <a16:creationId xmlns:a16="http://schemas.microsoft.com/office/drawing/2014/main" id="{A70376BD-B36B-4E22-AC4A-7B8B03507DF0}"/>
+                <a16:creationId xmlns:a16="http://schemas.microsoft.com/office/drawing/2014/main" id="{794924B1-AD13-45E2-AC06-773DD6FB1EE3}"/>
               </a:ext>
             </a:extLst>
           </p:cNvPr>
@@ -2741,7 +2975,7 @@
           <p:cNvPr id="7" name="">
             <a:extLst xmlns:a="http://schemas.openxmlformats.org/drawingml/2006/main">
               <a:ext uri="{FF2B5EF4-FFF2-40B4-BE49-F238E27FC236}">
-                <a16:creationId xmlns:a16="http://schemas.microsoft.com/office/drawing/2014/main" id="{CEBE10E3-C2D6-475F-91C7-0F0D36C04B3E}"/>
+                <a16:creationId xmlns:a16="http://schemas.microsoft.com/office/drawing/2014/main" id="{F130AFC9-733A-45A2-A9E4-932D3CA0A7DF}"/>
               </a:ext>
             </a:extLst>
           </p:cNvPr>
@@ -2789,7 +3023,7 @@
     </p:spTree>
     <p:extLst>
       <p:ext uri="{BB962C8B-B14F-4D97-AF65-F5344CB8AC3E}">
-        <p14:creationId xmlns:p14="http://schemas.microsoft.com/office/powerpoint/2010/main" val="627225030"/>
+        <p14:creationId xmlns:p14="http://schemas.microsoft.com/office/powerpoint/2010/main" val="682228785"/>
       </p:ext>
     </p:extLst>
   </p:cSld>
@@ -2820,7 +3054,7 @@
           <p:cNvPr id="11" name="">
             <a:extLst xmlns:a="http://schemas.openxmlformats.org/drawingml/2006/main">
               <a:ext uri="{FF2B5EF4-FFF2-40B4-BE49-F238E27FC236}">
-                <a16:creationId xmlns:a16="http://schemas.microsoft.com/office/drawing/2014/main" id="{D87576DD-7C3F-4283-A973-ED06B5D67B8D}"/>
+                <a16:creationId xmlns:a16="http://schemas.microsoft.com/office/drawing/2014/main" id="{2630726D-9957-4666-8873-DBB97FF368EF}"/>
               </a:ext>
             </a:extLst>
           </p:cNvPr>
@@ -2870,7 +3104,7 @@
           <p:cNvPr id="2" name="">
             <a:extLst xmlns:a="http://schemas.openxmlformats.org/drawingml/2006/main">
               <a:ext uri="{FF2B5EF4-FFF2-40B4-BE49-F238E27FC236}">
-                <a16:creationId xmlns:a16="http://schemas.microsoft.com/office/drawing/2014/main" id="{42BA0610-F10F-4E7C-AB8E-871106CA8624}"/>
+                <a16:creationId xmlns:a16="http://schemas.microsoft.com/office/drawing/2014/main" id="{2145F74D-5DB8-448B-8BE7-91B2C39B8D2D}"/>
               </a:ext>
             </a:extLst>
           </p:cNvPr>
@@ -2910,7 +3144,7 @@
                   <a:srgbClr val="071126"/>
                 </a:solidFill>
               </a:rPr>
-              <a:t>Issue Analyzer proposes implementation and testing plans</a:t>
+              <a:t>Issue Analyzer turns an issue into an implementation brief</a:t>
             </a:r>
           </a:p>
         </p:txBody>
@@ -2920,7 +3154,7 @@
           <p:cNvPr id="3" name="">
             <a:extLst xmlns:a="http://schemas.openxmlformats.org/drawingml/2006/main">
               <a:ext uri="{FF2B5EF4-FFF2-40B4-BE49-F238E27FC236}">
-                <a16:creationId xmlns:a16="http://schemas.microsoft.com/office/drawing/2014/main" id="{539A1182-2723-4648-85BA-370B9800E996}"/>
+                <a16:creationId xmlns:a16="http://schemas.microsoft.com/office/drawing/2014/main" id="{AA5532DF-9DCE-473D-B945-24F7B94875A7}"/>
               </a:ext>
             </a:extLst>
           </p:cNvPr>
@@ -2960,7 +3194,7 @@
                   <a:srgbClr val="536179"/>
                 </a:solidFill>
               </a:rPr>
-              <a:t>The middle section converts analysis into concrete next steps.</a:t>
+              <a:t>The first section captures issue identity, readiness, confidence, summary, and problem statement.</a:t>
             </a:r>
           </a:p>
         </p:txBody>
@@ -2970,7 +3204,7 @@
           <p:cNvPr id="4" name="">
             <a:extLst xmlns:a="http://schemas.openxmlformats.org/drawingml/2006/main">
               <a:ext uri="{FF2B5EF4-FFF2-40B4-BE49-F238E27FC236}">
-                <a16:creationId xmlns:a16="http://schemas.microsoft.com/office/drawing/2014/main" id="{D1679B8C-4AC8-4654-9D82-5ACBBEC07E44}"/>
+                <a16:creationId xmlns:a16="http://schemas.microsoft.com/office/drawing/2014/main" id="{6A356A8A-77F5-4DDE-B58C-91C3F6A69FC1}"/>
               </a:ext>
             </a:extLst>
           </p:cNvPr>
@@ -3009,13 +3243,13 @@
           <p:nvPr/>
         </p:nvPicPr>
         <p:blipFill>
-          <a:blip xmlns:r="http://schemas.openxmlformats.org/officeDocument/2006/relationships" xmlns:a="http://schemas.openxmlformats.org/drawingml/2006/main" r:embed="R7de1539453374653"/>
+          <a:blip xmlns:r="http://schemas.openxmlformats.org/officeDocument/2006/relationships" xmlns:a="http://schemas.openxmlformats.org/drawingml/2006/main" r:embed="R4bf729460dbe4307"/>
           <a:stretch xmlns:a="http://schemas.openxmlformats.org/drawingml/2006/main"/>
         </p:blipFill>
         <p:spPr>
           <a:xfrm xmlns:a="http://schemas.openxmlformats.org/drawingml/2006/main">
-            <a:off x="551064" y="1619250"/>
-            <a:ext cx="6689322" cy="4095750"/>
+            <a:off x="514350" y="1860270"/>
+            <a:ext cx="6762750" cy="3613710"/>
           </a:xfrm>
           <a:prstGeom xmlns:a="http://schemas.openxmlformats.org/drawingml/2006/main" prst="rect">
             <a:avLst/>
@@ -3027,7 +3261,7 @@
           <p:cNvPr id="6" name="">
             <a:extLst xmlns:a="http://schemas.openxmlformats.org/drawingml/2006/main">
               <a:ext uri="{FF2B5EF4-FFF2-40B4-BE49-F238E27FC236}">
-                <a16:creationId xmlns:a16="http://schemas.microsoft.com/office/drawing/2014/main" id="{CF2231F3-DA3D-4BD7-B89F-F493A0A8120D}"/>
+                <a16:creationId xmlns:a16="http://schemas.microsoft.com/office/drawing/2014/main" id="{6740D457-1C69-4A9A-BB11-BEC882775269}"/>
               </a:ext>
             </a:extLst>
           </p:cNvPr>
@@ -3077,7 +3311,7 @@
           <p:cNvPr id="7" name="">
             <a:extLst xmlns:a="http://schemas.openxmlformats.org/drawingml/2006/main">
               <a:ext uri="{FF2B5EF4-FFF2-40B4-BE49-F238E27FC236}">
-                <a16:creationId xmlns:a16="http://schemas.microsoft.com/office/drawing/2014/main" id="{C90B9ABA-E724-4EA7-87C8-AF1ADC35D37B}"/>
+                <a16:creationId xmlns:a16="http://schemas.microsoft.com/office/drawing/2014/main" id="{D9AFA1E8-605E-4CA3-BB87-AD833CE6B326}"/>
               </a:ext>
             </a:extLst>
           </p:cNvPr>
@@ -3117,7 +3351,7 @@
                   <a:srgbClr val="536179"/>
                 </a:solidFill>
               </a:rPr>
-              <a:t>• Implementation Plan lists ordered steps, scope clarification, inspection, and test creation.</a:t>
+              <a:t>• Issue number, type, readiness, and confidence are visible at the top.</a:t>
             </a:r>
           </a:p>
           <a:p xmlns:a="http://schemas.openxmlformats.org/drawingml/2006/main">
@@ -3134,7 +3368,7 @@
                   <a:srgbClr val="536179"/>
                 </a:solidFill>
               </a:rPr>
-              <a:t>• Testing Plan describes unit, regression, and manual validation paths.</a:t>
+              <a:t>• Issue title and author identify the source request.</a:t>
             </a:r>
           </a:p>
           <a:p xmlns:a="http://schemas.openxmlformats.org/drawingml/2006/main">
@@ -3151,7 +3385,7 @@
                   <a:srgbClr val="536179"/>
                 </a:solidFill>
               </a:rPr>
-              <a:t>• Files and validation notes connect the plan to repository evidence.</a:t>
+              <a:t>• Summary and Problem Statement translate the issue into engineering language.</a:t>
             </a:r>
           </a:p>
         </p:txBody>
@@ -3161,7 +3395,7 @@
           <p:cNvPr id="8" name="">
             <a:extLst xmlns:a="http://schemas.openxmlformats.org/drawingml/2006/main">
               <a:ext uri="{FF2B5EF4-FFF2-40B4-BE49-F238E27FC236}">
-                <a16:creationId xmlns:a16="http://schemas.microsoft.com/office/drawing/2014/main" id="{84ACBD8E-E381-419F-B119-7369923C7DA1}"/>
+                <a16:creationId xmlns:a16="http://schemas.microsoft.com/office/drawing/2014/main" id="{575D01D1-816F-414D-B3AF-863336ED38E2}"/>
               </a:ext>
             </a:extLst>
           </p:cNvPr>
@@ -3211,7 +3445,7 @@
           <p:cNvPr id="9" name="">
             <a:extLst xmlns:a="http://schemas.openxmlformats.org/drawingml/2006/main">
               <a:ext uri="{FF2B5EF4-FFF2-40B4-BE49-F238E27FC236}">
-                <a16:creationId xmlns:a16="http://schemas.microsoft.com/office/drawing/2014/main" id="{53E02140-E7F5-4929-9EA3-48D8E172C383}"/>
+                <a16:creationId xmlns:a16="http://schemas.microsoft.com/office/drawing/2014/main" id="{83D59E3B-A322-4FA2-826F-B8CD3C080F02}"/>
               </a:ext>
             </a:extLst>
           </p:cNvPr>
@@ -3251,7 +3485,7 @@
                   <a:srgbClr val="536179"/>
                 </a:solidFill>
               </a:rPr>
-              <a:t>• Structured schema returns implementationPlan objects with order, title, files, and validation.</a:t>
+              <a:t>• POST /api/v1/agent/sessions/:sessionId/issues/:issueNumber/analyze.</a:t>
             </a:r>
           </a:p>
           <a:p xmlns:a="http://schemas.openxmlformats.org/drawingml/2006/main">
@@ -3268,7 +3502,7 @@
                   <a:srgbClr val="536179"/>
                 </a:solidFill>
               </a:rPr>
-              <a:t>• testingPlan returns type, scenario, and expectedResult.</a:t>
+              <a:t>• Backend returns { issueNumber, analysis }.</a:t>
             </a:r>
           </a:p>
           <a:p xmlns:a="http://schemas.openxmlformats.org/drawingml/2006/main">
@@ -3285,7 +3519,7 @@
                   <a:srgbClr val="536179"/>
                 </a:solidFill>
               </a:rPr>
-              <a:t>• Frontend renders object fields as readable cards/lists.</a:t>
+              <a:t>• Frontend unwraps response.data.analysis and binds nested fields.</a:t>
             </a:r>
           </a:p>
         </p:txBody>
@@ -3295,7 +3529,7 @@
           <p:cNvPr id="10" name="">
             <a:extLst xmlns:a="http://schemas.openxmlformats.org/drawingml/2006/main">
               <a:ext uri="{FF2B5EF4-FFF2-40B4-BE49-F238E27FC236}">
-                <a16:creationId xmlns:a16="http://schemas.microsoft.com/office/drawing/2014/main" id="{39F9BAA6-ABD6-43CD-8921-D08C7F0E47B0}"/>
+                <a16:creationId xmlns:a16="http://schemas.microsoft.com/office/drawing/2014/main" id="{C6AD3DA7-6176-452C-91FF-1D43FB1542BE}"/>
               </a:ext>
             </a:extLst>
           </p:cNvPr>
@@ -3343,7 +3577,7 @@
     </p:spTree>
     <p:extLst>
       <p:ext uri="{BB962C8B-B14F-4D97-AF65-F5344CB8AC3E}">
-        <p14:creationId xmlns:p14="http://schemas.microsoft.com/office/powerpoint/2010/main" val="1074695936"/>
+        <p14:creationId xmlns:p14="http://schemas.microsoft.com/office/powerpoint/2010/main" val="28802298"/>
       </p:ext>
     </p:extLst>
   </p:cSld>
@@ -3374,7 +3608,7 @@
           <p:cNvPr id="11" name="">
             <a:extLst xmlns:a="http://schemas.openxmlformats.org/drawingml/2006/main">
               <a:ext uri="{FF2B5EF4-FFF2-40B4-BE49-F238E27FC236}">
-                <a16:creationId xmlns:a16="http://schemas.microsoft.com/office/drawing/2014/main" id="{A473B88E-B16B-46FB-A80C-78D3B675BE41}"/>
+                <a16:creationId xmlns:a16="http://schemas.microsoft.com/office/drawing/2014/main" id="{E84F84A7-9DF1-44E0-90E6-85FE982FE5B1}"/>
               </a:ext>
             </a:extLst>
           </p:cNvPr>
@@ -3424,7 +3658,7 @@
           <p:cNvPr id="2" name="">
             <a:extLst xmlns:a="http://schemas.openxmlformats.org/drawingml/2006/main">
               <a:ext uri="{FF2B5EF4-FFF2-40B4-BE49-F238E27FC236}">
-                <a16:creationId xmlns:a16="http://schemas.microsoft.com/office/drawing/2014/main" id="{16F6633E-74B9-4F95-A016-CD174035EA17}"/>
+                <a16:creationId xmlns:a16="http://schemas.microsoft.com/office/drawing/2014/main" id="{6B8F2E0C-DCB3-461E-8D55-B8B37D6D27F1}"/>
               </a:ext>
             </a:extLst>
           </p:cNvPr>
@@ -3464,7 +3698,7 @@
                   <a:srgbClr val="071126"/>
                 </a:solidFill>
               </a:rPr>
-              <a:t>Issue Analyzer exposes risks, questions, and related files</a:t>
+              <a:t>Issue Analyzer separates explicit, inferred, and missing requirements</a:t>
             </a:r>
           </a:p>
         </p:txBody>
@@ -3474,7 +3708,7 @@
           <p:cNvPr id="3" name="">
             <a:extLst xmlns:a="http://schemas.openxmlformats.org/drawingml/2006/main">
               <a:ext uri="{FF2B5EF4-FFF2-40B4-BE49-F238E27FC236}">
-                <a16:creationId xmlns:a16="http://schemas.microsoft.com/office/drawing/2014/main" id="{92600ED8-BA5E-4885-AF52-8719281F5497}"/>
+                <a16:creationId xmlns:a16="http://schemas.microsoft.com/office/drawing/2014/main" id="{0979C082-2FC8-4753-86DC-52F5BC0194E3}"/>
               </a:ext>
             </a:extLst>
           </p:cNvPr>
@@ -3514,7 +3748,7 @@
                   <a:srgbClr val="536179"/>
                 </a:solidFill>
               </a:rPr>
-              <a:t>The final section shows unresolved decisions and likely code touchpoints.</a:t>
+              <a:t>This helps the team know what is clear and what must be clarified before implementation.</a:t>
             </a:r>
           </a:p>
         </p:txBody>
@@ -3524,7 +3758,7 @@
           <p:cNvPr id="4" name="">
             <a:extLst xmlns:a="http://schemas.openxmlformats.org/drawingml/2006/main">
               <a:ext uri="{FF2B5EF4-FFF2-40B4-BE49-F238E27FC236}">
-                <a16:creationId xmlns:a16="http://schemas.microsoft.com/office/drawing/2014/main" id="{DEDE11C4-1DCA-4363-833C-BA0C23DC9C3C}"/>
+                <a16:creationId xmlns:a16="http://schemas.microsoft.com/office/drawing/2014/main" id="{4A47EB68-5894-4422-9A16-5CFB19C9FCC0}"/>
               </a:ext>
             </a:extLst>
           </p:cNvPr>
@@ -3563,13 +3797,13 @@
           <p:nvPr/>
         </p:nvPicPr>
         <p:blipFill>
-          <a:blip xmlns:r="http://schemas.openxmlformats.org/officeDocument/2006/relationships" xmlns:a="http://schemas.openxmlformats.org/drawingml/2006/main" r:embed="R5c3edf6e20654059"/>
+          <a:blip xmlns:r="http://schemas.openxmlformats.org/officeDocument/2006/relationships" xmlns:a="http://schemas.openxmlformats.org/drawingml/2006/main" r:embed="R5a81e305c55948ca"/>
           <a:stretch xmlns:a="http://schemas.openxmlformats.org/drawingml/2006/main"/>
         </p:blipFill>
         <p:spPr>
           <a:xfrm xmlns:a="http://schemas.openxmlformats.org/drawingml/2006/main">
-            <a:off x="535835" y="1619250"/>
-            <a:ext cx="6719779" cy="4095750"/>
+            <a:off x="548509" y="1619250"/>
+            <a:ext cx="6694433" cy="4095750"/>
           </a:xfrm>
           <a:prstGeom xmlns:a="http://schemas.openxmlformats.org/drawingml/2006/main" prst="rect">
             <a:avLst/>
@@ -3581,7 +3815,7 @@
           <p:cNvPr id="6" name="">
             <a:extLst xmlns:a="http://schemas.openxmlformats.org/drawingml/2006/main">
               <a:ext uri="{FF2B5EF4-FFF2-40B4-BE49-F238E27FC236}">
-                <a16:creationId xmlns:a16="http://schemas.microsoft.com/office/drawing/2014/main" id="{F52BE110-52E8-45AA-86C4-2D4D36BC1403}"/>
+                <a16:creationId xmlns:a16="http://schemas.microsoft.com/office/drawing/2014/main" id="{F21ED560-9E0C-45A8-8651-37051DB2E5E4}"/>
               </a:ext>
             </a:extLst>
           </p:cNvPr>
@@ -3631,7 +3865,7 @@
           <p:cNvPr id="7" name="">
             <a:extLst xmlns:a="http://schemas.openxmlformats.org/drawingml/2006/main">
               <a:ext uri="{FF2B5EF4-FFF2-40B4-BE49-F238E27FC236}">
-                <a16:creationId xmlns:a16="http://schemas.microsoft.com/office/drawing/2014/main" id="{0C4E6A6A-7FC4-4C9D-84B3-A4422A0EADE0}"/>
+                <a16:creationId xmlns:a16="http://schemas.microsoft.com/office/drawing/2014/main" id="{60336879-80F4-4802-9180-F61E8B486D0E}"/>
               </a:ext>
             </a:extLst>
           </p:cNvPr>
@@ -3671,7 +3905,7 @@
                   <a:srgbClr val="536179"/>
                 </a:solidFill>
               </a:rPr>
-              <a:t>• Risks explain ambiguity and tooling mismatch concerns.</a:t>
+              <a:t>• Root cause section states whether a bug-style hypothesis applies.</a:t>
             </a:r>
           </a:p>
           <a:p xmlns:a="http://schemas.openxmlformats.org/drawingml/2006/main">
@@ -3688,7 +3922,7 @@
                   <a:srgbClr val="536179"/>
                 </a:solidFill>
               </a:rPr>
-              <a:t>• Questions identify decisions the team must answer before coding.</a:t>
+              <a:t>• Explicit requirements are separated from inferred and missing requirements.</a:t>
             </a:r>
           </a:p>
           <a:p xmlns:a="http://schemas.openxmlformats.org/drawingml/2006/main">
@@ -3705,7 +3939,7 @@
                   <a:srgbClr val="536179"/>
                 </a:solidFill>
               </a:rPr>
-              <a:t>• Related Files show likely change/reference paths such as package.json and modules.</a:t>
+              <a:t>• Acceptance criteria and affected areas become visible implementation inputs.</a:t>
             </a:r>
           </a:p>
         </p:txBody>
@@ -3715,7 +3949,7 @@
           <p:cNvPr id="8" name="">
             <a:extLst xmlns:a="http://schemas.openxmlformats.org/drawingml/2006/main">
               <a:ext uri="{FF2B5EF4-FFF2-40B4-BE49-F238E27FC236}">
-                <a16:creationId xmlns:a16="http://schemas.microsoft.com/office/drawing/2014/main" id="{8DEE08A8-7634-4D2D-85EA-16ABFF2565FD}"/>
+                <a16:creationId xmlns:a16="http://schemas.microsoft.com/office/drawing/2014/main" id="{5F5F67B5-438C-4C0D-B882-75B33616C812}"/>
               </a:ext>
             </a:extLst>
           </p:cNvPr>
@@ -3765,7 +3999,7 @@
           <p:cNvPr id="9" name="">
             <a:extLst xmlns:a="http://schemas.openxmlformats.org/drawingml/2006/main">
               <a:ext uri="{FF2B5EF4-FFF2-40B4-BE49-F238E27FC236}">
-                <a16:creationId xmlns:a16="http://schemas.microsoft.com/office/drawing/2014/main" id="{B2D82CDA-03C5-4216-B1AB-EF182F95CFC5}"/>
+                <a16:creationId xmlns:a16="http://schemas.microsoft.com/office/drawing/2014/main" id="{F32BF8E5-273A-45DE-ACDA-7D48AF1FFC3E}"/>
               </a:ext>
             </a:extLst>
           </p:cNvPr>
@@ -3805,7 +4039,7 @@
                   <a:srgbClr val="536179"/>
                 </a:solidFill>
               </a:rPr>
-              <a:t>• Issue analyzer returns risks with level, risk, and mitigation.</a:t>
+              <a:t>• Issue analyzer agent reads issue body, comments, labels, and repository files.</a:t>
             </a:r>
           </a:p>
           <a:p xmlns:a="http://schemas.openxmlformats.org/drawingml/2006/main">
@@ -3822,7 +4056,7 @@
                   <a:srgbClr val="536179"/>
                 </a:solidFill>
               </a:rPr>
-              <a:t>• relatedFiles contains path, relevance, and likelyChange.</a:t>
+              <a:t>• Schema groups requirements as explicit, inferred, and missing.</a:t>
             </a:r>
           </a:p>
           <a:p xmlns:a="http://schemas.openxmlformats.org/drawingml/2006/main">
@@ -3839,7 +4073,7 @@
                   <a:srgbClr val="536179"/>
                 </a:solidFill>
               </a:rPr>
-              <a:t>• This section prevents speculative implementation when issue detail is missing.</a:t>
+              <a:t>• Affected areas include reasons and evidence paths from repository inspection.</a:t>
             </a:r>
           </a:p>
         </p:txBody>
@@ -3849,7 +4083,7 @@
           <p:cNvPr id="10" name="">
             <a:extLst xmlns:a="http://schemas.openxmlformats.org/drawingml/2006/main">
               <a:ext uri="{FF2B5EF4-FFF2-40B4-BE49-F238E27FC236}">
-                <a16:creationId xmlns:a16="http://schemas.microsoft.com/office/drawing/2014/main" id="{90051D43-834C-44FC-BCC8-A169151EA6B5}"/>
+                <a16:creationId xmlns:a16="http://schemas.microsoft.com/office/drawing/2014/main" id="{A96FAA06-54F1-4986-AD07-A43F9A95E1E6}"/>
               </a:ext>
             </a:extLst>
           </p:cNvPr>
@@ -3897,7 +4131,7 @@
     </p:spTree>
     <p:extLst>
       <p:ext uri="{BB962C8B-B14F-4D97-AF65-F5344CB8AC3E}">
-        <p14:creationId xmlns:p14="http://schemas.microsoft.com/office/powerpoint/2010/main" val="1234888993"/>
+        <p14:creationId xmlns:p14="http://schemas.microsoft.com/office/powerpoint/2010/main" val="1928428036"/>
       </p:ext>
     </p:extLst>
   </p:cSld>
@@ -3928,7 +4162,7 @@
           <p:cNvPr id="11" name="">
             <a:extLst xmlns:a="http://schemas.openxmlformats.org/drawingml/2006/main">
               <a:ext uri="{FF2B5EF4-FFF2-40B4-BE49-F238E27FC236}">
-                <a16:creationId xmlns:a16="http://schemas.microsoft.com/office/drawing/2014/main" id="{0FC1D621-124F-479D-8CEC-8EAF5D740143}"/>
+                <a16:creationId xmlns:a16="http://schemas.microsoft.com/office/drawing/2014/main" id="{BA609AFC-39EC-4991-AF03-B1FE56FB9445}"/>
               </a:ext>
             </a:extLst>
           </p:cNvPr>
@@ -3978,7 +4212,7 @@
           <p:cNvPr id="2" name="">
             <a:extLst xmlns:a="http://schemas.openxmlformats.org/drawingml/2006/main">
               <a:ext uri="{FF2B5EF4-FFF2-40B4-BE49-F238E27FC236}">
-                <a16:creationId xmlns:a16="http://schemas.microsoft.com/office/drawing/2014/main" id="{247137D4-D08B-49BD-9320-6DD806201C52}"/>
+                <a16:creationId xmlns:a16="http://schemas.microsoft.com/office/drawing/2014/main" id="{C0821342-AA15-433F-9C10-B36242584538}"/>
               </a:ext>
             </a:extLst>
           </p:cNvPr>
@@ -4018,7 +4252,7 @@
                   <a:srgbClr val="071126"/>
                 </a:solidFill>
               </a:rPr>
-              <a:t>CI Debugger is ready for workflow-run investigation</a:t>
+              <a:t>Issue Analyzer proposes implementation and testing plans</a:t>
             </a:r>
           </a:p>
         </p:txBody>
@@ -4028,7 +4262,7 @@
           <p:cNvPr id="3" name="">
             <a:extLst xmlns:a="http://schemas.openxmlformats.org/drawingml/2006/main">
               <a:ext uri="{FF2B5EF4-FFF2-40B4-BE49-F238E27FC236}">
-                <a16:creationId xmlns:a16="http://schemas.microsoft.com/office/drawing/2014/main" id="{DD76B60A-BF44-4A39-9592-BE0580357388}"/>
+                <a16:creationId xmlns:a16="http://schemas.microsoft.com/office/drawing/2014/main" id="{6B7B0788-717A-455F-928F-CD7AECC05AD8}"/>
               </a:ext>
             </a:extLst>
           </p:cNvPr>
@@ -4068,7 +4302,7 @@
                   <a:srgbClr val="536179"/>
                 </a:solidFill>
               </a:rPr>
-              <a:t>The user provides a GitHub Actions run id to diagnose failed jobs and logs.</a:t>
+              <a:t>The middle section converts analysis into concrete next steps.</a:t>
             </a:r>
           </a:p>
         </p:txBody>
@@ -4078,7 +4312,7 @@
           <p:cNvPr id="4" name="">
             <a:extLst xmlns:a="http://schemas.openxmlformats.org/drawingml/2006/main">
               <a:ext uri="{FF2B5EF4-FFF2-40B4-BE49-F238E27FC236}">
-                <a16:creationId xmlns:a16="http://schemas.microsoft.com/office/drawing/2014/main" id="{6CB2F51C-5AD0-4F14-A1F6-8278CFD72A78}"/>
+                <a16:creationId xmlns:a16="http://schemas.microsoft.com/office/drawing/2014/main" id="{C205217B-833A-4122-97E5-E67BDCB9BAD3}"/>
               </a:ext>
             </a:extLst>
           </p:cNvPr>
@@ -4117,13 +4351,13 @@
           <p:nvPr/>
         </p:nvPicPr>
         <p:blipFill>
-          <a:blip xmlns:r="http://schemas.openxmlformats.org/officeDocument/2006/relationships" xmlns:a="http://schemas.openxmlformats.org/drawingml/2006/main" r:embed="R787ee14f2cd24c5b"/>
+          <a:blip xmlns:r="http://schemas.openxmlformats.org/officeDocument/2006/relationships" xmlns:a="http://schemas.openxmlformats.org/drawingml/2006/main" r:embed="R35578dbde91a469b"/>
           <a:stretch xmlns:a="http://schemas.openxmlformats.org/drawingml/2006/main"/>
         </p:blipFill>
         <p:spPr>
           <a:xfrm xmlns:a="http://schemas.openxmlformats.org/drawingml/2006/main">
-            <a:off x="514350" y="2481265"/>
-            <a:ext cx="6762750" cy="2371720"/>
+            <a:off x="551064" y="1619250"/>
+            <a:ext cx="6689322" cy="4095750"/>
           </a:xfrm>
           <a:prstGeom xmlns:a="http://schemas.openxmlformats.org/drawingml/2006/main" prst="rect">
             <a:avLst/>
@@ -4135,7 +4369,7 @@
           <p:cNvPr id="6" name="">
             <a:extLst xmlns:a="http://schemas.openxmlformats.org/drawingml/2006/main">
               <a:ext uri="{FF2B5EF4-FFF2-40B4-BE49-F238E27FC236}">
-                <a16:creationId xmlns:a16="http://schemas.microsoft.com/office/drawing/2014/main" id="{580FBC06-50DC-4197-B3B6-65CEE1940DA5}"/>
+                <a16:creationId xmlns:a16="http://schemas.microsoft.com/office/drawing/2014/main" id="{18163738-6125-4BE0-9A92-75CBDCF9ECD8}"/>
               </a:ext>
             </a:extLst>
           </p:cNvPr>
@@ -4185,7 +4419,7 @@
           <p:cNvPr id="7" name="">
             <a:extLst xmlns:a="http://schemas.openxmlformats.org/drawingml/2006/main">
               <a:ext uri="{FF2B5EF4-FFF2-40B4-BE49-F238E27FC236}">
-                <a16:creationId xmlns:a16="http://schemas.microsoft.com/office/drawing/2014/main" id="{A2C9CF6F-77A5-4376-B3B8-1B2E59F60F59}"/>
+                <a16:creationId xmlns:a16="http://schemas.microsoft.com/office/drawing/2014/main" id="{4E3AD027-4169-43D1-850E-41EC7D429AAF}"/>
               </a:ext>
             </a:extLst>
           </p:cNvPr>
@@ -4225,7 +4459,7 @@
                   <a:srgbClr val="536179"/>
                 </a:solidFill>
               </a:rPr>
-              <a:t>• Input accepts a GitHub Actions run id.</a:t>
+              <a:t>• Implementation Plan lists ordered steps, scope clarification, inspection, and test creation.</a:t>
             </a:r>
           </a:p>
           <a:p xmlns:a="http://schemas.openxmlformats.org/drawingml/2006/main">
@@ -4242,7 +4476,7 @@
                   <a:srgbClr val="536179"/>
                 </a:solidFill>
               </a:rPr>
-              <a:t>• The page is disabled until a repository is selected and run id is present.</a:t>
+              <a:t>• Testing Plan describes unit, regression, and manual validation paths.</a:t>
             </a:r>
           </a:p>
           <a:p xmlns:a="http://schemas.openxmlformats.org/drawingml/2006/main">
@@ -4259,7 +4493,7 @@
                   <a:srgbClr val="536179"/>
                 </a:solidFill>
               </a:rPr>
-              <a:t>• After execution, it shows failure category, root cause, failed jobs, logs, fixes, and validation plan.</a:t>
+              <a:t>• Files and validation notes connect the plan to repository evidence.</a:t>
             </a:r>
           </a:p>
         </p:txBody>
@@ -4269,7 +4503,7 @@
           <p:cNvPr id="8" name="">
             <a:extLst xmlns:a="http://schemas.openxmlformats.org/drawingml/2006/main">
               <a:ext uri="{FF2B5EF4-FFF2-40B4-BE49-F238E27FC236}">
-                <a16:creationId xmlns:a16="http://schemas.microsoft.com/office/drawing/2014/main" id="{2A356048-1120-403F-9699-60C02CB6B971}"/>
+                <a16:creationId xmlns:a16="http://schemas.microsoft.com/office/drawing/2014/main" id="{F5EA42A0-B048-4417-9071-468C2291804B}"/>
               </a:ext>
             </a:extLst>
           </p:cNvPr>
@@ -4319,7 +4553,7 @@
           <p:cNvPr id="9" name="">
             <a:extLst xmlns:a="http://schemas.openxmlformats.org/drawingml/2006/main">
               <a:ext uri="{FF2B5EF4-FFF2-40B4-BE49-F238E27FC236}">
-                <a16:creationId xmlns:a16="http://schemas.microsoft.com/office/drawing/2014/main" id="{360484D2-A848-4C52-ADB0-A1C1F7342438}"/>
+                <a16:creationId xmlns:a16="http://schemas.microsoft.com/office/drawing/2014/main" id="{18525859-CD0C-4A6A-95A7-191F6DD97A5B}"/>
               </a:ext>
             </a:extLst>
           </p:cNvPr>
@@ -4359,7 +4593,7 @@
                   <a:srgbClr val="536179"/>
                 </a:solidFill>
               </a:rPr>
-              <a:t>• POST /api/v1/agent/sessions/:sessionId/actions/runs/:runId/debug.</a:t>
+              <a:t>• Structured schema returns implementationPlan objects with order, title, files, and validation.</a:t>
             </a:r>
           </a:p>
           <a:p xmlns:a="http://schemas.openxmlformats.org/drawingml/2006/main">
@@ -4376,7 +4610,7 @@
                   <a:srgbClr val="536179"/>
                 </a:solidFill>
               </a:rPr>
-              <a:t>• Backend CI debugger agent reads workflow run, failed jobs, logs, workflow config, and related code.</a:t>
+              <a:t>• testingPlan returns type, scenario, and expectedResult.</a:t>
             </a:r>
           </a:p>
           <a:p xmlns:a="http://schemas.openxmlformats.org/drawingml/2006/main">
@@ -4393,7 +4627,7 @@
                   <a:srgbClr val="536179"/>
                 </a:solidFill>
               </a:rPr>
-              <a:t>• Output is structured as root cause plus proposed fix and validation plan.</a:t>
+              <a:t>• Frontend renders object fields as readable cards/lists.</a:t>
             </a:r>
           </a:p>
         </p:txBody>
@@ -4403,7 +4637,7 @@
           <p:cNvPr id="10" name="">
             <a:extLst xmlns:a="http://schemas.openxmlformats.org/drawingml/2006/main">
               <a:ext uri="{FF2B5EF4-FFF2-40B4-BE49-F238E27FC236}">
-                <a16:creationId xmlns:a16="http://schemas.microsoft.com/office/drawing/2014/main" id="{3183C2D3-FC9E-4040-9AD6-C95C1A15396C}"/>
+                <a16:creationId xmlns:a16="http://schemas.microsoft.com/office/drawing/2014/main" id="{A068C357-7091-40D1-A6E6-4680A52ED4F0}"/>
               </a:ext>
             </a:extLst>
           </p:cNvPr>
@@ -4451,7 +4685,7 @@
     </p:spTree>
     <p:extLst>
       <p:ext uri="{BB962C8B-B14F-4D97-AF65-F5344CB8AC3E}">
-        <p14:creationId xmlns:p14="http://schemas.microsoft.com/office/powerpoint/2010/main" val="1930393588"/>
+        <p14:creationId xmlns:p14="http://schemas.microsoft.com/office/powerpoint/2010/main" val="421633236"/>
       </p:ext>
     </p:extLst>
   </p:cSld>
@@ -4482,7 +4716,7 @@
           <p:cNvPr id="11" name="">
             <a:extLst xmlns:a="http://schemas.openxmlformats.org/drawingml/2006/main">
               <a:ext uri="{FF2B5EF4-FFF2-40B4-BE49-F238E27FC236}">
-                <a16:creationId xmlns:a16="http://schemas.microsoft.com/office/drawing/2014/main" id="{0A11177F-A424-4AAB-90F3-9D8045516AF1}"/>
+                <a16:creationId xmlns:a16="http://schemas.microsoft.com/office/drawing/2014/main" id="{FE238134-2146-4A07-82B1-4A68D8DE7215}"/>
               </a:ext>
             </a:extLst>
           </p:cNvPr>
@@ -4532,7 +4766,7 @@
           <p:cNvPr id="2" name="">
             <a:extLst xmlns:a="http://schemas.openxmlformats.org/drawingml/2006/main">
               <a:ext uri="{FF2B5EF4-FFF2-40B4-BE49-F238E27FC236}">
-                <a16:creationId xmlns:a16="http://schemas.microsoft.com/office/drawing/2014/main" id="{4C29234A-C007-4BEE-8FD8-0E6BCB05264E}"/>
+                <a16:creationId xmlns:a16="http://schemas.microsoft.com/office/drawing/2014/main" id="{7F877648-3D6A-4BF9-B52E-8D8F6CCC77BD}"/>
               </a:ext>
             </a:extLst>
           </p:cNvPr>
@@ -4572,7 +4806,7 @@
                   <a:srgbClr val="071126"/>
                 </a:solidFill>
               </a:rPr>
-              <a:t>GitHub Actions page keeps mutations human-approved</a:t>
+              <a:t>Issue Analyzer exposes risks, questions, and related files</a:t>
             </a:r>
           </a:p>
         </p:txBody>
@@ -4582,7 +4816,7 @@
           <p:cNvPr id="3" name="">
             <a:extLst xmlns:a="http://schemas.openxmlformats.org/drawingml/2006/main">
               <a:ext uri="{FF2B5EF4-FFF2-40B4-BE49-F238E27FC236}">
-                <a16:creationId xmlns:a16="http://schemas.microsoft.com/office/drawing/2014/main" id="{0E2B0911-0DEF-4124-9D67-B7E0E489347C}"/>
+                <a16:creationId xmlns:a16="http://schemas.microsoft.com/office/drawing/2014/main" id="{A1A0938B-569B-4BF4-AF86-86CA482432F1}"/>
               </a:ext>
             </a:extLst>
           </p:cNvPr>
@@ -4622,7 +4856,7 @@
                   <a:srgbClr val="536179"/>
                 </a:solidFill>
               </a:rPr>
-              <a:t>Write operations are scoped to the selected repository and run only after approval.</a:t>
+              <a:t>The final section shows unresolved decisions and likely code touchpoints.</a:t>
             </a:r>
           </a:p>
         </p:txBody>
@@ -4632,7 +4866,7 @@
           <p:cNvPr id="4" name="">
             <a:extLst xmlns:a="http://schemas.openxmlformats.org/drawingml/2006/main">
               <a:ext uri="{FF2B5EF4-FFF2-40B4-BE49-F238E27FC236}">
-                <a16:creationId xmlns:a16="http://schemas.microsoft.com/office/drawing/2014/main" id="{B49EA396-10CB-42D5-B1AF-A61CB65F50CA}"/>
+                <a16:creationId xmlns:a16="http://schemas.microsoft.com/office/drawing/2014/main" id="{867EAF53-228D-4B19-81B6-AF1D208DCA7E}"/>
               </a:ext>
             </a:extLst>
           </p:cNvPr>
@@ -4671,13 +4905,13 @@
           <p:nvPr/>
         </p:nvPicPr>
         <p:blipFill>
-          <a:blip xmlns:r="http://schemas.openxmlformats.org/officeDocument/2006/relationships" xmlns:a="http://schemas.openxmlformats.org/drawingml/2006/main" r:embed="R0508025882de4863"/>
+          <a:blip xmlns:r="http://schemas.openxmlformats.org/officeDocument/2006/relationships" xmlns:a="http://schemas.openxmlformats.org/drawingml/2006/main" r:embed="R2cca83347b3d4142"/>
           <a:stretch xmlns:a="http://schemas.openxmlformats.org/drawingml/2006/main"/>
         </p:blipFill>
         <p:spPr>
           <a:xfrm xmlns:a="http://schemas.openxmlformats.org/drawingml/2006/main">
-            <a:off x="514350" y="2255723"/>
-            <a:ext cx="6762750" cy="2822805"/>
+            <a:off x="535835" y="1619250"/>
+            <a:ext cx="6719779" cy="4095750"/>
           </a:xfrm>
           <a:prstGeom xmlns:a="http://schemas.openxmlformats.org/drawingml/2006/main" prst="rect">
             <a:avLst/>
@@ -4689,7 +4923,7 @@
           <p:cNvPr id="6" name="">
             <a:extLst xmlns:a="http://schemas.openxmlformats.org/drawingml/2006/main">
               <a:ext uri="{FF2B5EF4-FFF2-40B4-BE49-F238E27FC236}">
-                <a16:creationId xmlns:a16="http://schemas.microsoft.com/office/drawing/2014/main" id="{C271AAE2-176D-4E0D-B3D3-B02DFF5C09FC}"/>
+                <a16:creationId xmlns:a16="http://schemas.microsoft.com/office/drawing/2014/main" id="{11DF9F40-5172-4705-9316-23AA83302E90}"/>
               </a:ext>
             </a:extLst>
           </p:cNvPr>
@@ -4739,7 +4973,7 @@
           <p:cNvPr id="7" name="">
             <a:extLst xmlns:a="http://schemas.openxmlformats.org/drawingml/2006/main">
               <a:ext uri="{FF2B5EF4-FFF2-40B4-BE49-F238E27FC236}">
-                <a16:creationId xmlns:a16="http://schemas.microsoft.com/office/drawing/2014/main" id="{D7AB9834-3807-4545-935B-EC3FF813D524}"/>
+                <a16:creationId xmlns:a16="http://schemas.microsoft.com/office/drawing/2014/main" id="{F1287D27-03E9-4E52-A3C3-4B7BA6A5523E}"/>
               </a:ext>
             </a:extLst>
           </p:cNvPr>
@@ -4779,7 +5013,7 @@
                   <a:srgbClr val="536179"/>
                 </a:solidFill>
               </a:rPr>
-              <a:t>• Instruction box captures the requested GitHub mutation.</a:t>
+              <a:t>• Risks explain ambiguity and tooling mismatch concerns.</a:t>
             </a:r>
           </a:p>
           <a:p xmlns:a="http://schemas.openxmlformats.org/drawingml/2006/main">
@@ -4796,7 +5030,7 @@
                   <a:srgbClr val="536179"/>
                 </a:solidFill>
               </a:rPr>
-              <a:t>• Repository scope is displayed before preparing the action.</a:t>
+              <a:t>• Questions identify decisions the team must answer before coding.</a:t>
             </a:r>
           </a:p>
           <a:p xmlns:a="http://schemas.openxmlformats.org/drawingml/2006/main">
@@ -4813,7 +5047,7 @@
                   <a:srgbClr val="536179"/>
                 </a:solidFill>
               </a:rPr>
-              <a:t>• Completed status explains when a request cannot be executed directly, such as an unstable PR merge state.</a:t>
+              <a:t>• Related Files show likely change/reference paths such as package.json and modules.</a:t>
             </a:r>
           </a:p>
         </p:txBody>
@@ -4823,7 +5057,7 @@
           <p:cNvPr id="8" name="">
             <a:extLst xmlns:a="http://schemas.openxmlformats.org/drawingml/2006/main">
               <a:ext uri="{FF2B5EF4-FFF2-40B4-BE49-F238E27FC236}">
-                <a16:creationId xmlns:a16="http://schemas.microsoft.com/office/drawing/2014/main" id="{51CFB15F-83F1-47B5-8025-0E691EAB6740}"/>
+                <a16:creationId xmlns:a16="http://schemas.microsoft.com/office/drawing/2014/main" id="{CE7CE786-9562-4EBB-8445-AAEC5CC5C677}"/>
               </a:ext>
             </a:extLst>
           </p:cNvPr>
@@ -4873,7 +5107,7 @@
           <p:cNvPr id="9" name="">
             <a:extLst xmlns:a="http://schemas.openxmlformats.org/drawingml/2006/main">
               <a:ext uri="{FF2B5EF4-FFF2-40B4-BE49-F238E27FC236}">
-                <a16:creationId xmlns:a16="http://schemas.microsoft.com/office/drawing/2014/main" id="{0E75147B-524C-4684-B186-AD92A240AA2E}"/>
+                <a16:creationId xmlns:a16="http://schemas.microsoft.com/office/drawing/2014/main" id="{E997252F-395B-482F-AB67-F4BF87030A47}"/>
               </a:ext>
             </a:extLst>
           </p:cNvPr>
@@ -4913,7 +5147,7 @@
                   <a:srgbClr val="536179"/>
                 </a:solidFill>
               </a:rPr>
-              <a:t>• POST /sessions/:sessionId/github/write prepares the action.</a:t>
+              <a:t>• Issue analyzer returns risks with level, risk, and mitigation.</a:t>
             </a:r>
           </a:p>
           <a:p xmlns:a="http://schemas.openxmlformats.org/drawingml/2006/main">
@@ -4930,7 +5164,7 @@
                   <a:srgbClr val="536179"/>
                 </a:solidFill>
               </a:rPr>
-              <a:t>• If a write tool is proposed, backend stores paused RunState and returns approvalId.</a:t>
+              <a:t>• relatedFiles contains path, relevance, and likelyChange.</a:t>
             </a:r>
           </a:p>
           <a:p xmlns:a="http://schemas.openxmlformats.org/drawingml/2006/main">
@@ -4947,7 +5181,7 @@
                   <a:srgbClr val="536179"/>
                 </a:solidFill>
               </a:rPr>
-              <a:t>• POST /github/approvals/:approvalId/decision approves or rejects it.</a:t>
+              <a:t>• This section prevents speculative implementation when issue detail is missing.</a:t>
             </a:r>
           </a:p>
         </p:txBody>
@@ -4957,7 +5191,7 @@
           <p:cNvPr id="10" name="">
             <a:extLst xmlns:a="http://schemas.openxmlformats.org/drawingml/2006/main">
               <a:ext uri="{FF2B5EF4-FFF2-40B4-BE49-F238E27FC236}">
-                <a16:creationId xmlns:a16="http://schemas.microsoft.com/office/drawing/2014/main" id="{8D425EE1-9E20-4752-813D-231BE449427F}"/>
+                <a16:creationId xmlns:a16="http://schemas.microsoft.com/office/drawing/2014/main" id="{F24A2577-D8C5-4F07-BC4F-6388161C806E}"/>
               </a:ext>
             </a:extLst>
           </p:cNvPr>
@@ -5005,7 +5239,7 @@
     </p:spTree>
     <p:extLst>
       <p:ext uri="{BB962C8B-B14F-4D97-AF65-F5344CB8AC3E}">
-        <p14:creationId xmlns:p14="http://schemas.microsoft.com/office/powerpoint/2010/main" val="1990355607"/>
+        <p14:creationId xmlns:p14="http://schemas.microsoft.com/office/powerpoint/2010/main" val="1459990904"/>
       </p:ext>
     </p:extLst>
   </p:cSld>
@@ -5036,7 +5270,7 @@
           <p:cNvPr id="11" name="">
             <a:extLst xmlns:a="http://schemas.openxmlformats.org/drawingml/2006/main">
               <a:ext uri="{FF2B5EF4-FFF2-40B4-BE49-F238E27FC236}">
-                <a16:creationId xmlns:a16="http://schemas.microsoft.com/office/drawing/2014/main" id="{2FA34A0D-E53A-4348-8EA7-6BEBA0764A17}"/>
+                <a16:creationId xmlns:a16="http://schemas.microsoft.com/office/drawing/2014/main" id="{CE123CEE-C015-42D0-B204-11287D579848}"/>
               </a:ext>
             </a:extLst>
           </p:cNvPr>
@@ -5086,7 +5320,7 @@
           <p:cNvPr id="2" name="">
             <a:extLst xmlns:a="http://schemas.openxmlformats.org/drawingml/2006/main">
               <a:ext uri="{FF2B5EF4-FFF2-40B4-BE49-F238E27FC236}">
-                <a16:creationId xmlns:a16="http://schemas.microsoft.com/office/drawing/2014/main" id="{76FC1F8F-2838-4DD5-A6E4-8C0C569FBFEE}"/>
+                <a16:creationId xmlns:a16="http://schemas.microsoft.com/office/drawing/2014/main" id="{35ABA4C5-EEEE-4AA4-AD1A-697A530BC720}"/>
               </a:ext>
             </a:extLst>
           </p:cNvPr>
@@ -5126,7 +5360,7 @@
                   <a:srgbClr val="071126"/>
                 </a:solidFill>
               </a:rPr>
-              <a:t>Presentation takeaway</a:t>
+              <a:t>CI Debugger is ready for workflow-run investigation</a:t>
             </a:r>
           </a:p>
         </p:txBody>
@@ -5136,7 +5370,7 @@
           <p:cNvPr id="3" name="">
             <a:extLst xmlns:a="http://schemas.openxmlformats.org/drawingml/2006/main">
               <a:ext uri="{FF2B5EF4-FFF2-40B4-BE49-F238E27FC236}">
-                <a16:creationId xmlns:a16="http://schemas.microsoft.com/office/drawing/2014/main" id="{ED737B85-7515-41B4-A1D4-B59FDDBAA6EA}"/>
+                <a16:creationId xmlns:a16="http://schemas.microsoft.com/office/drawing/2014/main" id="{0AD27966-C15D-4D69-AA67-1481C0228778}"/>
               </a:ext>
             </a:extLst>
           </p:cNvPr>
@@ -5176,6 +5410,1114 @@
                   <a:srgbClr val="536179"/>
                 </a:solidFill>
               </a:rPr>
+              <a:t>The user provides a GitHub Actions run id to diagnose failed jobs and logs.</a:t>
+            </a:r>
+          </a:p>
+        </p:txBody>
+      </p:sp>
+      <p:sp>
+        <p:nvSpPr>
+          <p:cNvPr id="4" name="">
+            <a:extLst xmlns:a="http://schemas.openxmlformats.org/drawingml/2006/main">
+              <a:ext uri="{FF2B5EF4-FFF2-40B4-BE49-F238E27FC236}">
+                <a16:creationId xmlns:a16="http://schemas.microsoft.com/office/drawing/2014/main" id="{DE3BADAC-A9F0-4DDA-95EB-1A19FE6222E7}"/>
+              </a:ext>
+            </a:extLst>
+          </p:cNvPr>
+          <p:cNvSpPr>
+            <a:spLocks xmlns:a="http://schemas.openxmlformats.org/drawingml/2006/main" noGrp="1"/>
+          </p:cNvSpPr>
+          <p:nvPr/>
+        </p:nvSpPr>
+        <p:spPr>
+          <a:xfrm xmlns:a="http://schemas.openxmlformats.org/drawingml/2006/main">
+            <a:off x="438150" y="1543050"/>
+            <a:ext cx="6915150" cy="4248150"/>
+          </a:xfrm>
+          <a:prstGeom xmlns:a="http://schemas.openxmlformats.org/drawingml/2006/main" prst="roundRect">
+            <a:avLst>
+              <a:gd name="adj" fmla="val 2691"/>
+            </a:avLst>
+          </a:prstGeom>
+          <a:solidFill xmlns:a="http://schemas.openxmlformats.org/drawingml/2006/main">
+            <a:srgbClr val="FFFFFF"/>
+          </a:solidFill>
+          <a:ln xmlns:a="http://schemas.openxmlformats.org/drawingml/2006/main" w="9525">
+            <a:solidFill>
+              <a:srgbClr val="D8DEE9"/>
+            </a:solidFill>
+            <a:prstDash val="solid"/>
+          </a:ln>
+        </p:spPr>
+      </p:sp>
+      <p:pic>
+        <p:nvPicPr>
+          <p:cNvPr id="15" name=""/>
+          <p:cNvPicPr>
+            <a:picLocks xmlns:a="http://schemas.openxmlformats.org/drawingml/2006/main" noChangeAspect="1"/>
+          </p:cNvPicPr>
+          <p:nvPr/>
+        </p:nvPicPr>
+        <p:blipFill>
+          <a:blip xmlns:r="http://schemas.openxmlformats.org/officeDocument/2006/relationships" xmlns:a="http://schemas.openxmlformats.org/drawingml/2006/main" r:embed="R7fbabc5e33b34b41"/>
+          <a:stretch xmlns:a="http://schemas.openxmlformats.org/drawingml/2006/main"/>
+        </p:blipFill>
+        <p:spPr>
+          <a:xfrm xmlns:a="http://schemas.openxmlformats.org/drawingml/2006/main">
+            <a:off x="514350" y="2481265"/>
+            <a:ext cx="6762750" cy="2371720"/>
+          </a:xfrm>
+          <a:prstGeom xmlns:a="http://schemas.openxmlformats.org/drawingml/2006/main" prst="rect">
+            <a:avLst/>
+          </a:prstGeom>
+        </p:spPr>
+      </p:pic>
+      <p:sp>
+        <p:nvSpPr>
+          <p:cNvPr id="6" name="">
+            <a:extLst xmlns:a="http://schemas.openxmlformats.org/drawingml/2006/main">
+              <a:ext uri="{FF2B5EF4-FFF2-40B4-BE49-F238E27FC236}">
+                <a16:creationId xmlns:a16="http://schemas.microsoft.com/office/drawing/2014/main" id="{96146A1C-A667-4CB5-B120-182EEC6C1B63}"/>
+              </a:ext>
+            </a:extLst>
+          </p:cNvPr>
+          <p:cNvSpPr>
+            <a:spLocks xmlns:a="http://schemas.openxmlformats.org/drawingml/2006/main" noGrp="1"/>
+          </p:cNvSpPr>
+          <p:nvPr/>
+        </p:nvSpPr>
+        <p:spPr>
+          <a:xfrm xmlns:a="http://schemas.openxmlformats.org/drawingml/2006/main">
+            <a:off x="7762875" y="1695450"/>
+            <a:ext cx="3667125" cy="285750"/>
+          </a:xfrm>
+          <a:prstGeom xmlns:a="http://schemas.openxmlformats.org/drawingml/2006/main" prst="rect">
+            <a:avLst/>
+          </a:prstGeom>
+          <a:noFill xmlns:a="http://schemas.openxmlformats.org/drawingml/2006/main"/>
+          <a:ln xmlns:a="http://schemas.openxmlformats.org/drawingml/2006/main" w="0">
+            <a:noFill/>
+            <a:prstDash val="solid"/>
+          </a:ln>
+        </p:spPr>
+        <p:txBody>
+          <a:bodyPr xmlns:a="http://schemas.openxmlformats.org/drawingml/2006/main"/>
+          <a:lstStyle xmlns:a="http://schemas.openxmlformats.org/drawingml/2006/main"/>
+          <a:p xmlns:a="http://schemas.openxmlformats.org/drawingml/2006/main">
+            <a:pPr algn="l">
+              <a:defRPr sz="1650" b="1">
+                <a:solidFill>
+                  <a:srgbClr val="071126"/>
+                </a:solidFill>
+              </a:defRPr>
+            </a:pPr>
+            <a:r>
+              <a:rPr sz="1650" b="1">
+                <a:solidFill>
+                  <a:srgbClr val="071126"/>
+                </a:solidFill>
+              </a:rPr>
+              <a:t>What this screen shows</a:t>
+            </a:r>
+          </a:p>
+        </p:txBody>
+      </p:sp>
+      <p:sp>
+        <p:nvSpPr>
+          <p:cNvPr id="7" name="">
+            <a:extLst xmlns:a="http://schemas.openxmlformats.org/drawingml/2006/main">
+              <a:ext uri="{FF2B5EF4-FFF2-40B4-BE49-F238E27FC236}">
+                <a16:creationId xmlns:a16="http://schemas.microsoft.com/office/drawing/2014/main" id="{F4CE9861-EC6D-47EA-BBD9-B054BBC2C1A2}"/>
+              </a:ext>
+            </a:extLst>
+          </p:cNvPr>
+          <p:cNvSpPr>
+            <a:spLocks xmlns:a="http://schemas.openxmlformats.org/drawingml/2006/main" noGrp="1"/>
+          </p:cNvSpPr>
+          <p:nvPr/>
+        </p:nvSpPr>
+        <p:spPr>
+          <a:xfrm xmlns:a="http://schemas.openxmlformats.org/drawingml/2006/main">
+            <a:off x="7762875" y="2095500"/>
+            <a:ext cx="3667125" cy="1295400"/>
+          </a:xfrm>
+          <a:prstGeom xmlns:a="http://schemas.openxmlformats.org/drawingml/2006/main" prst="rect">
+            <a:avLst/>
+          </a:prstGeom>
+          <a:noFill xmlns:a="http://schemas.openxmlformats.org/drawingml/2006/main"/>
+          <a:ln xmlns:a="http://schemas.openxmlformats.org/drawingml/2006/main" w="0">
+            <a:noFill/>
+            <a:prstDash val="solid"/>
+          </a:ln>
+        </p:spPr>
+        <p:txBody>
+          <a:bodyPr xmlns:a="http://schemas.openxmlformats.org/drawingml/2006/main"/>
+          <a:lstStyle xmlns:a="http://schemas.openxmlformats.org/drawingml/2006/main"/>
+          <a:p xmlns:a="http://schemas.openxmlformats.org/drawingml/2006/main">
+            <a:pPr algn="l">
+              <a:defRPr sz="1275" b="0">
+                <a:solidFill>
+                  <a:srgbClr val="536179"/>
+                </a:solidFill>
+              </a:defRPr>
+            </a:pPr>
+            <a:r>
+              <a:rPr sz="1275" b="0">
+                <a:solidFill>
+                  <a:srgbClr val="536179"/>
+                </a:solidFill>
+              </a:rPr>
+              <a:t>• Input accepts a GitHub Actions run id.</a:t>
+            </a:r>
+          </a:p>
+          <a:p xmlns:a="http://schemas.openxmlformats.org/drawingml/2006/main">
+            <a:pPr algn="l">
+              <a:defRPr sz="1275" b="0">
+                <a:solidFill>
+                  <a:srgbClr val="536179"/>
+                </a:solidFill>
+              </a:defRPr>
+            </a:pPr>
+            <a:r>
+              <a:rPr sz="1275" b="0">
+                <a:solidFill>
+                  <a:srgbClr val="536179"/>
+                </a:solidFill>
+              </a:rPr>
+              <a:t>• The page is disabled until a repository is selected and run id is present.</a:t>
+            </a:r>
+          </a:p>
+          <a:p xmlns:a="http://schemas.openxmlformats.org/drawingml/2006/main">
+            <a:pPr algn="l">
+              <a:defRPr sz="1275" b="0">
+                <a:solidFill>
+                  <a:srgbClr val="536179"/>
+                </a:solidFill>
+              </a:defRPr>
+            </a:pPr>
+            <a:r>
+              <a:rPr sz="1275" b="0">
+                <a:solidFill>
+                  <a:srgbClr val="536179"/>
+                </a:solidFill>
+              </a:rPr>
+              <a:t>• After execution, it shows failure category, root cause, failed jobs, logs, fixes, and validation plan.</a:t>
+            </a:r>
+          </a:p>
+        </p:txBody>
+      </p:sp>
+      <p:sp>
+        <p:nvSpPr>
+          <p:cNvPr id="8" name="">
+            <a:extLst xmlns:a="http://schemas.openxmlformats.org/drawingml/2006/main">
+              <a:ext uri="{FF2B5EF4-FFF2-40B4-BE49-F238E27FC236}">
+                <a16:creationId xmlns:a16="http://schemas.microsoft.com/office/drawing/2014/main" id="{EBEA9660-E6DA-41DD-8CB3-A1FA9F096F4B}"/>
+              </a:ext>
+            </a:extLst>
+          </p:cNvPr>
+          <p:cNvSpPr>
+            <a:spLocks xmlns:a="http://schemas.openxmlformats.org/drawingml/2006/main" noGrp="1"/>
+          </p:cNvSpPr>
+          <p:nvPr/>
+        </p:nvSpPr>
+        <p:spPr>
+          <a:xfrm xmlns:a="http://schemas.openxmlformats.org/drawingml/2006/main">
+            <a:off x="7762875" y="3857625"/>
+            <a:ext cx="3667125" cy="285750"/>
+          </a:xfrm>
+          <a:prstGeom xmlns:a="http://schemas.openxmlformats.org/drawingml/2006/main" prst="rect">
+            <a:avLst/>
+          </a:prstGeom>
+          <a:noFill xmlns:a="http://schemas.openxmlformats.org/drawingml/2006/main"/>
+          <a:ln xmlns:a="http://schemas.openxmlformats.org/drawingml/2006/main" w="0">
+            <a:noFill/>
+            <a:prstDash val="solid"/>
+          </a:ln>
+        </p:spPr>
+        <p:txBody>
+          <a:bodyPr xmlns:a="http://schemas.openxmlformats.org/drawingml/2006/main"/>
+          <a:lstStyle xmlns:a="http://schemas.openxmlformats.org/drawingml/2006/main"/>
+          <a:p xmlns:a="http://schemas.openxmlformats.org/drawingml/2006/main">
+            <a:pPr algn="l">
+              <a:defRPr sz="1650" b="1">
+                <a:solidFill>
+                  <a:srgbClr val="071126"/>
+                </a:solidFill>
+              </a:defRPr>
+            </a:pPr>
+            <a:r>
+              <a:rPr sz="1650" b="1">
+                <a:solidFill>
+                  <a:srgbClr val="071126"/>
+                </a:solidFill>
+              </a:rPr>
+              <a:t>Backend integration</a:t>
+            </a:r>
+          </a:p>
+        </p:txBody>
+      </p:sp>
+      <p:sp>
+        <p:nvSpPr>
+          <p:cNvPr id="9" name="">
+            <a:extLst xmlns:a="http://schemas.openxmlformats.org/drawingml/2006/main">
+              <a:ext uri="{FF2B5EF4-FFF2-40B4-BE49-F238E27FC236}">
+                <a16:creationId xmlns:a16="http://schemas.microsoft.com/office/drawing/2014/main" id="{698807ED-4984-4E1C-AC69-1BBAD0706D0F}"/>
+              </a:ext>
+            </a:extLst>
+          </p:cNvPr>
+          <p:cNvSpPr>
+            <a:spLocks xmlns:a="http://schemas.openxmlformats.org/drawingml/2006/main" noGrp="1"/>
+          </p:cNvSpPr>
+          <p:nvPr/>
+        </p:nvSpPr>
+        <p:spPr>
+          <a:xfrm xmlns:a="http://schemas.openxmlformats.org/drawingml/2006/main">
+            <a:off x="7762875" y="4257675"/>
+            <a:ext cx="3667125" cy="1219200"/>
+          </a:xfrm>
+          <a:prstGeom xmlns:a="http://schemas.openxmlformats.org/drawingml/2006/main" prst="rect">
+            <a:avLst/>
+          </a:prstGeom>
+          <a:noFill xmlns:a="http://schemas.openxmlformats.org/drawingml/2006/main"/>
+          <a:ln xmlns:a="http://schemas.openxmlformats.org/drawingml/2006/main" w="0">
+            <a:noFill/>
+            <a:prstDash val="solid"/>
+          </a:ln>
+        </p:spPr>
+        <p:txBody>
+          <a:bodyPr xmlns:a="http://schemas.openxmlformats.org/drawingml/2006/main"/>
+          <a:lstStyle xmlns:a="http://schemas.openxmlformats.org/drawingml/2006/main"/>
+          <a:p xmlns:a="http://schemas.openxmlformats.org/drawingml/2006/main">
+            <a:pPr algn="l">
+              <a:defRPr sz="1275" b="0">
+                <a:solidFill>
+                  <a:srgbClr val="536179"/>
+                </a:solidFill>
+              </a:defRPr>
+            </a:pPr>
+            <a:r>
+              <a:rPr sz="1275" b="0">
+                <a:solidFill>
+                  <a:srgbClr val="536179"/>
+                </a:solidFill>
+              </a:rPr>
+              <a:t>• POST /api/v1/agent/sessions/:sessionId/actions/runs/:runId/debug.</a:t>
+            </a:r>
+          </a:p>
+          <a:p xmlns:a="http://schemas.openxmlformats.org/drawingml/2006/main">
+            <a:pPr algn="l">
+              <a:defRPr sz="1275" b="0">
+                <a:solidFill>
+                  <a:srgbClr val="536179"/>
+                </a:solidFill>
+              </a:defRPr>
+            </a:pPr>
+            <a:r>
+              <a:rPr sz="1275" b="0">
+                <a:solidFill>
+                  <a:srgbClr val="536179"/>
+                </a:solidFill>
+              </a:rPr>
+              <a:t>• Backend CI debugger agent reads workflow run, failed jobs, logs, workflow config, and related code.</a:t>
+            </a:r>
+          </a:p>
+          <a:p xmlns:a="http://schemas.openxmlformats.org/drawingml/2006/main">
+            <a:pPr algn="l">
+              <a:defRPr sz="1275" b="0">
+                <a:solidFill>
+                  <a:srgbClr val="536179"/>
+                </a:solidFill>
+              </a:defRPr>
+            </a:pPr>
+            <a:r>
+              <a:rPr sz="1275" b="0">
+                <a:solidFill>
+                  <a:srgbClr val="536179"/>
+                </a:solidFill>
+              </a:rPr>
+              <a:t>• Output is structured as root cause plus proposed fix and validation plan.</a:t>
+            </a:r>
+          </a:p>
+        </p:txBody>
+      </p:sp>
+      <p:sp>
+        <p:nvSpPr>
+          <p:cNvPr id="10" name="">
+            <a:extLst xmlns:a="http://schemas.openxmlformats.org/drawingml/2006/main">
+              <a:ext uri="{FF2B5EF4-FFF2-40B4-BE49-F238E27FC236}">
+                <a16:creationId xmlns:a16="http://schemas.microsoft.com/office/drawing/2014/main" id="{CC9AB4F4-223F-4C9F-A654-E8EB5DB7654D}"/>
+              </a:ext>
+            </a:extLst>
+          </p:cNvPr>
+          <p:cNvSpPr>
+            <a:spLocks xmlns:a="http://schemas.openxmlformats.org/drawingml/2006/main" noGrp="1"/>
+          </p:cNvSpPr>
+          <p:nvPr/>
+        </p:nvSpPr>
+        <p:spPr>
+          <a:xfrm xmlns:a="http://schemas.openxmlformats.org/drawingml/2006/main">
+            <a:off x="533400" y="6496050"/>
+            <a:ext cx="3429000" cy="190500"/>
+          </a:xfrm>
+          <a:prstGeom xmlns:a="http://schemas.openxmlformats.org/drawingml/2006/main" prst="rect">
+            <a:avLst/>
+          </a:prstGeom>
+          <a:noFill xmlns:a="http://schemas.openxmlformats.org/drawingml/2006/main"/>
+          <a:ln xmlns:a="http://schemas.openxmlformats.org/drawingml/2006/main" w="0">
+            <a:noFill/>
+            <a:prstDash val="solid"/>
+          </a:ln>
+        </p:spPr>
+        <p:txBody>
+          <a:bodyPr xmlns:a="http://schemas.openxmlformats.org/drawingml/2006/main"/>
+          <a:lstStyle xmlns:a="http://schemas.openxmlformats.org/drawingml/2006/main"/>
+          <a:p xmlns:a="http://schemas.openxmlformats.org/drawingml/2006/main">
+            <a:pPr algn="l">
+              <a:defRPr sz="975" b="0">
+                <a:solidFill>
+                  <a:srgbClr val="536179"/>
+                </a:solidFill>
+              </a:defRPr>
+            </a:pPr>
+            <a:r>
+              <a:rPr sz="975" b="0">
+                <a:solidFill>
+                  <a:srgbClr val="536179"/>
+                </a:solidFill>
+              </a:rPr>
+              <a:t>GitArchitect presentation | 14</a:t>
+            </a:r>
+          </a:p>
+        </p:txBody>
+      </p:sp>
+    </p:spTree>
+    <p:extLst>
+      <p:ext uri="{BB962C8B-B14F-4D97-AF65-F5344CB8AC3E}">
+        <p14:creationId xmlns:p14="http://schemas.microsoft.com/office/powerpoint/2010/main" val="837433343"/>
+      </p:ext>
+    </p:extLst>
+  </p:cSld>
+</p:sld>
+</file>
+
+<file path=ppt/slides/slide15.xml><?xml version="1.0" encoding="utf-8"?>
+<p:sld xmlns:p="http://schemas.openxmlformats.org/presentationml/2006/main">
+  <p:cSld>
+    <p:bg>
+      <p:bgPr>
+        <a:solidFill xmlns:a="http://schemas.openxmlformats.org/drawingml/2006/main">
+          <a:srgbClr val="FFFFFF"/>
+        </a:solidFill>
+      </p:bgPr>
+    </p:bg>
+    <p:spTree>
+      <p:nvGrpSpPr>
+        <p:cNvPr id="1" name=""/>
+        <p:cNvGrpSpPr/>
+        <p:nvPr/>
+      </p:nvGrpSpPr>
+      <p:grpSpPr>
+        <a:xfrm xmlns:a="http://schemas.openxmlformats.org/drawingml/2006/main"/>
+      </p:grpSpPr>
+      <p:sp>
+        <p:nvSpPr>
+          <p:cNvPr id="11" name="">
+            <a:extLst xmlns:a="http://schemas.openxmlformats.org/drawingml/2006/main">
+              <a:ext uri="{FF2B5EF4-FFF2-40B4-BE49-F238E27FC236}">
+                <a16:creationId xmlns:a16="http://schemas.microsoft.com/office/drawing/2014/main" id="{A0B472B9-D59F-4828-AE60-0C57D1EF6F0D}"/>
+              </a:ext>
+            </a:extLst>
+          </p:cNvPr>
+          <p:cNvSpPr>
+            <a:spLocks xmlns:a="http://schemas.openxmlformats.org/drawingml/2006/main" noGrp="1"/>
+          </p:cNvSpPr>
+          <p:nvPr/>
+        </p:nvSpPr>
+        <p:spPr>
+          <a:xfrm xmlns:a="http://schemas.openxmlformats.org/drawingml/2006/main">
+            <a:off x="533400" y="285750"/>
+            <a:ext cx="4381500" cy="209550"/>
+          </a:xfrm>
+          <a:prstGeom xmlns:a="http://schemas.openxmlformats.org/drawingml/2006/main" prst="rect">
+            <a:avLst/>
+          </a:prstGeom>
+          <a:noFill xmlns:a="http://schemas.openxmlformats.org/drawingml/2006/main"/>
+          <a:ln xmlns:a="http://schemas.openxmlformats.org/drawingml/2006/main" w="0">
+            <a:noFill/>
+            <a:prstDash val="solid"/>
+          </a:ln>
+        </p:spPr>
+        <p:txBody>
+          <a:bodyPr xmlns:a="http://schemas.openxmlformats.org/drawingml/2006/main"/>
+          <a:lstStyle xmlns:a="http://schemas.openxmlformats.org/drawingml/2006/main"/>
+          <a:p xmlns:a="http://schemas.openxmlformats.org/drawingml/2006/main">
+            <a:pPr algn="l">
+              <a:defRPr sz="1050" b="1">
+                <a:solidFill>
+                  <a:srgbClr val="536179"/>
+                </a:solidFill>
+              </a:defRPr>
+            </a:pPr>
+            <a:r>
+              <a:rPr sz="1050" b="1">
+                <a:solidFill>
+                  <a:srgbClr val="536179"/>
+                </a:solidFill>
+              </a:rPr>
+              <a:t>GITARCHITECT UI WALKTHROUGH</a:t>
+            </a:r>
+          </a:p>
+        </p:txBody>
+      </p:sp>
+      <p:sp>
+        <p:nvSpPr>
+          <p:cNvPr id="2" name="">
+            <a:extLst xmlns:a="http://schemas.openxmlformats.org/drawingml/2006/main">
+              <a:ext uri="{FF2B5EF4-FFF2-40B4-BE49-F238E27FC236}">
+                <a16:creationId xmlns:a16="http://schemas.microsoft.com/office/drawing/2014/main" id="{2F72EE6D-C6E7-4AFD-ADF6-3439C3501296}"/>
+              </a:ext>
+            </a:extLst>
+          </p:cNvPr>
+          <p:cNvSpPr>
+            <a:spLocks xmlns:a="http://schemas.openxmlformats.org/drawingml/2006/main" noGrp="1"/>
+          </p:cNvSpPr>
+          <p:nvPr/>
+        </p:nvSpPr>
+        <p:spPr>
+          <a:xfrm xmlns:a="http://schemas.openxmlformats.org/drawingml/2006/main">
+            <a:off x="533400" y="590550"/>
+            <a:ext cx="11049000" cy="457200"/>
+          </a:xfrm>
+          <a:prstGeom xmlns:a="http://schemas.openxmlformats.org/drawingml/2006/main" prst="rect">
+            <a:avLst/>
+          </a:prstGeom>
+          <a:noFill xmlns:a="http://schemas.openxmlformats.org/drawingml/2006/main"/>
+          <a:ln xmlns:a="http://schemas.openxmlformats.org/drawingml/2006/main" w="0">
+            <a:noFill/>
+            <a:prstDash val="solid"/>
+          </a:ln>
+        </p:spPr>
+        <p:txBody>
+          <a:bodyPr xmlns:a="http://schemas.openxmlformats.org/drawingml/2006/main"/>
+          <a:lstStyle xmlns:a="http://schemas.openxmlformats.org/drawingml/2006/main"/>
+          <a:p xmlns:a="http://schemas.openxmlformats.org/drawingml/2006/main">
+            <a:pPr algn="l">
+              <a:defRPr sz="2700" b="1">
+                <a:solidFill>
+                  <a:srgbClr val="071126"/>
+                </a:solidFill>
+              </a:defRPr>
+            </a:pPr>
+            <a:r>
+              <a:rPr sz="2700" b="1">
+                <a:solidFill>
+                  <a:srgbClr val="071126"/>
+                </a:solidFill>
+              </a:rPr>
+              <a:t>GitHub Actions page keeps mutations human-approved</a:t>
+            </a:r>
+          </a:p>
+        </p:txBody>
+      </p:sp>
+      <p:sp>
+        <p:nvSpPr>
+          <p:cNvPr id="3" name="">
+            <a:extLst xmlns:a="http://schemas.openxmlformats.org/drawingml/2006/main">
+              <a:ext uri="{FF2B5EF4-FFF2-40B4-BE49-F238E27FC236}">
+                <a16:creationId xmlns:a16="http://schemas.microsoft.com/office/drawing/2014/main" id="{D20CDA34-4C26-4E7E-B421-4F06F7894340}"/>
+              </a:ext>
+            </a:extLst>
+          </p:cNvPr>
+          <p:cNvSpPr>
+            <a:spLocks xmlns:a="http://schemas.openxmlformats.org/drawingml/2006/main" noGrp="1"/>
+          </p:cNvSpPr>
+          <p:nvPr/>
+        </p:nvSpPr>
+        <p:spPr>
+          <a:xfrm xmlns:a="http://schemas.openxmlformats.org/drawingml/2006/main">
+            <a:off x="533400" y="1066800"/>
+            <a:ext cx="10287000" cy="285750"/>
+          </a:xfrm>
+          <a:prstGeom xmlns:a="http://schemas.openxmlformats.org/drawingml/2006/main" prst="rect">
+            <a:avLst/>
+          </a:prstGeom>
+          <a:noFill xmlns:a="http://schemas.openxmlformats.org/drawingml/2006/main"/>
+          <a:ln xmlns:a="http://schemas.openxmlformats.org/drawingml/2006/main" w="0">
+            <a:noFill/>
+            <a:prstDash val="solid"/>
+          </a:ln>
+        </p:spPr>
+        <p:txBody>
+          <a:bodyPr xmlns:a="http://schemas.openxmlformats.org/drawingml/2006/main"/>
+          <a:lstStyle xmlns:a="http://schemas.openxmlformats.org/drawingml/2006/main"/>
+          <a:p xmlns:a="http://schemas.openxmlformats.org/drawingml/2006/main">
+            <a:pPr algn="l">
+              <a:defRPr sz="1350" b="0">
+                <a:solidFill>
+                  <a:srgbClr val="536179"/>
+                </a:solidFill>
+              </a:defRPr>
+            </a:pPr>
+            <a:r>
+              <a:rPr sz="1350" b="0">
+                <a:solidFill>
+                  <a:srgbClr val="536179"/>
+                </a:solidFill>
+              </a:rPr>
+              <a:t>Write operations are scoped to the selected repository and run only after approval.</a:t>
+            </a:r>
+          </a:p>
+        </p:txBody>
+      </p:sp>
+      <p:sp>
+        <p:nvSpPr>
+          <p:cNvPr id="4" name="">
+            <a:extLst xmlns:a="http://schemas.openxmlformats.org/drawingml/2006/main">
+              <a:ext uri="{FF2B5EF4-FFF2-40B4-BE49-F238E27FC236}">
+                <a16:creationId xmlns:a16="http://schemas.microsoft.com/office/drawing/2014/main" id="{6FE19F34-1B98-4CD8-B478-2E5C32F3B9DC}"/>
+              </a:ext>
+            </a:extLst>
+          </p:cNvPr>
+          <p:cNvSpPr>
+            <a:spLocks xmlns:a="http://schemas.openxmlformats.org/drawingml/2006/main" noGrp="1"/>
+          </p:cNvSpPr>
+          <p:nvPr/>
+        </p:nvSpPr>
+        <p:spPr>
+          <a:xfrm xmlns:a="http://schemas.openxmlformats.org/drawingml/2006/main">
+            <a:off x="438150" y="1543050"/>
+            <a:ext cx="6915150" cy="4248150"/>
+          </a:xfrm>
+          <a:prstGeom xmlns:a="http://schemas.openxmlformats.org/drawingml/2006/main" prst="roundRect">
+            <a:avLst>
+              <a:gd name="adj" fmla="val 2691"/>
+            </a:avLst>
+          </a:prstGeom>
+          <a:solidFill xmlns:a="http://schemas.openxmlformats.org/drawingml/2006/main">
+            <a:srgbClr val="FFFFFF"/>
+          </a:solidFill>
+          <a:ln xmlns:a="http://schemas.openxmlformats.org/drawingml/2006/main" w="9525">
+            <a:solidFill>
+              <a:srgbClr val="D8DEE9"/>
+            </a:solidFill>
+            <a:prstDash val="solid"/>
+          </a:ln>
+        </p:spPr>
+      </p:sp>
+      <p:pic>
+        <p:nvPicPr>
+          <p:cNvPr id="15" name=""/>
+          <p:cNvPicPr>
+            <a:picLocks xmlns:a="http://schemas.openxmlformats.org/drawingml/2006/main" noChangeAspect="1"/>
+          </p:cNvPicPr>
+          <p:nvPr/>
+        </p:nvPicPr>
+        <p:blipFill>
+          <a:blip xmlns:r="http://schemas.openxmlformats.org/officeDocument/2006/relationships" xmlns:a="http://schemas.openxmlformats.org/drawingml/2006/main" r:embed="R1d48a3ffe6414511"/>
+          <a:stretch xmlns:a="http://schemas.openxmlformats.org/drawingml/2006/main"/>
+        </p:blipFill>
+        <p:spPr>
+          <a:xfrm xmlns:a="http://schemas.openxmlformats.org/drawingml/2006/main">
+            <a:off x="514350" y="2255723"/>
+            <a:ext cx="6762750" cy="2822805"/>
+          </a:xfrm>
+          <a:prstGeom xmlns:a="http://schemas.openxmlformats.org/drawingml/2006/main" prst="rect">
+            <a:avLst/>
+          </a:prstGeom>
+        </p:spPr>
+      </p:pic>
+      <p:sp>
+        <p:nvSpPr>
+          <p:cNvPr id="6" name="">
+            <a:extLst xmlns:a="http://schemas.openxmlformats.org/drawingml/2006/main">
+              <a:ext uri="{FF2B5EF4-FFF2-40B4-BE49-F238E27FC236}">
+                <a16:creationId xmlns:a16="http://schemas.microsoft.com/office/drawing/2014/main" id="{31A30005-F631-402C-A6B1-28D3EC7A453E}"/>
+              </a:ext>
+            </a:extLst>
+          </p:cNvPr>
+          <p:cNvSpPr>
+            <a:spLocks xmlns:a="http://schemas.openxmlformats.org/drawingml/2006/main" noGrp="1"/>
+          </p:cNvSpPr>
+          <p:nvPr/>
+        </p:nvSpPr>
+        <p:spPr>
+          <a:xfrm xmlns:a="http://schemas.openxmlformats.org/drawingml/2006/main">
+            <a:off x="7762875" y="1695450"/>
+            <a:ext cx="3667125" cy="285750"/>
+          </a:xfrm>
+          <a:prstGeom xmlns:a="http://schemas.openxmlformats.org/drawingml/2006/main" prst="rect">
+            <a:avLst/>
+          </a:prstGeom>
+          <a:noFill xmlns:a="http://schemas.openxmlformats.org/drawingml/2006/main"/>
+          <a:ln xmlns:a="http://schemas.openxmlformats.org/drawingml/2006/main" w="0">
+            <a:noFill/>
+            <a:prstDash val="solid"/>
+          </a:ln>
+        </p:spPr>
+        <p:txBody>
+          <a:bodyPr xmlns:a="http://schemas.openxmlformats.org/drawingml/2006/main"/>
+          <a:lstStyle xmlns:a="http://schemas.openxmlformats.org/drawingml/2006/main"/>
+          <a:p xmlns:a="http://schemas.openxmlformats.org/drawingml/2006/main">
+            <a:pPr algn="l">
+              <a:defRPr sz="1650" b="1">
+                <a:solidFill>
+                  <a:srgbClr val="071126"/>
+                </a:solidFill>
+              </a:defRPr>
+            </a:pPr>
+            <a:r>
+              <a:rPr sz="1650" b="1">
+                <a:solidFill>
+                  <a:srgbClr val="071126"/>
+                </a:solidFill>
+              </a:rPr>
+              <a:t>What this screen shows</a:t>
+            </a:r>
+          </a:p>
+        </p:txBody>
+      </p:sp>
+      <p:sp>
+        <p:nvSpPr>
+          <p:cNvPr id="7" name="">
+            <a:extLst xmlns:a="http://schemas.openxmlformats.org/drawingml/2006/main">
+              <a:ext uri="{FF2B5EF4-FFF2-40B4-BE49-F238E27FC236}">
+                <a16:creationId xmlns:a16="http://schemas.microsoft.com/office/drawing/2014/main" id="{BCF909DB-C664-4273-80F2-34BFFA8F0951}"/>
+              </a:ext>
+            </a:extLst>
+          </p:cNvPr>
+          <p:cNvSpPr>
+            <a:spLocks xmlns:a="http://schemas.openxmlformats.org/drawingml/2006/main" noGrp="1"/>
+          </p:cNvSpPr>
+          <p:nvPr/>
+        </p:nvSpPr>
+        <p:spPr>
+          <a:xfrm xmlns:a="http://schemas.openxmlformats.org/drawingml/2006/main">
+            <a:off x="7762875" y="2095500"/>
+            <a:ext cx="3667125" cy="1295400"/>
+          </a:xfrm>
+          <a:prstGeom xmlns:a="http://schemas.openxmlformats.org/drawingml/2006/main" prst="rect">
+            <a:avLst/>
+          </a:prstGeom>
+          <a:noFill xmlns:a="http://schemas.openxmlformats.org/drawingml/2006/main"/>
+          <a:ln xmlns:a="http://schemas.openxmlformats.org/drawingml/2006/main" w="0">
+            <a:noFill/>
+            <a:prstDash val="solid"/>
+          </a:ln>
+        </p:spPr>
+        <p:txBody>
+          <a:bodyPr xmlns:a="http://schemas.openxmlformats.org/drawingml/2006/main"/>
+          <a:lstStyle xmlns:a="http://schemas.openxmlformats.org/drawingml/2006/main"/>
+          <a:p xmlns:a="http://schemas.openxmlformats.org/drawingml/2006/main">
+            <a:pPr algn="l">
+              <a:defRPr sz="1275" b="0">
+                <a:solidFill>
+                  <a:srgbClr val="536179"/>
+                </a:solidFill>
+              </a:defRPr>
+            </a:pPr>
+            <a:r>
+              <a:rPr sz="1275" b="0">
+                <a:solidFill>
+                  <a:srgbClr val="536179"/>
+                </a:solidFill>
+              </a:rPr>
+              <a:t>• Instruction box captures the requested GitHub mutation.</a:t>
+            </a:r>
+          </a:p>
+          <a:p xmlns:a="http://schemas.openxmlformats.org/drawingml/2006/main">
+            <a:pPr algn="l">
+              <a:defRPr sz="1275" b="0">
+                <a:solidFill>
+                  <a:srgbClr val="536179"/>
+                </a:solidFill>
+              </a:defRPr>
+            </a:pPr>
+            <a:r>
+              <a:rPr sz="1275" b="0">
+                <a:solidFill>
+                  <a:srgbClr val="536179"/>
+                </a:solidFill>
+              </a:rPr>
+              <a:t>• Repository scope is displayed before preparing the action.</a:t>
+            </a:r>
+          </a:p>
+          <a:p xmlns:a="http://schemas.openxmlformats.org/drawingml/2006/main">
+            <a:pPr algn="l">
+              <a:defRPr sz="1275" b="0">
+                <a:solidFill>
+                  <a:srgbClr val="536179"/>
+                </a:solidFill>
+              </a:defRPr>
+            </a:pPr>
+            <a:r>
+              <a:rPr sz="1275" b="0">
+                <a:solidFill>
+                  <a:srgbClr val="536179"/>
+                </a:solidFill>
+              </a:rPr>
+              <a:t>• Completed status explains when a request cannot be executed directly, such as an unstable PR merge state.</a:t>
+            </a:r>
+          </a:p>
+        </p:txBody>
+      </p:sp>
+      <p:sp>
+        <p:nvSpPr>
+          <p:cNvPr id="8" name="">
+            <a:extLst xmlns:a="http://schemas.openxmlformats.org/drawingml/2006/main">
+              <a:ext uri="{FF2B5EF4-FFF2-40B4-BE49-F238E27FC236}">
+                <a16:creationId xmlns:a16="http://schemas.microsoft.com/office/drawing/2014/main" id="{85FD21C3-D56C-4BB2-B664-DCB4EAB2B406}"/>
+              </a:ext>
+            </a:extLst>
+          </p:cNvPr>
+          <p:cNvSpPr>
+            <a:spLocks xmlns:a="http://schemas.openxmlformats.org/drawingml/2006/main" noGrp="1"/>
+          </p:cNvSpPr>
+          <p:nvPr/>
+        </p:nvSpPr>
+        <p:spPr>
+          <a:xfrm xmlns:a="http://schemas.openxmlformats.org/drawingml/2006/main">
+            <a:off x="7762875" y="3857625"/>
+            <a:ext cx="3667125" cy="285750"/>
+          </a:xfrm>
+          <a:prstGeom xmlns:a="http://schemas.openxmlformats.org/drawingml/2006/main" prst="rect">
+            <a:avLst/>
+          </a:prstGeom>
+          <a:noFill xmlns:a="http://schemas.openxmlformats.org/drawingml/2006/main"/>
+          <a:ln xmlns:a="http://schemas.openxmlformats.org/drawingml/2006/main" w="0">
+            <a:noFill/>
+            <a:prstDash val="solid"/>
+          </a:ln>
+        </p:spPr>
+        <p:txBody>
+          <a:bodyPr xmlns:a="http://schemas.openxmlformats.org/drawingml/2006/main"/>
+          <a:lstStyle xmlns:a="http://schemas.openxmlformats.org/drawingml/2006/main"/>
+          <a:p xmlns:a="http://schemas.openxmlformats.org/drawingml/2006/main">
+            <a:pPr algn="l">
+              <a:defRPr sz="1650" b="1">
+                <a:solidFill>
+                  <a:srgbClr val="071126"/>
+                </a:solidFill>
+              </a:defRPr>
+            </a:pPr>
+            <a:r>
+              <a:rPr sz="1650" b="1">
+                <a:solidFill>
+                  <a:srgbClr val="071126"/>
+                </a:solidFill>
+              </a:rPr>
+              <a:t>Backend integration</a:t>
+            </a:r>
+          </a:p>
+        </p:txBody>
+      </p:sp>
+      <p:sp>
+        <p:nvSpPr>
+          <p:cNvPr id="9" name="">
+            <a:extLst xmlns:a="http://schemas.openxmlformats.org/drawingml/2006/main">
+              <a:ext uri="{FF2B5EF4-FFF2-40B4-BE49-F238E27FC236}">
+                <a16:creationId xmlns:a16="http://schemas.microsoft.com/office/drawing/2014/main" id="{B599BCBE-383F-4F8C-B0C9-C7F00B8BA737}"/>
+              </a:ext>
+            </a:extLst>
+          </p:cNvPr>
+          <p:cNvSpPr>
+            <a:spLocks xmlns:a="http://schemas.openxmlformats.org/drawingml/2006/main" noGrp="1"/>
+          </p:cNvSpPr>
+          <p:nvPr/>
+        </p:nvSpPr>
+        <p:spPr>
+          <a:xfrm xmlns:a="http://schemas.openxmlformats.org/drawingml/2006/main">
+            <a:off x="7762875" y="4257675"/>
+            <a:ext cx="3667125" cy="1219200"/>
+          </a:xfrm>
+          <a:prstGeom xmlns:a="http://schemas.openxmlformats.org/drawingml/2006/main" prst="rect">
+            <a:avLst/>
+          </a:prstGeom>
+          <a:noFill xmlns:a="http://schemas.openxmlformats.org/drawingml/2006/main"/>
+          <a:ln xmlns:a="http://schemas.openxmlformats.org/drawingml/2006/main" w="0">
+            <a:noFill/>
+            <a:prstDash val="solid"/>
+          </a:ln>
+        </p:spPr>
+        <p:txBody>
+          <a:bodyPr xmlns:a="http://schemas.openxmlformats.org/drawingml/2006/main"/>
+          <a:lstStyle xmlns:a="http://schemas.openxmlformats.org/drawingml/2006/main"/>
+          <a:p xmlns:a="http://schemas.openxmlformats.org/drawingml/2006/main">
+            <a:pPr algn="l">
+              <a:defRPr sz="1275" b="0">
+                <a:solidFill>
+                  <a:srgbClr val="536179"/>
+                </a:solidFill>
+              </a:defRPr>
+            </a:pPr>
+            <a:r>
+              <a:rPr sz="1275" b="0">
+                <a:solidFill>
+                  <a:srgbClr val="536179"/>
+                </a:solidFill>
+              </a:rPr>
+              <a:t>• POST /sessions/:sessionId/github/write prepares the action.</a:t>
+            </a:r>
+          </a:p>
+          <a:p xmlns:a="http://schemas.openxmlformats.org/drawingml/2006/main">
+            <a:pPr algn="l">
+              <a:defRPr sz="1275" b="0">
+                <a:solidFill>
+                  <a:srgbClr val="536179"/>
+                </a:solidFill>
+              </a:defRPr>
+            </a:pPr>
+            <a:r>
+              <a:rPr sz="1275" b="0">
+                <a:solidFill>
+                  <a:srgbClr val="536179"/>
+                </a:solidFill>
+              </a:rPr>
+              <a:t>• If a write tool is proposed, backend stores paused RunState and returns approvalId.</a:t>
+            </a:r>
+          </a:p>
+          <a:p xmlns:a="http://schemas.openxmlformats.org/drawingml/2006/main">
+            <a:pPr algn="l">
+              <a:defRPr sz="1275" b="0">
+                <a:solidFill>
+                  <a:srgbClr val="536179"/>
+                </a:solidFill>
+              </a:defRPr>
+            </a:pPr>
+            <a:r>
+              <a:rPr sz="1275" b="0">
+                <a:solidFill>
+                  <a:srgbClr val="536179"/>
+                </a:solidFill>
+              </a:rPr>
+              <a:t>• POST /github/approvals/:approvalId/decision approves or rejects it.</a:t>
+            </a:r>
+          </a:p>
+        </p:txBody>
+      </p:sp>
+      <p:sp>
+        <p:nvSpPr>
+          <p:cNvPr id="10" name="">
+            <a:extLst xmlns:a="http://schemas.openxmlformats.org/drawingml/2006/main">
+              <a:ext uri="{FF2B5EF4-FFF2-40B4-BE49-F238E27FC236}">
+                <a16:creationId xmlns:a16="http://schemas.microsoft.com/office/drawing/2014/main" id="{C2900D1C-76D7-42FB-8802-CB5C4C7C69A3}"/>
+              </a:ext>
+            </a:extLst>
+          </p:cNvPr>
+          <p:cNvSpPr>
+            <a:spLocks xmlns:a="http://schemas.openxmlformats.org/drawingml/2006/main" noGrp="1"/>
+          </p:cNvSpPr>
+          <p:nvPr/>
+        </p:nvSpPr>
+        <p:spPr>
+          <a:xfrm xmlns:a="http://schemas.openxmlformats.org/drawingml/2006/main">
+            <a:off x="533400" y="6496050"/>
+            <a:ext cx="3429000" cy="190500"/>
+          </a:xfrm>
+          <a:prstGeom xmlns:a="http://schemas.openxmlformats.org/drawingml/2006/main" prst="rect">
+            <a:avLst/>
+          </a:prstGeom>
+          <a:noFill xmlns:a="http://schemas.openxmlformats.org/drawingml/2006/main"/>
+          <a:ln xmlns:a="http://schemas.openxmlformats.org/drawingml/2006/main" w="0">
+            <a:noFill/>
+            <a:prstDash val="solid"/>
+          </a:ln>
+        </p:spPr>
+        <p:txBody>
+          <a:bodyPr xmlns:a="http://schemas.openxmlformats.org/drawingml/2006/main"/>
+          <a:lstStyle xmlns:a="http://schemas.openxmlformats.org/drawingml/2006/main"/>
+          <a:p xmlns:a="http://schemas.openxmlformats.org/drawingml/2006/main">
+            <a:pPr algn="l">
+              <a:defRPr sz="975" b="0">
+                <a:solidFill>
+                  <a:srgbClr val="536179"/>
+                </a:solidFill>
+              </a:defRPr>
+            </a:pPr>
+            <a:r>
+              <a:rPr sz="975" b="0">
+                <a:solidFill>
+                  <a:srgbClr val="536179"/>
+                </a:solidFill>
+              </a:rPr>
+              <a:t>GitArchitect presentation | 15</a:t>
+            </a:r>
+          </a:p>
+        </p:txBody>
+      </p:sp>
+    </p:spTree>
+    <p:extLst>
+      <p:ext uri="{BB962C8B-B14F-4D97-AF65-F5344CB8AC3E}">
+        <p14:creationId xmlns:p14="http://schemas.microsoft.com/office/powerpoint/2010/main" val="1560105843"/>
+      </p:ext>
+    </p:extLst>
+  </p:cSld>
+</p:sld>
+</file>
+
+<file path=ppt/slides/slide16.xml><?xml version="1.0" encoding="utf-8"?>
+<p:sld xmlns:p="http://schemas.openxmlformats.org/presentationml/2006/main">
+  <p:cSld>
+    <p:bg>
+      <p:bgPr>
+        <a:solidFill xmlns:a="http://schemas.openxmlformats.org/drawingml/2006/main">
+          <a:srgbClr val="FFFFFF"/>
+        </a:solidFill>
+      </p:bgPr>
+    </p:bg>
+    <p:spTree>
+      <p:nvGrpSpPr>
+        <p:cNvPr id="1" name=""/>
+        <p:cNvGrpSpPr/>
+        <p:nvPr/>
+      </p:nvGrpSpPr>
+      <p:grpSpPr>
+        <a:xfrm xmlns:a="http://schemas.openxmlformats.org/drawingml/2006/main"/>
+      </p:grpSpPr>
+      <p:sp>
+        <p:nvSpPr>
+          <p:cNvPr id="11" name="">
+            <a:extLst xmlns:a="http://schemas.openxmlformats.org/drawingml/2006/main">
+              <a:ext uri="{FF2B5EF4-FFF2-40B4-BE49-F238E27FC236}">
+                <a16:creationId xmlns:a16="http://schemas.microsoft.com/office/drawing/2014/main" id="{7132D625-741D-40F5-B425-623F6E127633}"/>
+              </a:ext>
+            </a:extLst>
+          </p:cNvPr>
+          <p:cNvSpPr>
+            <a:spLocks xmlns:a="http://schemas.openxmlformats.org/drawingml/2006/main" noGrp="1"/>
+          </p:cNvSpPr>
+          <p:nvPr/>
+        </p:nvSpPr>
+        <p:spPr>
+          <a:xfrm xmlns:a="http://schemas.openxmlformats.org/drawingml/2006/main">
+            <a:off x="533400" y="285750"/>
+            <a:ext cx="4381500" cy="209550"/>
+          </a:xfrm>
+          <a:prstGeom xmlns:a="http://schemas.openxmlformats.org/drawingml/2006/main" prst="rect">
+            <a:avLst/>
+          </a:prstGeom>
+          <a:noFill xmlns:a="http://schemas.openxmlformats.org/drawingml/2006/main"/>
+          <a:ln xmlns:a="http://schemas.openxmlformats.org/drawingml/2006/main" w="0">
+            <a:noFill/>
+            <a:prstDash val="solid"/>
+          </a:ln>
+        </p:spPr>
+        <p:txBody>
+          <a:bodyPr xmlns:a="http://schemas.openxmlformats.org/drawingml/2006/main"/>
+          <a:lstStyle xmlns:a="http://schemas.openxmlformats.org/drawingml/2006/main"/>
+          <a:p xmlns:a="http://schemas.openxmlformats.org/drawingml/2006/main">
+            <a:pPr algn="l">
+              <a:defRPr sz="1050" b="1">
+                <a:solidFill>
+                  <a:srgbClr val="536179"/>
+                </a:solidFill>
+              </a:defRPr>
+            </a:pPr>
+            <a:r>
+              <a:rPr sz="1050" b="1">
+                <a:solidFill>
+                  <a:srgbClr val="536179"/>
+                </a:solidFill>
+              </a:rPr>
+              <a:t>GITARCHITECT UI WALKTHROUGH</a:t>
+            </a:r>
+          </a:p>
+        </p:txBody>
+      </p:sp>
+      <p:sp>
+        <p:nvSpPr>
+          <p:cNvPr id="2" name="">
+            <a:extLst xmlns:a="http://schemas.openxmlformats.org/drawingml/2006/main">
+              <a:ext uri="{FF2B5EF4-FFF2-40B4-BE49-F238E27FC236}">
+                <a16:creationId xmlns:a16="http://schemas.microsoft.com/office/drawing/2014/main" id="{4FCD6E79-7883-4A1B-9D81-5C1270043D4D}"/>
+              </a:ext>
+            </a:extLst>
+          </p:cNvPr>
+          <p:cNvSpPr>
+            <a:spLocks xmlns:a="http://schemas.openxmlformats.org/drawingml/2006/main" noGrp="1"/>
+          </p:cNvSpPr>
+          <p:nvPr/>
+        </p:nvSpPr>
+        <p:spPr>
+          <a:xfrm xmlns:a="http://schemas.openxmlformats.org/drawingml/2006/main">
+            <a:off x="533400" y="590550"/>
+            <a:ext cx="11049000" cy="457200"/>
+          </a:xfrm>
+          <a:prstGeom xmlns:a="http://schemas.openxmlformats.org/drawingml/2006/main" prst="rect">
+            <a:avLst/>
+          </a:prstGeom>
+          <a:noFill xmlns:a="http://schemas.openxmlformats.org/drawingml/2006/main"/>
+          <a:ln xmlns:a="http://schemas.openxmlformats.org/drawingml/2006/main" w="0">
+            <a:noFill/>
+            <a:prstDash val="solid"/>
+          </a:ln>
+        </p:spPr>
+        <p:txBody>
+          <a:bodyPr xmlns:a="http://schemas.openxmlformats.org/drawingml/2006/main"/>
+          <a:lstStyle xmlns:a="http://schemas.openxmlformats.org/drawingml/2006/main"/>
+          <a:p xmlns:a="http://schemas.openxmlformats.org/drawingml/2006/main">
+            <a:pPr algn="l">
+              <a:defRPr sz="2700" b="1">
+                <a:solidFill>
+                  <a:srgbClr val="071126"/>
+                </a:solidFill>
+              </a:defRPr>
+            </a:pPr>
+            <a:r>
+              <a:rPr sz="2700" b="1">
+                <a:solidFill>
+                  <a:srgbClr val="071126"/>
+                </a:solidFill>
+              </a:rPr>
+              <a:t>Presentation takeaway</a:t>
+            </a:r>
+          </a:p>
+        </p:txBody>
+      </p:sp>
+      <p:sp>
+        <p:nvSpPr>
+          <p:cNvPr id="3" name="">
+            <a:extLst xmlns:a="http://schemas.openxmlformats.org/drawingml/2006/main">
+              <a:ext uri="{FF2B5EF4-FFF2-40B4-BE49-F238E27FC236}">
+                <a16:creationId xmlns:a16="http://schemas.microsoft.com/office/drawing/2014/main" id="{A73E4CF4-591C-4676-BFE6-602474FCB3AF}"/>
+              </a:ext>
+            </a:extLst>
+          </p:cNvPr>
+          <p:cNvSpPr>
+            <a:spLocks xmlns:a="http://schemas.openxmlformats.org/drawingml/2006/main" noGrp="1"/>
+          </p:cNvSpPr>
+          <p:nvPr/>
+        </p:nvSpPr>
+        <p:spPr>
+          <a:xfrm xmlns:a="http://schemas.openxmlformats.org/drawingml/2006/main">
+            <a:off x="533400" y="1066800"/>
+            <a:ext cx="10287000" cy="285750"/>
+          </a:xfrm>
+          <a:prstGeom xmlns:a="http://schemas.openxmlformats.org/drawingml/2006/main" prst="rect">
+            <a:avLst/>
+          </a:prstGeom>
+          <a:noFill xmlns:a="http://schemas.openxmlformats.org/drawingml/2006/main"/>
+          <a:ln xmlns:a="http://schemas.openxmlformats.org/drawingml/2006/main" w="0">
+            <a:noFill/>
+            <a:prstDash val="solid"/>
+          </a:ln>
+        </p:spPr>
+        <p:txBody>
+          <a:bodyPr xmlns:a="http://schemas.openxmlformats.org/drawingml/2006/main"/>
+          <a:lstStyle xmlns:a="http://schemas.openxmlformats.org/drawingml/2006/main"/>
+          <a:p xmlns:a="http://schemas.openxmlformats.org/drawingml/2006/main">
+            <a:pPr algn="l">
+              <a:defRPr sz="1350" b="0">
+                <a:solidFill>
+                  <a:srgbClr val="536179"/>
+                </a:solidFill>
+              </a:defRPr>
+            </a:pPr>
+            <a:r>
+              <a:rPr sz="1350" b="0">
+                <a:solidFill>
+                  <a:srgbClr val="536179"/>
+                </a:solidFill>
+              </a:rPr>
               <a:t>Every workflow is session-scoped, repository-aware, and evidence-based.</a:t>
             </a:r>
           </a:p>
@@ -5186,7 +6528,7 @@
           <p:cNvPr id="4" name="">
             <a:extLst xmlns:a="http://schemas.openxmlformats.org/drawingml/2006/main">
               <a:ext uri="{FF2B5EF4-FFF2-40B4-BE49-F238E27FC236}">
-                <a16:creationId xmlns:a16="http://schemas.microsoft.com/office/drawing/2014/main" id="{7675118A-93D8-4C40-93A3-317E5E50F390}"/>
+                <a16:creationId xmlns:a16="http://schemas.microsoft.com/office/drawing/2014/main" id="{B38D6532-9327-467C-90BE-1DB05E5A1F99}"/>
               </a:ext>
             </a:extLst>
           </p:cNvPr>
@@ -5236,7 +6578,7 @@
           <p:cNvPr id="5" name="">
             <a:extLst xmlns:a="http://schemas.openxmlformats.org/drawingml/2006/main">
               <a:ext uri="{FF2B5EF4-FFF2-40B4-BE49-F238E27FC236}">
-                <a16:creationId xmlns:a16="http://schemas.microsoft.com/office/drawing/2014/main" id="{BD48A13D-2642-4925-924B-75BA86DA7BB1}"/>
+                <a16:creationId xmlns:a16="http://schemas.microsoft.com/office/drawing/2014/main" id="{3B1EA8DC-43E5-4E5C-8A02-EA1216B0EF8C}"/>
               </a:ext>
             </a:extLst>
           </p:cNvPr>
@@ -5337,7 +6679,7 @@
           <p:cNvPr id="6" name="">
             <a:extLst xmlns:a="http://schemas.openxmlformats.org/drawingml/2006/main">
               <a:ext uri="{FF2B5EF4-FFF2-40B4-BE49-F238E27FC236}">
-                <a16:creationId xmlns:a16="http://schemas.microsoft.com/office/drawing/2014/main" id="{17D5D8A5-DC68-4A6E-8855-734DF417D189}"/>
+                <a16:creationId xmlns:a16="http://schemas.microsoft.com/office/drawing/2014/main" id="{DE038DCA-FD52-4F75-AC86-4D06505F977C}"/>
               </a:ext>
             </a:extLst>
           </p:cNvPr>
@@ -5387,7 +6729,7 @@
           <p:cNvPr id="7" name="">
             <a:extLst xmlns:a="http://schemas.openxmlformats.org/drawingml/2006/main">
               <a:ext uri="{FF2B5EF4-FFF2-40B4-BE49-F238E27FC236}">
-                <a16:creationId xmlns:a16="http://schemas.microsoft.com/office/drawing/2014/main" id="{32050F13-A627-4B55-BA13-002923991165}"/>
+                <a16:creationId xmlns:a16="http://schemas.microsoft.com/office/drawing/2014/main" id="{EFE21FE4-A5BA-43E6-B44A-2AA0668BAA1D}"/>
               </a:ext>
             </a:extLst>
           </p:cNvPr>
@@ -5488,7 +6830,7 @@
           <p:cNvPr id="8" name="">
             <a:extLst xmlns:a="http://schemas.openxmlformats.org/drawingml/2006/main">
               <a:ext uri="{FF2B5EF4-FFF2-40B4-BE49-F238E27FC236}">
-                <a16:creationId xmlns:a16="http://schemas.microsoft.com/office/drawing/2014/main" id="{13D857CB-954C-4115-AC37-9C2898E9FCCA}"/>
+                <a16:creationId xmlns:a16="http://schemas.microsoft.com/office/drawing/2014/main" id="{6EC7910E-9D38-4540-BC3A-902F64A88010}"/>
               </a:ext>
             </a:extLst>
           </p:cNvPr>
@@ -5523,7 +6865,7 @@
           <p:cNvPr id="9" name="">
             <a:extLst xmlns:a="http://schemas.openxmlformats.org/drawingml/2006/main">
               <a:ext uri="{FF2B5EF4-FFF2-40B4-BE49-F238E27FC236}">
-                <a16:creationId xmlns:a16="http://schemas.microsoft.com/office/drawing/2014/main" id="{31130943-999E-45B1-B12F-31631156AF2F}"/>
+                <a16:creationId xmlns:a16="http://schemas.microsoft.com/office/drawing/2014/main" id="{AC53D6B4-5646-413C-A0F3-35AB350506F9}"/>
               </a:ext>
             </a:extLst>
           </p:cNvPr>
@@ -5573,7 +6915,7 @@
           <p:cNvPr id="10" name="">
             <a:extLst xmlns:a="http://schemas.openxmlformats.org/drawingml/2006/main">
               <a:ext uri="{FF2B5EF4-FFF2-40B4-BE49-F238E27FC236}">
-                <a16:creationId xmlns:a16="http://schemas.microsoft.com/office/drawing/2014/main" id="{3DA0FE24-983F-4819-AF8F-6D9E37C2923D}"/>
+                <a16:creationId xmlns:a16="http://schemas.microsoft.com/office/drawing/2014/main" id="{EF573154-CF50-4E3D-A557-E70F11E7E607}"/>
               </a:ext>
             </a:extLst>
           </p:cNvPr>
@@ -5613,7 +6955,7 @@
                   <a:srgbClr val="536179"/>
                 </a:solidFill>
               </a:rPr>
-              <a:t>GitArchitect presentation | 14</a:t>
+              <a:t>GitArchitect presentation | 16</a:t>
             </a:r>
           </a:p>
         </p:txBody>
@@ -5621,7 +6963,7 @@
     </p:spTree>
     <p:extLst>
       <p:ext uri="{BB962C8B-B14F-4D97-AF65-F5344CB8AC3E}">
-        <p14:creationId xmlns:p14="http://schemas.microsoft.com/office/powerpoint/2010/main" val="995542909"/>
+        <p14:creationId xmlns:p14="http://schemas.microsoft.com/office/powerpoint/2010/main" val="102398039"/>
       </p:ext>
     </p:extLst>
   </p:cSld>
@@ -5652,7 +6994,7 @@
           <p:cNvPr id="11" name="">
             <a:extLst xmlns:a="http://schemas.openxmlformats.org/drawingml/2006/main">
               <a:ext uri="{FF2B5EF4-FFF2-40B4-BE49-F238E27FC236}">
-                <a16:creationId xmlns:a16="http://schemas.microsoft.com/office/drawing/2014/main" id="{D022D189-B6DA-4E06-9345-436F3D1BF5A5}"/>
+                <a16:creationId xmlns:a16="http://schemas.microsoft.com/office/drawing/2014/main" id="{550792CF-AD9D-4C55-8B58-40730C9BC592}"/>
               </a:ext>
             </a:extLst>
           </p:cNvPr>
@@ -5702,7 +7044,7 @@
           <p:cNvPr id="2" name="">
             <a:extLst xmlns:a="http://schemas.openxmlformats.org/drawingml/2006/main">
               <a:ext uri="{FF2B5EF4-FFF2-40B4-BE49-F238E27FC236}">
-                <a16:creationId xmlns:a16="http://schemas.microsoft.com/office/drawing/2014/main" id="{4275F0D8-F42C-4E6F-BEAC-2BE56B0098C4}"/>
+                <a16:creationId xmlns:a16="http://schemas.microsoft.com/office/drawing/2014/main" id="{0C5A3D4A-9492-4B45-9B1A-6B9F7FC1879C}"/>
               </a:ext>
             </a:extLst>
           </p:cNvPr>
@@ -5752,7 +7094,7 @@
           <p:cNvPr id="3" name="">
             <a:extLst xmlns:a="http://schemas.openxmlformats.org/drawingml/2006/main">
               <a:ext uri="{FF2B5EF4-FFF2-40B4-BE49-F238E27FC236}">
-                <a16:creationId xmlns:a16="http://schemas.microsoft.com/office/drawing/2014/main" id="{26CB7FBF-191B-44A5-9CCD-D9ECB0BF15AD}"/>
+                <a16:creationId xmlns:a16="http://schemas.microsoft.com/office/drawing/2014/main" id="{D91421BC-16BD-46C7-B940-9355438F9857}"/>
               </a:ext>
             </a:extLst>
           </p:cNvPr>
@@ -5802,7 +7144,7 @@
           <p:cNvPr id="4" name="">
             <a:extLst xmlns:a="http://schemas.openxmlformats.org/drawingml/2006/main">
               <a:ext uri="{FF2B5EF4-FFF2-40B4-BE49-F238E27FC236}">
-                <a16:creationId xmlns:a16="http://schemas.microsoft.com/office/drawing/2014/main" id="{AB4D6A35-F365-488B-8D53-FBC5AF4151EE}"/>
+                <a16:creationId xmlns:a16="http://schemas.microsoft.com/office/drawing/2014/main" id="{A7DBFE6F-410C-4F0A-92B0-4C4FBC6A7565}"/>
               </a:ext>
             </a:extLst>
           </p:cNvPr>
@@ -5841,7 +7183,7 @@
           <p:nvPr/>
         </p:nvPicPr>
         <p:blipFill>
-          <a:blip xmlns:r="http://schemas.openxmlformats.org/officeDocument/2006/relationships" xmlns:a="http://schemas.openxmlformats.org/drawingml/2006/main" r:embed="R2137e7b1832146a5"/>
+          <a:blip xmlns:r="http://schemas.openxmlformats.org/officeDocument/2006/relationships" xmlns:a="http://schemas.openxmlformats.org/drawingml/2006/main" r:embed="R979413b49c2d4aa4"/>
           <a:stretch xmlns:a="http://schemas.openxmlformats.org/drawingml/2006/main"/>
         </p:blipFill>
         <p:spPr>
@@ -5859,7 +7201,7 @@
           <p:cNvPr id="6" name="">
             <a:extLst xmlns:a="http://schemas.openxmlformats.org/drawingml/2006/main">
               <a:ext uri="{FF2B5EF4-FFF2-40B4-BE49-F238E27FC236}">
-                <a16:creationId xmlns:a16="http://schemas.microsoft.com/office/drawing/2014/main" id="{3971A5DF-79D5-4851-A290-65C80BC885B3}"/>
+                <a16:creationId xmlns:a16="http://schemas.microsoft.com/office/drawing/2014/main" id="{13FBF1FC-157A-4195-8EA7-BCB058AE7CCE}"/>
               </a:ext>
             </a:extLst>
           </p:cNvPr>
@@ -5909,7 +7251,7 @@
           <p:cNvPr id="7" name="">
             <a:extLst xmlns:a="http://schemas.openxmlformats.org/drawingml/2006/main">
               <a:ext uri="{FF2B5EF4-FFF2-40B4-BE49-F238E27FC236}">
-                <a16:creationId xmlns:a16="http://schemas.microsoft.com/office/drawing/2014/main" id="{7247D700-3CCB-4CC0-A3B1-1B376B083DEB}"/>
+                <a16:creationId xmlns:a16="http://schemas.microsoft.com/office/drawing/2014/main" id="{FAFCC8DD-FE06-4456-8524-46AE2E3D8208}"/>
               </a:ext>
             </a:extLst>
           </p:cNvPr>
@@ -5993,7 +7335,7 @@
           <p:cNvPr id="8" name="">
             <a:extLst xmlns:a="http://schemas.openxmlformats.org/drawingml/2006/main">
               <a:ext uri="{FF2B5EF4-FFF2-40B4-BE49-F238E27FC236}">
-                <a16:creationId xmlns:a16="http://schemas.microsoft.com/office/drawing/2014/main" id="{01BCDAFC-BAC2-4FC1-AF8C-29CD83E13990}"/>
+                <a16:creationId xmlns:a16="http://schemas.microsoft.com/office/drawing/2014/main" id="{675A88B7-ACC9-40E8-9D33-D50CEFBD17C1}"/>
               </a:ext>
             </a:extLst>
           </p:cNvPr>
@@ -6043,7 +7385,7 @@
           <p:cNvPr id="9" name="">
             <a:extLst xmlns:a="http://schemas.openxmlformats.org/drawingml/2006/main">
               <a:ext uri="{FF2B5EF4-FFF2-40B4-BE49-F238E27FC236}">
-                <a16:creationId xmlns:a16="http://schemas.microsoft.com/office/drawing/2014/main" id="{526FD08F-076E-4984-8D48-9EF2CECE2902}"/>
+                <a16:creationId xmlns:a16="http://schemas.microsoft.com/office/drawing/2014/main" id="{FD3206C5-9E24-4511-B55F-75E9E16A99CA}"/>
               </a:ext>
             </a:extLst>
           </p:cNvPr>
@@ -6127,7 +7469,7 @@
           <p:cNvPr id="10" name="">
             <a:extLst xmlns:a="http://schemas.openxmlformats.org/drawingml/2006/main">
               <a:ext uri="{FF2B5EF4-FFF2-40B4-BE49-F238E27FC236}">
-                <a16:creationId xmlns:a16="http://schemas.microsoft.com/office/drawing/2014/main" id="{EC675235-CB8F-40EE-BEEE-5184DCFC0926}"/>
+                <a16:creationId xmlns:a16="http://schemas.microsoft.com/office/drawing/2014/main" id="{E3E56040-7605-4218-A325-B501F6A82779}"/>
               </a:ext>
             </a:extLst>
           </p:cNvPr>
@@ -6175,7 +7517,7 @@
     </p:spTree>
     <p:extLst>
       <p:ext uri="{BB962C8B-B14F-4D97-AF65-F5344CB8AC3E}">
-        <p14:creationId xmlns:p14="http://schemas.microsoft.com/office/powerpoint/2010/main" val="1125268960"/>
+        <p14:creationId xmlns:p14="http://schemas.microsoft.com/office/powerpoint/2010/main" val="1599599682"/>
       </p:ext>
     </p:extLst>
   </p:cSld>
@@ -6206,7 +7548,7 @@
           <p:cNvPr id="11" name="">
             <a:extLst xmlns:a="http://schemas.openxmlformats.org/drawingml/2006/main">
               <a:ext uri="{FF2B5EF4-FFF2-40B4-BE49-F238E27FC236}">
-                <a16:creationId xmlns:a16="http://schemas.microsoft.com/office/drawing/2014/main" id="{4768905C-FF5A-48C4-BCD7-8C3FBB904CE1}"/>
+                <a16:creationId xmlns:a16="http://schemas.microsoft.com/office/drawing/2014/main" id="{8D1CA7A9-CE3C-4535-A578-4842A2BDEA55}"/>
               </a:ext>
             </a:extLst>
           </p:cNvPr>
@@ -6256,7 +7598,7 @@
           <p:cNvPr id="2" name="">
             <a:extLst xmlns:a="http://schemas.openxmlformats.org/drawingml/2006/main">
               <a:ext uri="{FF2B5EF4-FFF2-40B4-BE49-F238E27FC236}">
-                <a16:creationId xmlns:a16="http://schemas.microsoft.com/office/drawing/2014/main" id="{C8881117-2B1A-4C19-A8DD-8FC5F70C1781}"/>
+                <a16:creationId xmlns:a16="http://schemas.microsoft.com/office/drawing/2014/main" id="{6A0F2C46-FD8E-467F-BBA9-B4566EA15B60}"/>
               </a:ext>
             </a:extLst>
           </p:cNvPr>
@@ -6306,7 +7648,7 @@
           <p:cNvPr id="3" name="">
             <a:extLst xmlns:a="http://schemas.openxmlformats.org/drawingml/2006/main">
               <a:ext uri="{FF2B5EF4-FFF2-40B4-BE49-F238E27FC236}">
-                <a16:creationId xmlns:a16="http://schemas.microsoft.com/office/drawing/2014/main" id="{B0E91BF3-CD02-4838-8D9A-3A7360D1504D}"/>
+                <a16:creationId xmlns:a16="http://schemas.microsoft.com/office/drawing/2014/main" id="{6F6AD4FB-0F46-497D-A510-2039AFAA1E8F}"/>
               </a:ext>
             </a:extLst>
           </p:cNvPr>
@@ -6356,7 +7698,7 @@
           <p:cNvPr id="4" name="">
             <a:extLst xmlns:a="http://schemas.openxmlformats.org/drawingml/2006/main">
               <a:ext uri="{FF2B5EF4-FFF2-40B4-BE49-F238E27FC236}">
-                <a16:creationId xmlns:a16="http://schemas.microsoft.com/office/drawing/2014/main" id="{5E2F25F5-0B38-450A-9F91-25C55084CC82}"/>
+                <a16:creationId xmlns:a16="http://schemas.microsoft.com/office/drawing/2014/main" id="{6A5ECEEF-2CF6-4DE5-A6E8-9513A4074978}"/>
               </a:ext>
             </a:extLst>
           </p:cNvPr>
@@ -6395,7 +7737,7 @@
           <p:nvPr/>
         </p:nvPicPr>
         <p:blipFill>
-          <a:blip xmlns:r="http://schemas.openxmlformats.org/officeDocument/2006/relationships" xmlns:a="http://schemas.openxmlformats.org/drawingml/2006/main" r:embed="R6d0db42db5b841a9"/>
+          <a:blip xmlns:r="http://schemas.openxmlformats.org/officeDocument/2006/relationships" xmlns:a="http://schemas.openxmlformats.org/drawingml/2006/main" r:embed="Rd395c32a119a44e7"/>
           <a:stretch xmlns:a="http://schemas.openxmlformats.org/drawingml/2006/main"/>
         </p:blipFill>
         <p:spPr>
@@ -6413,7 +7755,7 @@
           <p:cNvPr id="6" name="">
             <a:extLst xmlns:a="http://schemas.openxmlformats.org/drawingml/2006/main">
               <a:ext uri="{FF2B5EF4-FFF2-40B4-BE49-F238E27FC236}">
-                <a16:creationId xmlns:a16="http://schemas.microsoft.com/office/drawing/2014/main" id="{92EAC14A-4F6C-45B0-8EED-AA664D80FE1D}"/>
+                <a16:creationId xmlns:a16="http://schemas.microsoft.com/office/drawing/2014/main" id="{633C5854-4AF2-49C5-A68E-049641432635}"/>
               </a:ext>
             </a:extLst>
           </p:cNvPr>
@@ -6463,7 +7805,7 @@
           <p:cNvPr id="7" name="">
             <a:extLst xmlns:a="http://schemas.openxmlformats.org/drawingml/2006/main">
               <a:ext uri="{FF2B5EF4-FFF2-40B4-BE49-F238E27FC236}">
-                <a16:creationId xmlns:a16="http://schemas.microsoft.com/office/drawing/2014/main" id="{2661B264-0430-42DA-AE83-54AC733BC145}"/>
+                <a16:creationId xmlns:a16="http://schemas.microsoft.com/office/drawing/2014/main" id="{9469ABDC-3C6C-4137-BFA8-BB8FADF03518}"/>
               </a:ext>
             </a:extLst>
           </p:cNvPr>
@@ -6547,7 +7889,7 @@
           <p:cNvPr id="8" name="">
             <a:extLst xmlns:a="http://schemas.openxmlformats.org/drawingml/2006/main">
               <a:ext uri="{FF2B5EF4-FFF2-40B4-BE49-F238E27FC236}">
-                <a16:creationId xmlns:a16="http://schemas.microsoft.com/office/drawing/2014/main" id="{5FA83037-833C-40DA-A6A4-3B66A90BE890}"/>
+                <a16:creationId xmlns:a16="http://schemas.microsoft.com/office/drawing/2014/main" id="{819451D9-2481-457A-96EC-BE9FDBB8236C}"/>
               </a:ext>
             </a:extLst>
           </p:cNvPr>
@@ -6597,7 +7939,7 @@
           <p:cNvPr id="9" name="">
             <a:extLst xmlns:a="http://schemas.openxmlformats.org/drawingml/2006/main">
               <a:ext uri="{FF2B5EF4-FFF2-40B4-BE49-F238E27FC236}">
-                <a16:creationId xmlns:a16="http://schemas.microsoft.com/office/drawing/2014/main" id="{66B908D7-FF49-49F1-92B4-DFA193241735}"/>
+                <a16:creationId xmlns:a16="http://schemas.microsoft.com/office/drawing/2014/main" id="{9D332FC2-0C8D-4ACB-919A-C9BD6F8CCA88}"/>
               </a:ext>
             </a:extLst>
           </p:cNvPr>
@@ -6681,7 +8023,7 @@
           <p:cNvPr id="10" name="">
             <a:extLst xmlns:a="http://schemas.openxmlformats.org/drawingml/2006/main">
               <a:ext uri="{FF2B5EF4-FFF2-40B4-BE49-F238E27FC236}">
-                <a16:creationId xmlns:a16="http://schemas.microsoft.com/office/drawing/2014/main" id="{97B95DA6-667D-4AD9-974E-86244D7934B0}"/>
+                <a16:creationId xmlns:a16="http://schemas.microsoft.com/office/drawing/2014/main" id="{48A667B1-91A6-47BE-A712-CD975E4486F3}"/>
               </a:ext>
             </a:extLst>
           </p:cNvPr>
@@ -6729,7 +8071,7 @@
     </p:spTree>
     <p:extLst>
       <p:ext uri="{BB962C8B-B14F-4D97-AF65-F5344CB8AC3E}">
-        <p14:creationId xmlns:p14="http://schemas.microsoft.com/office/powerpoint/2010/main" val="15428813"/>
+        <p14:creationId xmlns:p14="http://schemas.microsoft.com/office/powerpoint/2010/main" val="2072062232"/>
       </p:ext>
     </p:extLst>
   </p:cSld>
@@ -6760,7 +8102,7 @@
           <p:cNvPr id="11" name="">
             <a:extLst xmlns:a="http://schemas.openxmlformats.org/drawingml/2006/main">
               <a:ext uri="{FF2B5EF4-FFF2-40B4-BE49-F238E27FC236}">
-                <a16:creationId xmlns:a16="http://schemas.microsoft.com/office/drawing/2014/main" id="{FA580CD3-9A72-4309-8856-B6EBF468AE71}"/>
+                <a16:creationId xmlns:a16="http://schemas.microsoft.com/office/drawing/2014/main" id="{40F71CA7-6C4D-48B5-9C5D-3566E7EDC8DB}"/>
               </a:ext>
             </a:extLst>
           </p:cNvPr>
@@ -6810,7 +8152,7 @@
           <p:cNvPr id="2" name="">
             <a:extLst xmlns:a="http://schemas.openxmlformats.org/drawingml/2006/main">
               <a:ext uri="{FF2B5EF4-FFF2-40B4-BE49-F238E27FC236}">
-                <a16:creationId xmlns:a16="http://schemas.microsoft.com/office/drawing/2014/main" id="{8690DA45-939C-4DC3-BAD8-0D0FDC84ADA9}"/>
+                <a16:creationId xmlns:a16="http://schemas.microsoft.com/office/drawing/2014/main" id="{7FAE7014-25BA-4D07-886D-0D15C4492400}"/>
               </a:ext>
             </a:extLst>
           </p:cNvPr>
@@ -6850,7 +8192,7 @@
                   <a:srgbClr val="071126"/>
                 </a:solidFill>
               </a:rPr>
-              <a:t>AI Chat asks repository-aware questions</a:t>
+              <a:t>AI Chat answers from repository evidence</a:t>
             </a:r>
           </a:p>
         </p:txBody>
@@ -6860,7 +8202,7 @@
           <p:cNvPr id="3" name="">
             <a:extLst xmlns:a="http://schemas.openxmlformats.org/drawingml/2006/main">
               <a:ext uri="{FF2B5EF4-FFF2-40B4-BE49-F238E27FC236}">
-                <a16:creationId xmlns:a16="http://schemas.microsoft.com/office/drawing/2014/main" id="{81B6E909-D9FA-407E-9622-6DE857714A2F}"/>
+                <a16:creationId xmlns:a16="http://schemas.microsoft.com/office/drawing/2014/main" id="{98691CCA-2FC2-4393-A1D5-22327A924914}"/>
               </a:ext>
             </a:extLst>
           </p:cNvPr>
@@ -6900,7 +8242,7 @@
                   <a:srgbClr val="536179"/>
                 </a:solidFill>
               </a:rPr>
-              <a:t>The chat page gives a general interface for asking about the selected repository.</a:t>
+              <a:t>The chat page can locate implementation areas such as authentication in the selected repository.</a:t>
             </a:r>
           </a:p>
         </p:txBody>
@@ -6910,7 +8252,7 @@
           <p:cNvPr id="4" name="">
             <a:extLst xmlns:a="http://schemas.openxmlformats.org/drawingml/2006/main">
               <a:ext uri="{FF2B5EF4-FFF2-40B4-BE49-F238E27FC236}">
-                <a16:creationId xmlns:a16="http://schemas.microsoft.com/office/drawing/2014/main" id="{986F9606-34C2-4D29-90B9-7297F3050A66}"/>
+                <a16:creationId xmlns:a16="http://schemas.microsoft.com/office/drawing/2014/main" id="{51FABB32-A6AD-4A5C-85F1-7CE49862BA37}"/>
               </a:ext>
             </a:extLst>
           </p:cNvPr>
@@ -6949,13 +8291,13 @@
           <p:nvPr/>
         </p:nvPicPr>
         <p:blipFill>
-          <a:blip xmlns:r="http://schemas.openxmlformats.org/officeDocument/2006/relationships" xmlns:a="http://schemas.openxmlformats.org/drawingml/2006/main" r:embed="Rbf7fe6b4e2c54cd1"/>
+          <a:blip xmlns:r="http://schemas.openxmlformats.org/officeDocument/2006/relationships" xmlns:a="http://schemas.openxmlformats.org/drawingml/2006/main" r:embed="Ra630c24b226b4203"/>
           <a:stretch xmlns:a="http://schemas.openxmlformats.org/drawingml/2006/main"/>
         </p:blipFill>
         <p:spPr>
           <a:xfrm xmlns:a="http://schemas.openxmlformats.org/drawingml/2006/main">
-            <a:off x="514350" y="1866079"/>
-            <a:ext cx="6762750" cy="3602091"/>
+            <a:off x="514350" y="1883930"/>
+            <a:ext cx="6762750" cy="3566390"/>
           </a:xfrm>
           <a:prstGeom xmlns:a="http://schemas.openxmlformats.org/drawingml/2006/main" prst="rect">
             <a:avLst/>
@@ -6967,7 +8309,7 @@
           <p:cNvPr id="6" name="">
             <a:extLst xmlns:a="http://schemas.openxmlformats.org/drawingml/2006/main">
               <a:ext uri="{FF2B5EF4-FFF2-40B4-BE49-F238E27FC236}">
-                <a16:creationId xmlns:a16="http://schemas.microsoft.com/office/drawing/2014/main" id="{8673DB8E-6E9C-4768-BA96-A215E3FF7CDE}"/>
+                <a16:creationId xmlns:a16="http://schemas.microsoft.com/office/drawing/2014/main" id="{25564174-B24F-430C-9E13-208E78569632}"/>
               </a:ext>
             </a:extLst>
           </p:cNvPr>
@@ -7017,7 +8359,7 @@
           <p:cNvPr id="7" name="">
             <a:extLst xmlns:a="http://schemas.openxmlformats.org/drawingml/2006/main">
               <a:ext uri="{FF2B5EF4-FFF2-40B4-BE49-F238E27FC236}">
-                <a16:creationId xmlns:a16="http://schemas.microsoft.com/office/drawing/2014/main" id="{221C0C94-E52D-4195-AD38-D907A77E8D2F}"/>
+                <a16:creationId xmlns:a16="http://schemas.microsoft.com/office/drawing/2014/main" id="{CAA17804-D305-4ABF-B518-BF1A15C7555A}"/>
               </a:ext>
             </a:extLst>
           </p:cNvPr>
@@ -7057,7 +8399,7 @@
                   <a:srgbClr val="536179"/>
                 </a:solidFill>
               </a:rPr>
-              <a:t>• Selected repository appears in the page header.</a:t>
+              <a:t>• User asks where authentication is implemented.</a:t>
             </a:r>
           </a:p>
           <a:p xmlns:a="http://schemas.openxmlformats.org/drawingml/2006/main">
@@ -7074,7 +8416,7 @@
                   <a:srgbClr val="536179"/>
                 </a:solidFill>
               </a:rPr>
-              <a:t>• Suggested prompts guide common engineering questions.</a:t>
+              <a:t>• GitArchitect returns concrete backend paths and files.</a:t>
             </a:r>
           </a:p>
           <a:p xmlns:a="http://schemas.openxmlformats.org/drawingml/2006/main">
@@ -7091,7 +8433,7 @@
                   <a:srgbClr val="536179"/>
                 </a:solidFill>
               </a:rPr>
-              <a:t>• Composer sends free-form questions to GitArchitect.</a:t>
+              <a:t>• Answer separates module code from route-protection middleware.</a:t>
             </a:r>
           </a:p>
         </p:txBody>
@@ -7101,7 +8443,7 @@
           <p:cNvPr id="8" name="">
             <a:extLst xmlns:a="http://schemas.openxmlformats.org/drawingml/2006/main">
               <a:ext uri="{FF2B5EF4-FFF2-40B4-BE49-F238E27FC236}">
-                <a16:creationId xmlns:a16="http://schemas.microsoft.com/office/drawing/2014/main" id="{CCFD1FB3-6F9A-4B70-9932-98C23F433A37}"/>
+                <a16:creationId xmlns:a16="http://schemas.microsoft.com/office/drawing/2014/main" id="{C51E9C8F-12CB-4F0C-ABF4-F338411FC9A5}"/>
               </a:ext>
             </a:extLst>
           </p:cNvPr>
@@ -7151,7 +8493,7 @@
           <p:cNvPr id="9" name="">
             <a:extLst xmlns:a="http://schemas.openxmlformats.org/drawingml/2006/main">
               <a:ext uri="{FF2B5EF4-FFF2-40B4-BE49-F238E27FC236}">
-                <a16:creationId xmlns:a16="http://schemas.microsoft.com/office/drawing/2014/main" id="{1F190CEF-A9CF-469A-A996-EEE561CA6055}"/>
+                <a16:creationId xmlns:a16="http://schemas.microsoft.com/office/drawing/2014/main" id="{D4B1AD8B-15B0-4F52-BE09-7CD9D0DCD8CA}"/>
               </a:ext>
             </a:extLst>
           </p:cNvPr>
@@ -7225,7 +8567,7 @@
                   <a:srgbClr val="536179"/>
                 </a:solidFill>
               </a:rPr>
-              <a:t>• GitArchitect agent uses GitHub MCP for factual repository answers.</a:t>
+              <a:t>• GitArchitect agent uses GitHub MCP to inspect repository files.</a:t>
             </a:r>
           </a:p>
         </p:txBody>
@@ -7235,7 +8577,7 @@
           <p:cNvPr id="10" name="">
             <a:extLst xmlns:a="http://schemas.openxmlformats.org/drawingml/2006/main">
               <a:ext uri="{FF2B5EF4-FFF2-40B4-BE49-F238E27FC236}">
-                <a16:creationId xmlns:a16="http://schemas.microsoft.com/office/drawing/2014/main" id="{972A5B05-8050-434F-B718-49158444EE2A}"/>
+                <a16:creationId xmlns:a16="http://schemas.microsoft.com/office/drawing/2014/main" id="{410D7F80-1364-4AE2-AFB1-D1139FD4A0A2}"/>
               </a:ext>
             </a:extLst>
           </p:cNvPr>
@@ -7283,7 +8625,7 @@
     </p:spTree>
     <p:extLst>
       <p:ext uri="{BB962C8B-B14F-4D97-AF65-F5344CB8AC3E}">
-        <p14:creationId xmlns:p14="http://schemas.microsoft.com/office/powerpoint/2010/main" val="1357295909"/>
+        <p14:creationId xmlns:p14="http://schemas.microsoft.com/office/powerpoint/2010/main" val="1950502816"/>
       </p:ext>
     </p:extLst>
   </p:cSld>
@@ -7314,7 +8656,7 @@
           <p:cNvPr id="11" name="">
             <a:extLst xmlns:a="http://schemas.openxmlformats.org/drawingml/2006/main">
               <a:ext uri="{FF2B5EF4-FFF2-40B4-BE49-F238E27FC236}">
-                <a16:creationId xmlns:a16="http://schemas.microsoft.com/office/drawing/2014/main" id="{2FB1D481-B370-4DBE-9359-A593B6765B48}"/>
+                <a16:creationId xmlns:a16="http://schemas.microsoft.com/office/drawing/2014/main" id="{54E719EA-02A6-4A9A-95D8-AF5D346CCB29}"/>
               </a:ext>
             </a:extLst>
           </p:cNvPr>
@@ -7364,7 +8706,7 @@
           <p:cNvPr id="2" name="">
             <a:extLst xmlns:a="http://schemas.openxmlformats.org/drawingml/2006/main">
               <a:ext uri="{FF2B5EF4-FFF2-40B4-BE49-F238E27FC236}">
-                <a16:creationId xmlns:a16="http://schemas.microsoft.com/office/drawing/2014/main" id="{8CFF5D0C-F33C-4195-A383-BBFB2EADD9E8}"/>
+                <a16:creationId xmlns:a16="http://schemas.microsoft.com/office/drawing/2014/main" id="{AFE3BC7A-55F4-43C3-BA9F-9B628DE00645}"/>
               </a:ext>
             </a:extLst>
           </p:cNvPr>
@@ -7404,7 +8746,7 @@
                   <a:srgbClr val="071126"/>
                 </a:solidFill>
               </a:rPr>
-              <a:t>Repository Intelligence starts multi-agent analysis</a:t>
+              <a:t>Repository Intelligence summarizes repository health</a:t>
             </a:r>
           </a:p>
         </p:txBody>
@@ -7414,7 +8756,7 @@
           <p:cNvPr id="3" name="">
             <a:extLst xmlns:a="http://schemas.openxmlformats.org/drawingml/2006/main">
               <a:ext uri="{FF2B5EF4-FFF2-40B4-BE49-F238E27FC236}">
-                <a16:creationId xmlns:a16="http://schemas.microsoft.com/office/drawing/2014/main" id="{EF3E8219-16AA-404D-86E7-D9438EB0EB26}"/>
+                <a16:creationId xmlns:a16="http://schemas.microsoft.com/office/drawing/2014/main" id="{E0087F6F-EA33-4935-9037-A2549EA1CF59}"/>
               </a:ext>
             </a:extLst>
           </p:cNvPr>
@@ -7454,7 +8796,7 @@
                   <a:srgbClr val="536179"/>
                 </a:solidFill>
               </a:rPr>
-              <a:t>The page launches architecture, security, testing, and technology discovery.</a:t>
+              <a:t>The first result view gives leadership-level signals before detailed findings.</a:t>
             </a:r>
           </a:p>
         </p:txBody>
@@ -7464,7 +8806,7 @@
           <p:cNvPr id="4" name="">
             <a:extLst xmlns:a="http://schemas.openxmlformats.org/drawingml/2006/main">
               <a:ext uri="{FF2B5EF4-FFF2-40B4-BE49-F238E27FC236}">
-                <a16:creationId xmlns:a16="http://schemas.microsoft.com/office/drawing/2014/main" id="{25834B57-844B-4B6B-A87D-862F37351D8F}"/>
+                <a16:creationId xmlns:a16="http://schemas.microsoft.com/office/drawing/2014/main" id="{19BAA337-4DB1-4109-AA84-7DB00EF4D084}"/>
               </a:ext>
             </a:extLst>
           </p:cNvPr>
@@ -7503,13 +8845,13 @@
           <p:nvPr/>
         </p:nvPicPr>
         <p:blipFill>
-          <a:blip xmlns:r="http://schemas.openxmlformats.org/officeDocument/2006/relationships" xmlns:a="http://schemas.openxmlformats.org/drawingml/2006/main" r:embed="Rcfa14b57adcb43cf"/>
+          <a:blip xmlns:r="http://schemas.openxmlformats.org/officeDocument/2006/relationships" xmlns:a="http://schemas.openxmlformats.org/drawingml/2006/main" r:embed="R02e05e47e1e34dce"/>
           <a:stretch xmlns:a="http://schemas.openxmlformats.org/drawingml/2006/main"/>
         </p:blipFill>
         <p:spPr>
           <a:xfrm xmlns:a="http://schemas.openxmlformats.org/drawingml/2006/main">
-            <a:off x="514350" y="1872422"/>
-            <a:ext cx="6762750" cy="3589405"/>
+            <a:off x="514350" y="1858979"/>
+            <a:ext cx="6762750" cy="3616292"/>
           </a:xfrm>
           <a:prstGeom xmlns:a="http://schemas.openxmlformats.org/drawingml/2006/main" prst="rect">
             <a:avLst/>
@@ -7521,7 +8863,7 @@
           <p:cNvPr id="6" name="">
             <a:extLst xmlns:a="http://schemas.openxmlformats.org/drawingml/2006/main">
               <a:ext uri="{FF2B5EF4-FFF2-40B4-BE49-F238E27FC236}">
-                <a16:creationId xmlns:a16="http://schemas.microsoft.com/office/drawing/2014/main" id="{C6D30AFF-29B0-4C63-B43D-85362E07C2E1}"/>
+                <a16:creationId xmlns:a16="http://schemas.microsoft.com/office/drawing/2014/main" id="{4D79680E-54E9-4F62-B27B-59D93CB841BF}"/>
               </a:ext>
             </a:extLst>
           </p:cNvPr>
@@ -7571,7 +8913,7 @@
           <p:cNvPr id="7" name="">
             <a:extLst xmlns:a="http://schemas.openxmlformats.org/drawingml/2006/main">
               <a:ext uri="{FF2B5EF4-FFF2-40B4-BE49-F238E27FC236}">
-                <a16:creationId xmlns:a16="http://schemas.microsoft.com/office/drawing/2014/main" id="{70BBC933-3CCF-46AE-BB33-7675E2ABB70B}"/>
+                <a16:creationId xmlns:a16="http://schemas.microsoft.com/office/drawing/2014/main" id="{7E10789A-1DCD-49D9-81FB-B57756CFB8FC}"/>
               </a:ext>
             </a:extLst>
           </p:cNvPr>
@@ -7611,7 +8953,7 @@
                   <a:srgbClr val="536179"/>
                 </a:solidFill>
               </a:rPr>
-              <a:t>• Single Analyze repository action starts the repository report.</a:t>
+              <a:t>• Overall score, project type, and analysis engine are visible immediately.</a:t>
             </a:r>
           </a:p>
           <a:p xmlns:a="http://schemas.openxmlformats.org/drawingml/2006/main">
@@ -7628,7 +8970,7 @@
                   <a:srgbClr val="536179"/>
                 </a:solidFill>
               </a:rPr>
-              <a:t>• Screen is intentionally simple before results are returned.</a:t>
+              <a:t>• Specialists identify the repository lens used for analysis.</a:t>
             </a:r>
           </a:p>
           <a:p xmlns:a="http://schemas.openxmlformats.org/drawingml/2006/main">
@@ -7645,7 +8987,7 @@
                   <a:srgbClr val="536179"/>
                 </a:solidFill>
               </a:rPr>
-              <a:t>• Output later shows scores, specialists, stack discovery, findings, and recommendations.</a:t>
+              <a:t>• Summary, score breakdown, and stack discovery make the report scannable.</a:t>
             </a:r>
           </a:p>
         </p:txBody>
@@ -7655,7 +8997,7 @@
           <p:cNvPr id="8" name="">
             <a:extLst xmlns:a="http://schemas.openxmlformats.org/drawingml/2006/main">
               <a:ext uri="{FF2B5EF4-FFF2-40B4-BE49-F238E27FC236}">
-                <a16:creationId xmlns:a16="http://schemas.microsoft.com/office/drawing/2014/main" id="{F7DD4B0E-D3F7-496A-9D4B-144151A7A6DD}"/>
+                <a16:creationId xmlns:a16="http://schemas.microsoft.com/office/drawing/2014/main" id="{C0FACD63-4389-4061-8718-FA3D8F1EC13C}"/>
               </a:ext>
             </a:extLst>
           </p:cNvPr>
@@ -7705,7 +9047,7 @@
           <p:cNvPr id="9" name="">
             <a:extLst xmlns:a="http://schemas.openxmlformats.org/drawingml/2006/main">
               <a:ext uri="{FF2B5EF4-FFF2-40B4-BE49-F238E27FC236}">
-                <a16:creationId xmlns:a16="http://schemas.microsoft.com/office/drawing/2014/main" id="{A1340A3F-E608-4853-A46D-D75EC189BDF4}"/>
+                <a16:creationId xmlns:a16="http://schemas.microsoft.com/office/drawing/2014/main" id="{14BDE968-0685-4986-9A36-57B2E4B57AF3}"/>
               </a:ext>
             </a:extLst>
           </p:cNvPr>
@@ -7745,7 +9087,7 @@
                   <a:srgbClr val="536179"/>
                 </a:solidFill>
               </a:rPr>
-              <a:t>• POST /api/v1/agent/sessions/:sessionId/repository-analysis.</a:t>
+              <a:t>• POST /sessions/:sessionId/repository-analysis starts the report.</a:t>
             </a:r>
           </a:p>
           <a:p xmlns:a="http://schemas.openxmlformats.org/drawingml/2006/main">
@@ -7762,7 +9104,7 @@
                   <a:srgbClr val="536179"/>
                 </a:solidFill>
               </a:rPr>
-              <a:t>• Backend runs repository discovery first.</a:t>
+              <a:t>• Backend resolves selected repository from sessionId before analysis.</a:t>
             </a:r>
           </a:p>
           <a:p xmlns:a="http://schemas.openxmlformats.org/drawingml/2006/main">
@@ -7779,7 +9121,7 @@
                   <a:srgbClr val="536179"/>
                 </a:solidFill>
               </a:rPr>
-              <a:t>• Specialist agents run architecture, security, testing, and technology reviews.</a:t>
+              <a:t>• Repository discovery identifies project type, stack, and specialist routing.</a:t>
             </a:r>
           </a:p>
         </p:txBody>
@@ -7789,7 +9131,7 @@
           <p:cNvPr id="10" name="">
             <a:extLst xmlns:a="http://schemas.openxmlformats.org/drawingml/2006/main">
               <a:ext uri="{FF2B5EF4-FFF2-40B4-BE49-F238E27FC236}">
-                <a16:creationId xmlns:a16="http://schemas.microsoft.com/office/drawing/2014/main" id="{8CB78A00-16D9-43C0-A921-9F61DDF5E39F}"/>
+                <a16:creationId xmlns:a16="http://schemas.microsoft.com/office/drawing/2014/main" id="{C701C34A-D393-4204-BEE8-5B089E57F102}"/>
               </a:ext>
             </a:extLst>
           </p:cNvPr>
@@ -7837,7 +9179,7 @@
     </p:spTree>
     <p:extLst>
       <p:ext uri="{BB962C8B-B14F-4D97-AF65-F5344CB8AC3E}">
-        <p14:creationId xmlns:p14="http://schemas.microsoft.com/office/powerpoint/2010/main" val="492081050"/>
+        <p14:creationId xmlns:p14="http://schemas.microsoft.com/office/powerpoint/2010/main" val="2131354592"/>
       </p:ext>
     </p:extLst>
   </p:cSld>
@@ -7868,7 +9210,7 @@
           <p:cNvPr id="11" name="">
             <a:extLst xmlns:a="http://schemas.openxmlformats.org/drawingml/2006/main">
               <a:ext uri="{FF2B5EF4-FFF2-40B4-BE49-F238E27FC236}">
-                <a16:creationId xmlns:a16="http://schemas.microsoft.com/office/drawing/2014/main" id="{DC4D9DBA-EB60-4041-A002-C9B53DEE5018}"/>
+                <a16:creationId xmlns:a16="http://schemas.microsoft.com/office/drawing/2014/main" id="{A59787D2-E63A-47F8-9EA6-4646C96FED5A}"/>
               </a:ext>
             </a:extLst>
           </p:cNvPr>
@@ -7918,7 +9260,7 @@
           <p:cNvPr id="2" name="">
             <a:extLst xmlns:a="http://schemas.openxmlformats.org/drawingml/2006/main">
               <a:ext uri="{FF2B5EF4-FFF2-40B4-BE49-F238E27FC236}">
-                <a16:creationId xmlns:a16="http://schemas.microsoft.com/office/drawing/2014/main" id="{7243791E-0E37-4C69-8E0A-E14CD450E96D}"/>
+                <a16:creationId xmlns:a16="http://schemas.microsoft.com/office/drawing/2014/main" id="{BCF1CCB5-FAD7-4929-84BF-381B353CD033}"/>
               </a:ext>
             </a:extLst>
           </p:cNvPr>
@@ -7958,7 +9300,7 @@
                   <a:srgbClr val="071126"/>
                 </a:solidFill>
               </a:rPr>
-              <a:t>PR Review summarizes the pull request decision</a:t>
+              <a:t>Repository Intelligence exposes strengths and risks</a:t>
             </a:r>
           </a:p>
         </p:txBody>
@@ -7968,7 +9310,7 @@
           <p:cNvPr id="3" name="">
             <a:extLst xmlns:a="http://schemas.openxmlformats.org/drawingml/2006/main">
               <a:ext uri="{FF2B5EF4-FFF2-40B4-BE49-F238E27FC236}">
-                <a16:creationId xmlns:a16="http://schemas.microsoft.com/office/drawing/2014/main" id="{BC42E8D4-5C75-4241-A2AA-9FA4DBAE0CF4}"/>
+                <a16:creationId xmlns:a16="http://schemas.microsoft.com/office/drawing/2014/main" id="{7172CA7D-F8A8-464B-8CD0-96FAD2897705}"/>
               </a:ext>
             </a:extLst>
           </p:cNvPr>
@@ -8008,7 +9350,7 @@
                   <a:srgbClr val="536179"/>
                 </a:solidFill>
               </a:rPr>
-              <a:t>The top section shows the decision fields the team needs first.</a:t>
+              <a:t>Detailed findings connect recommendations to concrete repository evidence.</a:t>
             </a:r>
           </a:p>
         </p:txBody>
@@ -8018,7 +9360,7 @@
           <p:cNvPr id="4" name="">
             <a:extLst xmlns:a="http://schemas.openxmlformats.org/drawingml/2006/main">
               <a:ext uri="{FF2B5EF4-FFF2-40B4-BE49-F238E27FC236}">
-                <a16:creationId xmlns:a16="http://schemas.microsoft.com/office/drawing/2014/main" id="{27A24243-B69E-43D3-A35A-BC4D3A28F228}"/>
+                <a16:creationId xmlns:a16="http://schemas.microsoft.com/office/drawing/2014/main" id="{77B7D4EF-BB7A-4CC4-BB3B-6988656C2CBC}"/>
               </a:ext>
             </a:extLst>
           </p:cNvPr>
@@ -8057,13 +9399,13 @@
           <p:nvPr/>
         </p:nvPicPr>
         <p:blipFill>
-          <a:blip xmlns:r="http://schemas.openxmlformats.org/officeDocument/2006/relationships" xmlns:a="http://schemas.openxmlformats.org/drawingml/2006/main" r:embed="R5c04acec91c24e88"/>
+          <a:blip xmlns:r="http://schemas.openxmlformats.org/officeDocument/2006/relationships" xmlns:a="http://schemas.openxmlformats.org/drawingml/2006/main" r:embed="R7a6b48f171864102"/>
           <a:stretch xmlns:a="http://schemas.openxmlformats.org/drawingml/2006/main"/>
         </p:blipFill>
         <p:spPr>
           <a:xfrm xmlns:a="http://schemas.openxmlformats.org/drawingml/2006/main">
-            <a:off x="514350" y="1875120"/>
-            <a:ext cx="6762750" cy="3584011"/>
+            <a:off x="655954" y="1619250"/>
+            <a:ext cx="6479541" cy="4095750"/>
           </a:xfrm>
           <a:prstGeom xmlns:a="http://schemas.openxmlformats.org/drawingml/2006/main" prst="rect">
             <a:avLst/>
@@ -8075,7 +9417,7 @@
           <p:cNvPr id="6" name="">
             <a:extLst xmlns:a="http://schemas.openxmlformats.org/drawingml/2006/main">
               <a:ext uri="{FF2B5EF4-FFF2-40B4-BE49-F238E27FC236}">
-                <a16:creationId xmlns:a16="http://schemas.microsoft.com/office/drawing/2014/main" id="{302796D1-BF95-4A41-8851-67A96BDC4E2B}"/>
+                <a16:creationId xmlns:a16="http://schemas.microsoft.com/office/drawing/2014/main" id="{8892A223-4E1E-43E4-BE4F-095EE1E693D4}"/>
               </a:ext>
             </a:extLst>
           </p:cNvPr>
@@ -8125,7 +9467,7 @@
           <p:cNvPr id="7" name="">
             <a:extLst xmlns:a="http://schemas.openxmlformats.org/drawingml/2006/main">
               <a:ext uri="{FF2B5EF4-FFF2-40B4-BE49-F238E27FC236}">
-                <a16:creationId xmlns:a16="http://schemas.microsoft.com/office/drawing/2014/main" id="{A9D997AC-A2D2-43E3-80C2-05D37869A4EE}"/>
+                <a16:creationId xmlns:a16="http://schemas.microsoft.com/office/drawing/2014/main" id="{87E94FEC-00D6-462C-BC3E-7F0B951B5998}"/>
               </a:ext>
             </a:extLst>
           </p:cNvPr>
@@ -8165,7 +9507,7 @@
                   <a:srgbClr val="536179"/>
                 </a:solidFill>
               </a:rPr>
-              <a:t>• Input accepts a PR number, then renders PR #, status, title, author, and branches.</a:t>
+              <a:t>• Strengths show what is already working in the repo.</a:t>
             </a:r>
           </a:p>
           <a:p xmlns:a="http://schemas.openxmlformats.org/drawingml/2006/main">
@@ -8182,7 +9524,7 @@
                   <a:srgbClr val="536179"/>
                 </a:solidFill>
               </a:rPr>
-              <a:t>• Recommendation, risk, overall score, changed files, additions, deletions, and check status are visible.</a:t>
+              <a:t>• Findings are grouped by severity and category.</a:t>
             </a:r>
           </a:p>
           <a:p xmlns:a="http://schemas.openxmlformats.org/drawingml/2006/main">
@@ -8199,7 +9541,7 @@
                   <a:srgbClr val="536179"/>
                 </a:solidFill>
               </a:rPr>
-              <a:t>• Summary explains the practical impact of the PR.</a:t>
+              <a:t>• Each finding includes evidence paths so the team can verify the claim.</a:t>
             </a:r>
           </a:p>
         </p:txBody>
@@ -8209,7 +9551,7 @@
           <p:cNvPr id="8" name="">
             <a:extLst xmlns:a="http://schemas.openxmlformats.org/drawingml/2006/main">
               <a:ext uri="{FF2B5EF4-FFF2-40B4-BE49-F238E27FC236}">
-                <a16:creationId xmlns:a16="http://schemas.microsoft.com/office/drawing/2014/main" id="{AB82E8A3-0618-4DC3-8922-4BB1E9231890}"/>
+                <a16:creationId xmlns:a16="http://schemas.microsoft.com/office/drawing/2014/main" id="{2E82D9B2-E6BF-404D-8310-FC1C38938EB9}"/>
               </a:ext>
             </a:extLst>
           </p:cNvPr>
@@ -8259,7 +9601,7 @@
           <p:cNvPr id="9" name="">
             <a:extLst xmlns:a="http://schemas.openxmlformats.org/drawingml/2006/main">
               <a:ext uri="{FF2B5EF4-FFF2-40B4-BE49-F238E27FC236}">
-                <a16:creationId xmlns:a16="http://schemas.microsoft.com/office/drawing/2014/main" id="{26EB49A6-8048-46EA-BD08-7B746029288F}"/>
+                <a16:creationId xmlns:a16="http://schemas.microsoft.com/office/drawing/2014/main" id="{C7C31D1F-5F07-45A3-A5E8-164A36B2915B}"/>
               </a:ext>
             </a:extLst>
           </p:cNvPr>
@@ -8299,7 +9641,7 @@
                   <a:srgbClr val="536179"/>
                 </a:solidFill>
               </a:rPr>
-              <a:t>• POST /api/v1/agent/sessions/:sessionId/pull-requests/:pullNumber/review.</a:t>
+              <a:t>• Specialist agents inspect architecture, code organization, security, scalability, and testing.</a:t>
             </a:r>
           </a:p>
           <a:p xmlns:a="http://schemas.openxmlformats.org/drawingml/2006/main">
@@ -8316,7 +9658,7 @@
                   <a:srgbClr val="536179"/>
                 </a:solidFill>
               </a:rPr>
-              <a:t>• Backend returns { repository, pullNumber, overallScore, review }.</a:t>
+              <a:t>• Agents return structured findings with severity, category, title, and evidence.</a:t>
             </a:r>
           </a:p>
           <a:p xmlns:a="http://schemas.openxmlformats.org/drawingml/2006/main">
@@ -8333,7 +9675,7 @@
                   <a:srgbClr val="536179"/>
                 </a:solidFill>
               </a:rPr>
-              <a:t>• Frontend unwraps response.data.review and displays nested pullRequest fields.</a:t>
+              <a:t>• Frontend renders each finding as a readable evidence card.</a:t>
             </a:r>
           </a:p>
         </p:txBody>
@@ -8343,7 +9685,7 @@
           <p:cNvPr id="10" name="">
             <a:extLst xmlns:a="http://schemas.openxmlformats.org/drawingml/2006/main">
               <a:ext uri="{FF2B5EF4-FFF2-40B4-BE49-F238E27FC236}">
-                <a16:creationId xmlns:a16="http://schemas.microsoft.com/office/drawing/2014/main" id="{7ECAD9F0-E92E-41D9-A6E0-FAEBF37FB813}"/>
+                <a16:creationId xmlns:a16="http://schemas.microsoft.com/office/drawing/2014/main" id="{DCA264D0-2F96-46D1-8B2E-0E7BD571A762}"/>
               </a:ext>
             </a:extLst>
           </p:cNvPr>
@@ -8391,7 +9733,7 @@
     </p:spTree>
     <p:extLst>
       <p:ext uri="{BB962C8B-B14F-4D97-AF65-F5344CB8AC3E}">
-        <p14:creationId xmlns:p14="http://schemas.microsoft.com/office/powerpoint/2010/main" val="353168049"/>
+        <p14:creationId xmlns:p14="http://schemas.microsoft.com/office/powerpoint/2010/main" val="143673607"/>
       </p:ext>
     </p:extLst>
   </p:cSld>
@@ -8422,7 +9764,7 @@
           <p:cNvPr id="11" name="">
             <a:extLst xmlns:a="http://schemas.openxmlformats.org/drawingml/2006/main">
               <a:ext uri="{FF2B5EF4-FFF2-40B4-BE49-F238E27FC236}">
-                <a16:creationId xmlns:a16="http://schemas.microsoft.com/office/drawing/2014/main" id="{BC42DC9E-5FBC-4431-A658-342F0D506DBF}"/>
+                <a16:creationId xmlns:a16="http://schemas.microsoft.com/office/drawing/2014/main" id="{EE17DB2E-BA5D-4E21-8379-3FC757C46E6F}"/>
               </a:ext>
             </a:extLst>
           </p:cNvPr>
@@ -8472,7 +9814,7 @@
           <p:cNvPr id="2" name="">
             <a:extLst xmlns:a="http://schemas.openxmlformats.org/drawingml/2006/main">
               <a:ext uri="{FF2B5EF4-FFF2-40B4-BE49-F238E27FC236}">
-                <a16:creationId xmlns:a16="http://schemas.microsoft.com/office/drawing/2014/main" id="{800CB976-7601-43B3-ADB5-71D8B58D31ED}"/>
+                <a16:creationId xmlns:a16="http://schemas.microsoft.com/office/drawing/2014/main" id="{4C914113-11E6-410E-90E2-E5E3593C489A}"/>
               </a:ext>
             </a:extLst>
           </p:cNvPr>
@@ -8512,7 +9854,7 @@
                   <a:srgbClr val="071126"/>
                 </a:solidFill>
               </a:rPr>
-              <a:t>PR Review details show evidence behind the decision</a:t>
+              <a:t>Repository Intelligence turns analysis into next actions</a:t>
             </a:r>
           </a:p>
         </p:txBody>
@@ -8522,7 +9864,7 @@
           <p:cNvPr id="3" name="">
             <a:extLst xmlns:a="http://schemas.openxmlformats.org/drawingml/2006/main">
               <a:ext uri="{FF2B5EF4-FFF2-40B4-BE49-F238E27FC236}">
-                <a16:creationId xmlns:a16="http://schemas.microsoft.com/office/drawing/2014/main" id="{93700B04-0D4A-4FD0-A0CF-9BF90075C32D}"/>
+                <a16:creationId xmlns:a16="http://schemas.microsoft.com/office/drawing/2014/main" id="{4C64DCEB-A30A-4ED0-817A-452ABE5D851E}"/>
               </a:ext>
             </a:extLst>
           </p:cNvPr>
@@ -8562,7 +9904,7 @@
                   <a:srgbClr val="536179"/>
                 </a:solidFill>
               </a:rPr>
-              <a:t>Scores, positives, testing assessment, checks, findings, and limitations explain the review quality.</a:t>
+              <a:t>The lower result sections capture additional findings and recommendations.</a:t>
             </a:r>
           </a:p>
         </p:txBody>
@@ -8572,7 +9914,7 @@
           <p:cNvPr id="4" name="">
             <a:extLst xmlns:a="http://schemas.openxmlformats.org/drawingml/2006/main">
               <a:ext uri="{FF2B5EF4-FFF2-40B4-BE49-F238E27FC236}">
-                <a16:creationId xmlns:a16="http://schemas.microsoft.com/office/drawing/2014/main" id="{C39927E5-0EB2-49DD-9DB4-8D0A1C6448FC}"/>
+                <a16:creationId xmlns:a16="http://schemas.microsoft.com/office/drawing/2014/main" id="{EADC3193-2E26-4161-8972-34A08C9C5259}"/>
               </a:ext>
             </a:extLst>
           </p:cNvPr>
@@ -8611,13 +9953,13 @@
           <p:nvPr/>
         </p:nvPicPr>
         <p:blipFill>
-          <a:blip xmlns:r="http://schemas.openxmlformats.org/officeDocument/2006/relationships" xmlns:a="http://schemas.openxmlformats.org/drawingml/2006/main" r:embed="R85a6509fa170460a"/>
+          <a:blip xmlns:r="http://schemas.openxmlformats.org/officeDocument/2006/relationships" xmlns:a="http://schemas.openxmlformats.org/drawingml/2006/main" r:embed="Rb74493a2ad9f425b"/>
           <a:stretch xmlns:a="http://schemas.openxmlformats.org/drawingml/2006/main"/>
         </p:blipFill>
         <p:spPr>
           <a:xfrm xmlns:a="http://schemas.openxmlformats.org/drawingml/2006/main">
-            <a:off x="640386" y="1619250"/>
-            <a:ext cx="6510678" cy="4095750"/>
+            <a:off x="640958" y="1619250"/>
+            <a:ext cx="6509534" cy="4095750"/>
           </a:xfrm>
           <a:prstGeom xmlns:a="http://schemas.openxmlformats.org/drawingml/2006/main" prst="rect">
             <a:avLst/>
@@ -8629,7 +9971,7 @@
           <p:cNvPr id="6" name="">
             <a:extLst xmlns:a="http://schemas.openxmlformats.org/drawingml/2006/main">
               <a:ext uri="{FF2B5EF4-FFF2-40B4-BE49-F238E27FC236}">
-                <a16:creationId xmlns:a16="http://schemas.microsoft.com/office/drawing/2014/main" id="{7F3F3385-17A2-41D8-9CBC-9FC584FE4D87}"/>
+                <a16:creationId xmlns:a16="http://schemas.microsoft.com/office/drawing/2014/main" id="{92122958-1D08-46F2-B6C4-505137029A22}"/>
               </a:ext>
             </a:extLst>
           </p:cNvPr>
@@ -8679,7 +10021,7 @@
           <p:cNvPr id="7" name="">
             <a:extLst xmlns:a="http://schemas.openxmlformats.org/drawingml/2006/main">
               <a:ext uri="{FF2B5EF4-FFF2-40B4-BE49-F238E27FC236}">
-                <a16:creationId xmlns:a16="http://schemas.microsoft.com/office/drawing/2014/main" id="{D08E17E3-B7E2-49A2-8372-88B2EF595D04}"/>
+                <a16:creationId xmlns:a16="http://schemas.microsoft.com/office/drawing/2014/main" id="{C554F4D8-AF47-4481-B078-20152E908F58}"/>
               </a:ext>
             </a:extLst>
           </p:cNvPr>
@@ -8719,7 +10061,7 @@
                   <a:srgbClr val="536179"/>
                 </a:solidFill>
               </a:rPr>
-              <a:t>• Score grid breaks the review into correctness, architecture, maintainability, security, performance, testing, and overall.</a:t>
+              <a:t>• Additional findings cover testing and dependency health.</a:t>
             </a:r>
           </a:p>
           <a:p xmlns:a="http://schemas.openxmlformats.org/drawingml/2006/main">
@@ -8736,7 +10078,7 @@
                   <a:srgbClr val="536179"/>
                 </a:solidFill>
               </a:rPr>
-              <a:t>• Files Reviewed and Positives show review scope and safe parts.</a:t>
+              <a:t>• Recommendations section is intended to convert findings into next steps.</a:t>
             </a:r>
           </a:p>
           <a:p xmlns:a="http://schemas.openxmlformats.org/drawingml/2006/main">
@@ -8753,7 +10095,7 @@
                   <a:srgbClr val="536179"/>
                 </a:solidFill>
               </a:rPr>
-              <a:t>• Checks and Limitations make API access constraints visible.</a:t>
+              <a:t>• Raw analysis response is available for deeper debugging or backend validation.</a:t>
             </a:r>
           </a:p>
         </p:txBody>
@@ -8763,7 +10105,7 @@
           <p:cNvPr id="8" name="">
             <a:extLst xmlns:a="http://schemas.openxmlformats.org/drawingml/2006/main">
               <a:ext uri="{FF2B5EF4-FFF2-40B4-BE49-F238E27FC236}">
-                <a16:creationId xmlns:a16="http://schemas.microsoft.com/office/drawing/2014/main" id="{CA5C2585-6706-48D6-9D1A-60FCBEEF8C29}"/>
+                <a16:creationId xmlns:a16="http://schemas.microsoft.com/office/drawing/2014/main" id="{F8D4B344-A363-4AFA-9FCE-16B0A099E797}"/>
               </a:ext>
             </a:extLst>
           </p:cNvPr>
@@ -8813,7 +10155,7 @@
           <p:cNvPr id="9" name="">
             <a:extLst xmlns:a="http://schemas.openxmlformats.org/drawingml/2006/main">
               <a:ext uri="{FF2B5EF4-FFF2-40B4-BE49-F238E27FC236}">
-                <a16:creationId xmlns:a16="http://schemas.microsoft.com/office/drawing/2014/main" id="{D9FCFCFB-91EF-4024-9D59-34D67E3121E3}"/>
+                <a16:creationId xmlns:a16="http://schemas.microsoft.com/office/drawing/2014/main" id="{6E475187-CEC2-454F-BBC6-DE1CE247E009}"/>
               </a:ext>
             </a:extLst>
           </p:cNvPr>
@@ -8853,7 +10195,7 @@
                   <a:srgbClr val="536179"/>
                 </a:solidFill>
               </a:rPr>
-              <a:t>• PR review agent reads PR metadata, changed files, diff, checks, and repository evidence.</a:t>
+              <a:t>• Aggregator combines specialist output into one repository report.</a:t>
             </a:r>
           </a:p>
           <a:p xmlns:a="http://schemas.openxmlformats.org/drawingml/2006/main">
@@ -8870,7 +10212,7 @@
                   <a:srgbClr val="536179"/>
                 </a:solidFill>
               </a:rPr>
-              <a:t>• If check runs are inaccessible, backend returns checks.status = unavailable with notes.</a:t>
+              <a:t>• Frontend should render recommendation objects into titles and descriptions.</a:t>
             </a:r>
           </a:p>
           <a:p xmlns:a="http://schemas.openxmlformats.org/drawingml/2006/main">
@@ -8887,7 +10229,7 @@
                   <a:srgbClr val="536179"/>
                 </a:solidFill>
               </a:rPr>
-              <a:t>• Frontend renders findings and limitations instead of hiding missing evidence.</a:t>
+              <a:t>• Raw response helps diagnose mapping issues such as [object Object].</a:t>
             </a:r>
           </a:p>
         </p:txBody>
@@ -8897,7 +10239,7 @@
           <p:cNvPr id="10" name="">
             <a:extLst xmlns:a="http://schemas.openxmlformats.org/drawingml/2006/main">
               <a:ext uri="{FF2B5EF4-FFF2-40B4-BE49-F238E27FC236}">
-                <a16:creationId xmlns:a16="http://schemas.microsoft.com/office/drawing/2014/main" id="{5A483286-5898-4667-907A-CB304EAC155B}"/>
+                <a16:creationId xmlns:a16="http://schemas.microsoft.com/office/drawing/2014/main" id="{FEE7088E-E29A-42DF-87DB-6DD76EED912F}"/>
               </a:ext>
             </a:extLst>
           </p:cNvPr>
@@ -8945,7 +10287,7 @@
     </p:spTree>
     <p:extLst>
       <p:ext uri="{BB962C8B-B14F-4D97-AF65-F5344CB8AC3E}">
-        <p14:creationId xmlns:p14="http://schemas.microsoft.com/office/powerpoint/2010/main" val="770487371"/>
+        <p14:creationId xmlns:p14="http://schemas.microsoft.com/office/powerpoint/2010/main" val="1186082913"/>
       </p:ext>
     </p:extLst>
   </p:cSld>
@@ -8976,7 +10318,7 @@
           <p:cNvPr id="11" name="">
             <a:extLst xmlns:a="http://schemas.openxmlformats.org/drawingml/2006/main">
               <a:ext uri="{FF2B5EF4-FFF2-40B4-BE49-F238E27FC236}">
-                <a16:creationId xmlns:a16="http://schemas.microsoft.com/office/drawing/2014/main" id="{BE59395E-760D-49E0-B675-EBAA83818DC4}"/>
+                <a16:creationId xmlns:a16="http://schemas.microsoft.com/office/drawing/2014/main" id="{E0444A53-1F48-494C-9E06-2BCAEDEEB7E1}"/>
               </a:ext>
             </a:extLst>
           </p:cNvPr>
@@ -9026,7 +10368,7 @@
           <p:cNvPr id="2" name="">
             <a:extLst xmlns:a="http://schemas.openxmlformats.org/drawingml/2006/main">
               <a:ext uri="{FF2B5EF4-FFF2-40B4-BE49-F238E27FC236}">
-                <a16:creationId xmlns:a16="http://schemas.microsoft.com/office/drawing/2014/main" id="{863AE824-71A4-49C4-82F1-333D131F03A8}"/>
+                <a16:creationId xmlns:a16="http://schemas.microsoft.com/office/drawing/2014/main" id="{DF8D00C9-D50E-465A-B95A-253D1916FDED}"/>
               </a:ext>
             </a:extLst>
           </p:cNvPr>
@@ -9066,7 +10408,7 @@
                   <a:srgbClr val="071126"/>
                 </a:solidFill>
               </a:rPr>
-              <a:t>Issue Analyzer turns an issue into an implementation brief</a:t>
+              <a:t>PR Review summarizes the pull request decision</a:t>
             </a:r>
           </a:p>
         </p:txBody>
@@ -9076,7 +10418,7 @@
           <p:cNvPr id="3" name="">
             <a:extLst xmlns:a="http://schemas.openxmlformats.org/drawingml/2006/main">
               <a:ext uri="{FF2B5EF4-FFF2-40B4-BE49-F238E27FC236}">
-                <a16:creationId xmlns:a16="http://schemas.microsoft.com/office/drawing/2014/main" id="{7C5670FF-BDFC-475C-B40D-3264937838AC}"/>
+                <a16:creationId xmlns:a16="http://schemas.microsoft.com/office/drawing/2014/main" id="{62978589-9BE8-42A5-972C-DC87003C7EE3}"/>
               </a:ext>
             </a:extLst>
           </p:cNvPr>
@@ -9116,7 +10458,7 @@
                   <a:srgbClr val="536179"/>
                 </a:solidFill>
               </a:rPr>
-              <a:t>The first section captures issue identity, readiness, confidence, summary, and problem statement.</a:t>
+              <a:t>The top section shows the decision fields the team needs first.</a:t>
             </a:r>
           </a:p>
         </p:txBody>
@@ -9126,7 +10468,7 @@
           <p:cNvPr id="4" name="">
             <a:extLst xmlns:a="http://schemas.openxmlformats.org/drawingml/2006/main">
               <a:ext uri="{FF2B5EF4-FFF2-40B4-BE49-F238E27FC236}">
-                <a16:creationId xmlns:a16="http://schemas.microsoft.com/office/drawing/2014/main" id="{FC10ECE0-673B-4BD5-84C9-A98DB78AA7D8}"/>
+                <a16:creationId xmlns:a16="http://schemas.microsoft.com/office/drawing/2014/main" id="{9B248CEF-ABA1-474A-9067-8313F67DEBCC}"/>
               </a:ext>
             </a:extLst>
           </p:cNvPr>
@@ -9165,13 +10507,13 @@
           <p:nvPr/>
         </p:nvPicPr>
         <p:blipFill>
-          <a:blip xmlns:r="http://schemas.openxmlformats.org/officeDocument/2006/relationships" xmlns:a="http://schemas.openxmlformats.org/drawingml/2006/main" r:embed="R94754b50ff1b4487"/>
+          <a:blip xmlns:r="http://schemas.openxmlformats.org/officeDocument/2006/relationships" xmlns:a="http://schemas.openxmlformats.org/drawingml/2006/main" r:embed="R679fc088411e45fa"/>
           <a:stretch xmlns:a="http://schemas.openxmlformats.org/drawingml/2006/main"/>
         </p:blipFill>
         <p:spPr>
           <a:xfrm xmlns:a="http://schemas.openxmlformats.org/drawingml/2006/main">
-            <a:off x="514350" y="1860270"/>
-            <a:ext cx="6762750" cy="3613710"/>
+            <a:off x="514350" y="1875120"/>
+            <a:ext cx="6762750" cy="3584011"/>
           </a:xfrm>
           <a:prstGeom xmlns:a="http://schemas.openxmlformats.org/drawingml/2006/main" prst="rect">
             <a:avLst/>
@@ -9183,7 +10525,7 @@
           <p:cNvPr id="6" name="">
             <a:extLst xmlns:a="http://schemas.openxmlformats.org/drawingml/2006/main">
               <a:ext uri="{FF2B5EF4-FFF2-40B4-BE49-F238E27FC236}">
-                <a16:creationId xmlns:a16="http://schemas.microsoft.com/office/drawing/2014/main" id="{83645BFF-AE9B-4CFC-A24B-9FD622958A03}"/>
+                <a16:creationId xmlns:a16="http://schemas.microsoft.com/office/drawing/2014/main" id="{B99B63B0-1595-4805-93E4-C150A0CF179E}"/>
               </a:ext>
             </a:extLst>
           </p:cNvPr>
@@ -9233,7 +10575,7 @@
           <p:cNvPr id="7" name="">
             <a:extLst xmlns:a="http://schemas.openxmlformats.org/drawingml/2006/main">
               <a:ext uri="{FF2B5EF4-FFF2-40B4-BE49-F238E27FC236}">
-                <a16:creationId xmlns:a16="http://schemas.microsoft.com/office/drawing/2014/main" id="{634FC42C-828E-4326-B5D4-124C6F68D9A3}"/>
+                <a16:creationId xmlns:a16="http://schemas.microsoft.com/office/drawing/2014/main" id="{6CE932D3-3C9E-4C3A-85D6-B6794718773C}"/>
               </a:ext>
             </a:extLst>
           </p:cNvPr>
@@ -9273,7 +10615,7 @@
                   <a:srgbClr val="536179"/>
                 </a:solidFill>
               </a:rPr>
-              <a:t>• Issue number, type, readiness, and confidence are visible at the top.</a:t>
+              <a:t>• Input accepts a PR number, then renders PR #, status, title, author, and branches.</a:t>
             </a:r>
           </a:p>
           <a:p xmlns:a="http://schemas.openxmlformats.org/drawingml/2006/main">
@@ -9290,7 +10632,7 @@
                   <a:srgbClr val="536179"/>
                 </a:solidFill>
               </a:rPr>
-              <a:t>• Issue title and author identify the source request.</a:t>
+              <a:t>• Recommendation, risk, overall score, changed files, additions, deletions, and check status are visible.</a:t>
             </a:r>
           </a:p>
           <a:p xmlns:a="http://schemas.openxmlformats.org/drawingml/2006/main">
@@ -9307,7 +10649,7 @@
                   <a:srgbClr val="536179"/>
                 </a:solidFill>
               </a:rPr>
-              <a:t>• Summary and Problem Statement translate the issue into engineering language.</a:t>
+              <a:t>• Summary explains the practical impact of the PR.</a:t>
             </a:r>
           </a:p>
         </p:txBody>
@@ -9317,7 +10659,7 @@
           <p:cNvPr id="8" name="">
             <a:extLst xmlns:a="http://schemas.openxmlformats.org/drawingml/2006/main">
               <a:ext uri="{FF2B5EF4-FFF2-40B4-BE49-F238E27FC236}">
-                <a16:creationId xmlns:a16="http://schemas.microsoft.com/office/drawing/2014/main" id="{D18C624F-084C-4CF3-A96E-E36F7DE4F541}"/>
+                <a16:creationId xmlns:a16="http://schemas.microsoft.com/office/drawing/2014/main" id="{75A672FD-8A77-4C17-93E2-FF547C715467}"/>
               </a:ext>
             </a:extLst>
           </p:cNvPr>
@@ -9367,7 +10709,7 @@
           <p:cNvPr id="9" name="">
             <a:extLst xmlns:a="http://schemas.openxmlformats.org/drawingml/2006/main">
               <a:ext uri="{FF2B5EF4-FFF2-40B4-BE49-F238E27FC236}">
-                <a16:creationId xmlns:a16="http://schemas.microsoft.com/office/drawing/2014/main" id="{686C549C-567F-48AF-A4E1-B5B5CDFD52B0}"/>
+                <a16:creationId xmlns:a16="http://schemas.microsoft.com/office/drawing/2014/main" id="{21141238-18F9-4817-928C-2C0D0DAB2558}"/>
               </a:ext>
             </a:extLst>
           </p:cNvPr>
@@ -9407,7 +10749,7 @@
                   <a:srgbClr val="536179"/>
                 </a:solidFill>
               </a:rPr>
-              <a:t>• POST /api/v1/agent/sessions/:sessionId/issues/:issueNumber/analyze.</a:t>
+              <a:t>• POST /api/v1/agent/sessions/:sessionId/pull-requests/:pullNumber/review.</a:t>
             </a:r>
           </a:p>
           <a:p xmlns:a="http://schemas.openxmlformats.org/drawingml/2006/main">
@@ -9424,7 +10766,7 @@
                   <a:srgbClr val="536179"/>
                 </a:solidFill>
               </a:rPr>
-              <a:t>• Backend returns { issueNumber, analysis }.</a:t>
+              <a:t>• Backend returns { repository, pullNumber, overallScore, review }.</a:t>
             </a:r>
           </a:p>
           <a:p xmlns:a="http://schemas.openxmlformats.org/drawingml/2006/main">
@@ -9441,7 +10783,7 @@
                   <a:srgbClr val="536179"/>
                 </a:solidFill>
               </a:rPr>
-              <a:t>• Frontend unwraps response.data.analysis and binds nested fields.</a:t>
+              <a:t>• Frontend unwraps response.data.review and displays nested pullRequest fields.</a:t>
             </a:r>
           </a:p>
         </p:txBody>
@@ -9451,7 +10793,7 @@
           <p:cNvPr id="10" name="">
             <a:extLst xmlns:a="http://schemas.openxmlformats.org/drawingml/2006/main">
               <a:ext uri="{FF2B5EF4-FFF2-40B4-BE49-F238E27FC236}">
-                <a16:creationId xmlns:a16="http://schemas.microsoft.com/office/drawing/2014/main" id="{564FA8AE-F627-4857-9285-B10FDB58689A}"/>
+                <a16:creationId xmlns:a16="http://schemas.microsoft.com/office/drawing/2014/main" id="{339E5402-8B15-4730-8859-31C624886E8B}"/>
               </a:ext>
             </a:extLst>
           </p:cNvPr>
@@ -9499,7 +10841,7 @@
     </p:spTree>
     <p:extLst>
       <p:ext uri="{BB962C8B-B14F-4D97-AF65-F5344CB8AC3E}">
-        <p14:creationId xmlns:p14="http://schemas.microsoft.com/office/powerpoint/2010/main" val="1477170113"/>
+        <p14:creationId xmlns:p14="http://schemas.microsoft.com/office/powerpoint/2010/main" val="219357318"/>
       </p:ext>
     </p:extLst>
   </p:cSld>
@@ -9530,7 +10872,7 @@
           <p:cNvPr id="11" name="">
             <a:extLst xmlns:a="http://schemas.openxmlformats.org/drawingml/2006/main">
               <a:ext uri="{FF2B5EF4-FFF2-40B4-BE49-F238E27FC236}">
-                <a16:creationId xmlns:a16="http://schemas.microsoft.com/office/drawing/2014/main" id="{35342CC2-63F5-4F00-B98A-2D065397FDC5}"/>
+                <a16:creationId xmlns:a16="http://schemas.microsoft.com/office/drawing/2014/main" id="{1269D3CE-240C-4562-89C7-AF36C902EA22}"/>
               </a:ext>
             </a:extLst>
           </p:cNvPr>
@@ -9580,7 +10922,7 @@
           <p:cNvPr id="2" name="">
             <a:extLst xmlns:a="http://schemas.openxmlformats.org/drawingml/2006/main">
               <a:ext uri="{FF2B5EF4-FFF2-40B4-BE49-F238E27FC236}">
-                <a16:creationId xmlns:a16="http://schemas.microsoft.com/office/drawing/2014/main" id="{E26370E4-1008-46E5-A2F0-853708423F85}"/>
+                <a16:creationId xmlns:a16="http://schemas.microsoft.com/office/drawing/2014/main" id="{E87832C9-97CC-4BFE-9FF1-F612FA375475}"/>
               </a:ext>
             </a:extLst>
           </p:cNvPr>
@@ -9620,7 +10962,7 @@
                   <a:srgbClr val="071126"/>
                 </a:solidFill>
               </a:rPr>
-              <a:t>Issue Analyzer separates explicit, inferred, and missing requirements</a:t>
+              <a:t>PR Review details show evidence behind the decision</a:t>
             </a:r>
           </a:p>
         </p:txBody>
@@ -9630,7 +10972,7 @@
           <p:cNvPr id="3" name="">
             <a:extLst xmlns:a="http://schemas.openxmlformats.org/drawingml/2006/main">
               <a:ext uri="{FF2B5EF4-FFF2-40B4-BE49-F238E27FC236}">
-                <a16:creationId xmlns:a16="http://schemas.microsoft.com/office/drawing/2014/main" id="{A6B65CD8-3557-46B9-8C4E-AB32A907403C}"/>
+                <a16:creationId xmlns:a16="http://schemas.microsoft.com/office/drawing/2014/main" id="{F148EF40-3732-4469-95EC-D16C9225D326}"/>
               </a:ext>
             </a:extLst>
           </p:cNvPr>
@@ -9670,7 +11012,7 @@
                   <a:srgbClr val="536179"/>
                 </a:solidFill>
               </a:rPr>
-              <a:t>This helps the team know what is clear and what must be clarified before implementation.</a:t>
+              <a:t>Scores, positives, testing assessment, checks, findings, and limitations explain the review quality.</a:t>
             </a:r>
           </a:p>
         </p:txBody>
@@ -9680,7 +11022,7 @@
           <p:cNvPr id="4" name="">
             <a:extLst xmlns:a="http://schemas.openxmlformats.org/drawingml/2006/main">
               <a:ext uri="{FF2B5EF4-FFF2-40B4-BE49-F238E27FC236}">
-                <a16:creationId xmlns:a16="http://schemas.microsoft.com/office/drawing/2014/main" id="{2ED4C6D2-7AA6-4646-BFFC-8FFE3E6DA5AE}"/>
+                <a16:creationId xmlns:a16="http://schemas.microsoft.com/office/drawing/2014/main" id="{0D034DEC-2E29-4A5D-93C1-61BEFF8E1B60}"/>
               </a:ext>
             </a:extLst>
           </p:cNvPr>
@@ -9719,13 +11061,13 @@
           <p:nvPr/>
         </p:nvPicPr>
         <p:blipFill>
-          <a:blip xmlns:r="http://schemas.openxmlformats.org/officeDocument/2006/relationships" xmlns:a="http://schemas.openxmlformats.org/drawingml/2006/main" r:embed="Rbdb66a56c7f44d7d"/>
+          <a:blip xmlns:r="http://schemas.openxmlformats.org/officeDocument/2006/relationships" xmlns:a="http://schemas.openxmlformats.org/drawingml/2006/main" r:embed="R0e270dd10ca54af3"/>
           <a:stretch xmlns:a="http://schemas.openxmlformats.org/drawingml/2006/main"/>
         </p:blipFill>
         <p:spPr>
           <a:xfrm xmlns:a="http://schemas.openxmlformats.org/drawingml/2006/main">
-            <a:off x="548509" y="1619250"/>
-            <a:ext cx="6694433" cy="4095750"/>
+            <a:off x="640386" y="1619250"/>
+            <a:ext cx="6510678" cy="4095750"/>
           </a:xfrm>
           <a:prstGeom xmlns:a="http://schemas.openxmlformats.org/drawingml/2006/main" prst="rect">
             <a:avLst/>
@@ -9737,7 +11079,7 @@
           <p:cNvPr id="6" name="">
             <a:extLst xmlns:a="http://schemas.openxmlformats.org/drawingml/2006/main">
               <a:ext uri="{FF2B5EF4-FFF2-40B4-BE49-F238E27FC236}">
-                <a16:creationId xmlns:a16="http://schemas.microsoft.com/office/drawing/2014/main" id="{11302F7E-40C1-4EA2-81D8-47AD41F085A9}"/>
+                <a16:creationId xmlns:a16="http://schemas.microsoft.com/office/drawing/2014/main" id="{54BD4475-EE5A-4BB3-944C-9FAFCC5BC228}"/>
               </a:ext>
             </a:extLst>
           </p:cNvPr>
@@ -9787,7 +11129,7 @@
           <p:cNvPr id="7" name="">
             <a:extLst xmlns:a="http://schemas.openxmlformats.org/drawingml/2006/main">
               <a:ext uri="{FF2B5EF4-FFF2-40B4-BE49-F238E27FC236}">
-                <a16:creationId xmlns:a16="http://schemas.microsoft.com/office/drawing/2014/main" id="{1D2392FA-C02C-4A06-9EC1-164ED4A059C6}"/>
+                <a16:creationId xmlns:a16="http://schemas.microsoft.com/office/drawing/2014/main" id="{2E84FB7F-FD38-479B-B838-DC2C88B36B8B}"/>
               </a:ext>
             </a:extLst>
           </p:cNvPr>
@@ -9827,7 +11169,7 @@
                   <a:srgbClr val="536179"/>
                 </a:solidFill>
               </a:rPr>
-              <a:t>• Root cause section states whether a bug-style hypothesis applies.</a:t>
+              <a:t>• Score grid breaks the review into correctness, architecture, maintainability, security, performance, testing, and overall.</a:t>
             </a:r>
           </a:p>
           <a:p xmlns:a="http://schemas.openxmlformats.org/drawingml/2006/main">
@@ -9844,7 +11186,7 @@
                   <a:srgbClr val="536179"/>
                 </a:solidFill>
               </a:rPr>
-              <a:t>• Explicit requirements are separated from inferred and missing requirements.</a:t>
+              <a:t>• Files Reviewed and Positives show review scope and safe parts.</a:t>
             </a:r>
           </a:p>
           <a:p xmlns:a="http://schemas.openxmlformats.org/drawingml/2006/main">
@@ -9861,7 +11203,7 @@
                   <a:srgbClr val="536179"/>
                 </a:solidFill>
               </a:rPr>
-              <a:t>• Acceptance criteria and affected areas become visible implementation inputs.</a:t>
+              <a:t>• Checks and Limitations make API access constraints visible.</a:t>
             </a:r>
           </a:p>
         </p:txBody>
@@ -9871,7 +11213,7 @@
           <p:cNvPr id="8" name="">
             <a:extLst xmlns:a="http://schemas.openxmlformats.org/drawingml/2006/main">
               <a:ext uri="{FF2B5EF4-FFF2-40B4-BE49-F238E27FC236}">
-                <a16:creationId xmlns:a16="http://schemas.microsoft.com/office/drawing/2014/main" id="{5D5F5C88-082A-4A0F-AD49-ECCC28DC0302}"/>
+                <a16:creationId xmlns:a16="http://schemas.microsoft.com/office/drawing/2014/main" id="{3039B521-5A34-46DE-A283-1E41176E2066}"/>
               </a:ext>
             </a:extLst>
           </p:cNvPr>
@@ -9921,7 +11263,7 @@
           <p:cNvPr id="9" name="">
             <a:extLst xmlns:a="http://schemas.openxmlformats.org/drawingml/2006/main">
               <a:ext uri="{FF2B5EF4-FFF2-40B4-BE49-F238E27FC236}">
-                <a16:creationId xmlns:a16="http://schemas.microsoft.com/office/drawing/2014/main" id="{B1A26AEC-6CD9-4C06-8CD4-77821FDD503A}"/>
+                <a16:creationId xmlns:a16="http://schemas.microsoft.com/office/drawing/2014/main" id="{65A63832-F5B7-43C5-960A-E4E9A0D0CCDB}"/>
               </a:ext>
             </a:extLst>
           </p:cNvPr>
@@ -9961,7 +11303,7 @@
                   <a:srgbClr val="536179"/>
                 </a:solidFill>
               </a:rPr>
-              <a:t>• Issue analyzer agent reads issue body, comments, labels, and repository files.</a:t>
+              <a:t>• PR review agent reads PR metadata, changed files, diff, checks, and repository evidence.</a:t>
             </a:r>
           </a:p>
           <a:p xmlns:a="http://schemas.openxmlformats.org/drawingml/2006/main">
@@ -9978,7 +11320,7 @@
                   <a:srgbClr val="536179"/>
                 </a:solidFill>
               </a:rPr>
-              <a:t>• Schema groups requirements as explicit, inferred, and missing.</a:t>
+              <a:t>• If check runs are inaccessible, backend returns checks.status = unavailable with notes.</a:t>
             </a:r>
           </a:p>
           <a:p xmlns:a="http://schemas.openxmlformats.org/drawingml/2006/main">
@@ -9995,7 +11337,7 @@
                   <a:srgbClr val="536179"/>
                 </a:solidFill>
               </a:rPr>
-              <a:t>• Affected areas include reasons and evidence paths from repository inspection.</a:t>
+              <a:t>• Frontend renders findings and limitations instead of hiding missing evidence.</a:t>
             </a:r>
           </a:p>
         </p:txBody>
@@ -10005,7 +11347,7 @@
           <p:cNvPr id="10" name="">
             <a:extLst xmlns:a="http://schemas.openxmlformats.org/drawingml/2006/main">
               <a:ext uri="{FF2B5EF4-FFF2-40B4-BE49-F238E27FC236}">
-                <a16:creationId xmlns:a16="http://schemas.microsoft.com/office/drawing/2014/main" id="{10E795C7-B35B-404D-BDC1-7338E74136B8}"/>
+                <a16:creationId xmlns:a16="http://schemas.microsoft.com/office/drawing/2014/main" id="{A95877C9-9377-4E19-AA18-A439137C11CC}"/>
               </a:ext>
             </a:extLst>
           </p:cNvPr>
@@ -10053,7 +11395,7 @@
     </p:spTree>
     <p:extLst>
       <p:ext uri="{BB962C8B-B14F-4D97-AF65-F5344CB8AC3E}">
-        <p14:creationId xmlns:p14="http://schemas.microsoft.com/office/powerpoint/2010/main" val="411842778"/>
+        <p14:creationId xmlns:p14="http://schemas.microsoft.com/office/powerpoint/2010/main" val="1904411507"/>
       </p:ext>
     </p:extLst>
   </p:cSld>
